--- a/workshop/copilot-app-book-app-workshop.pptx
+++ b/workshop/copilot-app-book-app-workshop.pptx
@@ -29,9 +29,12 @@
     <p:sldId id="277" r:id="rId23"/>
     <p:sldId id="278" r:id="rId24"/>
     <p:sldId id="279" r:id="rId25"/>
+    <p:sldId id="280" r:id="rId26"/>
+    <p:sldId id="281" r:id="rId27"/>
+    <p:sldId id="282" r:id="rId28"/>
   </p:sldIdLst>
   <p:notesMasterIdLst>
-    <p:notesMasterId r:id="rId26"/>
+    <p:notesMasterId r:id="rId29"/>
   </p:notesMasterIdLst>
   <p:sldSz cx="12191695" cy="6858000"/>
   <p:notesSz cx="6858000" cy="12191695"/>
@@ -1957,6 +1960,270 @@
             <a:fld id="{F7021451-1387-4CA6-816F-3879F97B5CBC}" type="slidenum">
               <a:rPr lang="en-US"/>
               <a:t>24</a:t>
+            </a:fld>
+            <a:endParaRPr lang="en-US"/>
+          </a:p>
+        </p:txBody>
+      </p:sp>
+    </p:spTree>
+    <p:extLst>
+      <p:ext uri="{BB962C8B-B14F-4D97-AF65-F5344CB8AC3E}">
+        <p14:creationId xmlns:p14="http://schemas.microsoft.com/office/powerpoint/2010/main" val="1024086991"/>
+      </p:ext>
+    </p:extLst>
+  </p:cSld>
+  <p:clrMapOvr>
+    <a:masterClrMapping/>
+  </p:clrMapOvr>
+</p:notes>
+</file>
+
+<file path=ppt/notesSlides/notesSlide25.xml><?xml version="1.0" encoding="utf-8"?>
+<p:notes xmlns:a="http://schemas.openxmlformats.org/drawingml/2006/main" xmlns:r="http://schemas.openxmlformats.org/officeDocument/2006/relationships" xmlns:p="http://schemas.openxmlformats.org/presentationml/2006/main">
+  <p:cSld>
+    <p:spTree>
+      <p:nvGrpSpPr>
+        <p:cNvPr id="1" name=""/>
+        <p:cNvGrpSpPr/>
+        <p:nvPr/>
+      </p:nvGrpSpPr>
+      <p:grpSpPr>
+        <a:xfrm>
+          <a:off x="0" y="0"/>
+          <a:ext cx="0" cy="0"/>
+          <a:chOff x="0" y="0"/>
+          <a:chExt cx="0" cy="0"/>
+        </a:xfrm>
+      </p:grpSpPr>
+      <p:sp>
+        <p:nvSpPr>
+          <p:cNvPr id="2" name="Slide Image Placeholder 1"/>
+          <p:cNvSpPr>
+            <a:spLocks noGrp="1" noRot="1" noChangeAspect="1"/>
+          </p:cNvSpPr>
+          <p:nvPr>
+            <p:ph type="sldImg"/>
+          </p:nvPr>
+        </p:nvSpPr>
+        <p:spPr/>
+      </p:sp>
+      <p:sp>
+        <p:nvSpPr>
+          <p:cNvPr id="3" name="Notes Placeholder 2"/>
+          <p:cNvSpPr>
+            <a:spLocks noGrp="1"/>
+          </p:cNvSpPr>
+          <p:nvPr>
+            <p:ph type="body" idx="1"/>
+          </p:nvPr>
+        </p:nvSpPr>
+        <p:spPr/>
+        <p:txBody>
+          <a:bodyPr/>
+          <a:lstStyle/>
+          <a:p>
+            <a:r>
+              <a:rPr lang="en-US" dirty="0"/>
+              <a:t/>
+            </a:r>
+            <a:endParaRPr lang="en-US" dirty="0"/>
+          </a:p>
+        </p:txBody>
+      </p:sp>
+      <p:sp>
+        <p:nvSpPr>
+          <p:cNvPr id="4" name="Slide Number Placeholder 3"/>
+          <p:cNvSpPr>
+            <a:spLocks noGrp="1"/>
+          </p:cNvSpPr>
+          <p:nvPr>
+            <p:ph type="sldNum" sz="quarter" idx="10"/>
+          </p:nvPr>
+        </p:nvSpPr>
+        <p:spPr/>
+        <p:txBody>
+          <a:bodyPr/>
+          <a:lstStyle/>
+          <a:p>
+            <a:fld id="{F7021451-1387-4CA6-816F-3879F97B5CBC}" type="slidenum">
+              <a:rPr lang="en-US"/>
+              <a:t>25</a:t>
+            </a:fld>
+            <a:endParaRPr lang="en-US"/>
+          </a:p>
+        </p:txBody>
+      </p:sp>
+    </p:spTree>
+    <p:extLst>
+      <p:ext uri="{BB962C8B-B14F-4D97-AF65-F5344CB8AC3E}">
+        <p14:creationId xmlns:p14="http://schemas.microsoft.com/office/powerpoint/2010/main" val="1024086991"/>
+      </p:ext>
+    </p:extLst>
+  </p:cSld>
+  <p:clrMapOvr>
+    <a:masterClrMapping/>
+  </p:clrMapOvr>
+</p:notes>
+</file>
+
+<file path=ppt/notesSlides/notesSlide26.xml><?xml version="1.0" encoding="utf-8"?>
+<p:notes xmlns:a="http://schemas.openxmlformats.org/drawingml/2006/main" xmlns:r="http://schemas.openxmlformats.org/officeDocument/2006/relationships" xmlns:p="http://schemas.openxmlformats.org/presentationml/2006/main">
+  <p:cSld>
+    <p:spTree>
+      <p:nvGrpSpPr>
+        <p:cNvPr id="1" name=""/>
+        <p:cNvGrpSpPr/>
+        <p:nvPr/>
+      </p:nvGrpSpPr>
+      <p:grpSpPr>
+        <a:xfrm>
+          <a:off x="0" y="0"/>
+          <a:ext cx="0" cy="0"/>
+          <a:chOff x="0" y="0"/>
+          <a:chExt cx="0" cy="0"/>
+        </a:xfrm>
+      </p:grpSpPr>
+      <p:sp>
+        <p:nvSpPr>
+          <p:cNvPr id="2" name="Slide Image Placeholder 1"/>
+          <p:cNvSpPr>
+            <a:spLocks noGrp="1" noRot="1" noChangeAspect="1"/>
+          </p:cNvSpPr>
+          <p:nvPr>
+            <p:ph type="sldImg"/>
+          </p:nvPr>
+        </p:nvSpPr>
+        <p:spPr/>
+      </p:sp>
+      <p:sp>
+        <p:nvSpPr>
+          <p:cNvPr id="3" name="Notes Placeholder 2"/>
+          <p:cNvSpPr>
+            <a:spLocks noGrp="1"/>
+          </p:cNvSpPr>
+          <p:nvPr>
+            <p:ph type="body" idx="1"/>
+          </p:nvPr>
+        </p:nvSpPr>
+        <p:spPr/>
+        <p:txBody>
+          <a:bodyPr/>
+          <a:lstStyle/>
+          <a:p>
+            <a:r>
+              <a:rPr lang="en-US" dirty="0"/>
+              <a:t/>
+            </a:r>
+            <a:endParaRPr lang="en-US" dirty="0"/>
+          </a:p>
+        </p:txBody>
+      </p:sp>
+      <p:sp>
+        <p:nvSpPr>
+          <p:cNvPr id="4" name="Slide Number Placeholder 3"/>
+          <p:cNvSpPr>
+            <a:spLocks noGrp="1"/>
+          </p:cNvSpPr>
+          <p:nvPr>
+            <p:ph type="sldNum" sz="quarter" idx="10"/>
+          </p:nvPr>
+        </p:nvSpPr>
+        <p:spPr/>
+        <p:txBody>
+          <a:bodyPr/>
+          <a:lstStyle/>
+          <a:p>
+            <a:fld id="{F7021451-1387-4CA6-816F-3879F97B5CBC}" type="slidenum">
+              <a:rPr lang="en-US"/>
+              <a:t>26</a:t>
+            </a:fld>
+            <a:endParaRPr lang="en-US"/>
+          </a:p>
+        </p:txBody>
+      </p:sp>
+    </p:spTree>
+    <p:extLst>
+      <p:ext uri="{BB962C8B-B14F-4D97-AF65-F5344CB8AC3E}">
+        <p14:creationId xmlns:p14="http://schemas.microsoft.com/office/powerpoint/2010/main" val="1024086991"/>
+      </p:ext>
+    </p:extLst>
+  </p:cSld>
+  <p:clrMapOvr>
+    <a:masterClrMapping/>
+  </p:clrMapOvr>
+</p:notes>
+</file>
+
+<file path=ppt/notesSlides/notesSlide27.xml><?xml version="1.0" encoding="utf-8"?>
+<p:notes xmlns:a="http://schemas.openxmlformats.org/drawingml/2006/main" xmlns:r="http://schemas.openxmlformats.org/officeDocument/2006/relationships" xmlns:p="http://schemas.openxmlformats.org/presentationml/2006/main">
+  <p:cSld>
+    <p:spTree>
+      <p:nvGrpSpPr>
+        <p:cNvPr id="1" name=""/>
+        <p:cNvGrpSpPr/>
+        <p:nvPr/>
+      </p:nvGrpSpPr>
+      <p:grpSpPr>
+        <a:xfrm>
+          <a:off x="0" y="0"/>
+          <a:ext cx="0" cy="0"/>
+          <a:chOff x="0" y="0"/>
+          <a:chExt cx="0" cy="0"/>
+        </a:xfrm>
+      </p:grpSpPr>
+      <p:sp>
+        <p:nvSpPr>
+          <p:cNvPr id="2" name="Slide Image Placeholder 1"/>
+          <p:cNvSpPr>
+            <a:spLocks noGrp="1" noRot="1" noChangeAspect="1"/>
+          </p:cNvSpPr>
+          <p:nvPr>
+            <p:ph type="sldImg"/>
+          </p:nvPr>
+        </p:nvSpPr>
+        <p:spPr/>
+      </p:sp>
+      <p:sp>
+        <p:nvSpPr>
+          <p:cNvPr id="3" name="Notes Placeholder 2"/>
+          <p:cNvSpPr>
+            <a:spLocks noGrp="1"/>
+          </p:cNvSpPr>
+          <p:nvPr>
+            <p:ph type="body" idx="1"/>
+          </p:nvPr>
+        </p:nvSpPr>
+        <p:spPr/>
+        <p:txBody>
+          <a:bodyPr/>
+          <a:lstStyle/>
+          <a:p>
+            <a:r>
+              <a:rPr lang="en-US" dirty="0"/>
+              <a:t/>
+            </a:r>
+            <a:endParaRPr lang="en-US" dirty="0"/>
+          </a:p>
+        </p:txBody>
+      </p:sp>
+      <p:sp>
+        <p:nvSpPr>
+          <p:cNvPr id="4" name="Slide Number Placeholder 3"/>
+          <p:cNvSpPr>
+            <a:spLocks noGrp="1"/>
+          </p:cNvSpPr>
+          <p:nvPr>
+            <p:ph type="sldNum" sz="quarter" idx="10"/>
+          </p:nvPr>
+        </p:nvSpPr>
+        <p:spPr/>
+        <p:txBody>
+          <a:bodyPr/>
+          <a:lstStyle/>
+          <a:p>
+            <a:fld id="{F7021451-1387-4CA6-816F-3879F97B5CBC}" type="slidenum">
+              <a:rPr lang="en-US"/>
+              <a:t>27</a:t>
             </a:fld>
             <a:endParaRPr lang="en-US"/>
           </a:p>
@@ -2937,7 +3204,7 @@
       </p:sp>
       <p:pic>
         <p:nvPicPr>
-          <p:cNvPr id="3" name="QA:rail" descr="/Users/ekyritsi/copilot-worktrees/my-pptx-generator/ekyritsi-super-journey/assets/rails/2026-rail-copilot-dark.png">    </p:cNvPr>
+          <p:cNvPr id="3" name="QA:rail" descr="/Users/ekyritsi/copilot-worktrees/my-pptx-generator/ekyritsi-super-journey/assets/rails/2026-rail-default-dark.png">    </p:cNvPr>
           <p:cNvPicPr>
             <a:picLocks noChangeAspect="1"/>
           </p:cNvPicPr>
@@ -3123,7 +3390,7 @@
             <a:avLst/>
           </a:prstGeom>
           <a:solidFill>
-            <a:srgbClr val="8534F3"/>
+            <a:srgbClr val="0EBE3D"/>
           </a:solidFill>
           <a:ln/>
         </p:spPr>
@@ -3321,7 +3588,7 @@
                     </a:lnT>
                     <a:lnB w="25400" cap="flat" cmpd="sng" algn="ctr">
                       <a:solidFill>
-                        <a:srgbClr val="8534F3"/>
+                        <a:srgbClr val="0EBE3D"/>
                       </a:solidFill>
                       <a:prstDash val="solid"/>
                       <a:round/>
@@ -3371,7 +3638,7 @@
                     </a:lnT>
                     <a:lnB w="25400" cap="flat" cmpd="sng" algn="ctr">
                       <a:solidFill>
-                        <a:srgbClr val="8534F3"/>
+                        <a:srgbClr val="0EBE3D"/>
                       </a:solidFill>
                       <a:prstDash val="solid"/>
                       <a:round/>
@@ -3808,7 +4075,7 @@
             <a:avLst/>
           </a:prstGeom>
           <a:solidFill>
-            <a:srgbClr val="8534F3"/>
+            <a:srgbClr val="0EBE3D"/>
           </a:solidFill>
           <a:ln/>
         </p:spPr>
@@ -3949,7 +4216,7 @@
         </p:nvSpPr>
         <p:spPr>
           <a:xfrm>
-            <a:off x="548640" y="1737944"/>
+            <a:off x="548640" y="1444828"/>
             <a:ext cx="164592" cy="330200"/>
           </a:xfrm>
           <a:prstGeom prst="rect">
@@ -3971,7 +4238,7 @@
             <a:r>
               <a:rPr lang="en-US" sz="2000" dirty="0">
                 <a:solidFill>
-                  <a:srgbClr val="8534F3"/>
+                  <a:srgbClr val="0EBE3D"/>
                 </a:solidFill>
                 <a:latin typeface="Mona Sans" pitchFamily="34" charset="0"/>
                 <a:ea typeface="Mona Sans" pitchFamily="34" charset="-122"/>
@@ -3991,7 +4258,7 @@
         </p:nvSpPr>
         <p:spPr>
           <a:xfrm>
-            <a:off x="804672" y="1737944"/>
+            <a:off x="804672" y="1444828"/>
             <a:ext cx="10838383" cy="330200"/>
           </a:xfrm>
           <a:prstGeom prst="rect">
@@ -4019,7 +4286,7 @@
                 <a:ea typeface="Mona Sans" pitchFamily="34" charset="-122"/>
                 <a:cs typeface="Mona Sans" pitchFamily="34" charset="-120"/>
               </a:rPr>
-              <a:t>0–10 · Orient in the app, connect GitHub/Copilot concepts, and tour the Book App.</a:t>
+              <a:t>0–6 · Orient: what the app adds beyond a single chat.</a:t>
             </a:r>
             <a:endParaRPr lang="en-US" sz="2000" dirty="0"/>
           </a:p>
@@ -4033,7 +4300,7 @@
         </p:nvSpPr>
         <p:spPr>
           <a:xfrm>
-            <a:off x="548640" y="2324176"/>
+            <a:off x="548640" y="2031060"/>
             <a:ext cx="164592" cy="330200"/>
           </a:xfrm>
           <a:prstGeom prst="rect">
@@ -4055,7 +4322,7 @@
             <a:r>
               <a:rPr lang="en-US" sz="2000" dirty="0">
                 <a:solidFill>
-                  <a:srgbClr val="8534F3"/>
+                  <a:srgbClr val="0EBE3D"/>
                 </a:solidFill>
                 <a:latin typeface="Mona Sans" pitchFamily="34" charset="0"/>
                 <a:ea typeface="Mona Sans" pitchFamily="34" charset="-122"/>
@@ -4075,7 +4342,7 @@
         </p:nvSpPr>
         <p:spPr>
           <a:xfrm>
-            <a:off x="804672" y="2324176"/>
+            <a:off x="804672" y="2031060"/>
             <a:ext cx="10838383" cy="330200"/>
           </a:xfrm>
           <a:prstGeom prst="rect">
@@ -4103,7 +4370,7 @@
                 <a:ea typeface="Mona Sans" pitchFamily="34" charset="-122"/>
                 <a:cs typeface="Mona Sans" pitchFamily="34" charset="-120"/>
               </a:rPr>
-              <a:t>10–20 · Frame Clear filters and its acceptance criteria.</a:t>
+              <a:t>6–15 · Explore the Book App and define a small user need.</a:t>
             </a:r>
             <a:endParaRPr lang="en-US" sz="2000" dirty="0"/>
           </a:p>
@@ -4117,7 +4384,7 @@
         </p:nvSpPr>
         <p:spPr>
           <a:xfrm>
-            <a:off x="548640" y="2910408"/>
+            <a:off x="548640" y="2617292"/>
             <a:ext cx="164592" cy="330200"/>
           </a:xfrm>
           <a:prstGeom prst="rect">
@@ -4139,7 +4406,7 @@
             <a:r>
               <a:rPr lang="en-US" sz="2000" dirty="0">
                 <a:solidFill>
-                  <a:srgbClr val="8534F3"/>
+                  <a:srgbClr val="0EBE3D"/>
                 </a:solidFill>
                 <a:latin typeface="Mona Sans" pitchFamily="34" charset="0"/>
                 <a:ea typeface="Mona Sans" pitchFamily="34" charset="-122"/>
@@ -4159,7 +4426,7 @@
         </p:nvSpPr>
         <p:spPr>
           <a:xfrm>
-            <a:off x="804672" y="2910408"/>
+            <a:off x="804672" y="2617292"/>
             <a:ext cx="10838383" cy="330200"/>
           </a:xfrm>
           <a:prstGeom prst="rect">
@@ -4187,7 +4454,7 @@
                 <a:ea typeface="Mona Sans" pitchFamily="34" charset="-122"/>
                 <a:cs typeface="Mona Sans" pitchFamily="34" charset="-120"/>
               </a:rPr>
-              <a:t>20–32 · Plan Session A; create a read-only review checklist in Session B.</a:t>
+              <a:t>15–25 · Instructor demo: sessions, worktrees, and reviewing a plan.</a:t>
             </a:r>
             <a:endParaRPr lang="en-US" sz="2000" dirty="0"/>
           </a:p>
@@ -4201,7 +4468,7 @@
         </p:nvSpPr>
         <p:spPr>
           <a:xfrm>
-            <a:off x="548640" y="3496640"/>
+            <a:off x="548640" y="3203524"/>
             <a:ext cx="164592" cy="330200"/>
           </a:xfrm>
           <a:prstGeom prst="rect">
@@ -4223,7 +4490,7 @@
             <a:r>
               <a:rPr lang="en-US" sz="2000" dirty="0">
                 <a:solidFill>
-                  <a:srgbClr val="8534F3"/>
+                  <a:srgbClr val="0EBE3D"/>
                 </a:solidFill>
                 <a:latin typeface="Mona Sans" pitchFamily="34" charset="0"/>
                 <a:ea typeface="Mona Sans" pitchFamily="34" charset="-122"/>
@@ -4243,7 +4510,7 @@
         </p:nvSpPr>
         <p:spPr>
           <a:xfrm>
-            <a:off x="804672" y="3496640"/>
+            <a:off x="804672" y="3203524"/>
             <a:ext cx="10838383" cy="330200"/>
           </a:xfrm>
           <a:prstGeom prst="rect">
@@ -4271,7 +4538,7 @@
                 <a:ea typeface="Mona Sans" pitchFamily="34" charset="-122"/>
                 <a:cs typeface="Mona Sans" pitchFamily="34" charset="-120"/>
               </a:rPr>
-              <a:t>32–42 · Mini-teach: sessions, worktrees, modes, agents, and skills.</a:t>
+              <a:t>25–45 · Hands-on: plan and implement Clear filters in an isolated session.</a:t>
             </a:r>
             <a:endParaRPr lang="en-US" sz="2000" dirty="0"/>
           </a:p>
@@ -4285,7 +4552,7 @@
         </p:nvSpPr>
         <p:spPr>
           <a:xfrm>
-            <a:off x="548640" y="4082872"/>
+            <a:off x="548640" y="3789756"/>
             <a:ext cx="164592" cy="330200"/>
           </a:xfrm>
           <a:prstGeom prst="rect">
@@ -4307,7 +4574,7 @@
             <a:r>
               <a:rPr lang="en-US" sz="2000" dirty="0">
                 <a:solidFill>
-                  <a:srgbClr val="8534F3"/>
+                  <a:srgbClr val="0EBE3D"/>
                 </a:solidFill>
                 <a:latin typeface="Mona Sans" pitchFamily="34" charset="0"/>
                 <a:ea typeface="Mona Sans" pitchFamily="34" charset="-122"/>
@@ -4327,7 +4594,7 @@
         </p:nvSpPr>
         <p:spPr>
           <a:xfrm>
-            <a:off x="804672" y="4082872"/>
+            <a:off x="804672" y="3789756"/>
             <a:ext cx="10838383" cy="330200"/>
           </a:xfrm>
           <a:prstGeom prst="rect">
@@ -4355,7 +4622,7 @@
                 <a:ea typeface="Mona Sans" pitchFamily="34" charset="-122"/>
                 <a:cs typeface="Mona Sans" pitchFamily="34" charset="-120"/>
               </a:rPr>
-              <a:t>42–62 · Implement in one session; finish the checklist in the other.</a:t>
+              <a:t>45–68 · See a reviewer agent find an edge case; create and test your own agent.</a:t>
             </a:r>
             <a:endParaRPr lang="en-US" sz="2000" dirty="0"/>
           </a:p>
@@ -4369,7 +4636,7 @@
         </p:nvSpPr>
         <p:spPr>
           <a:xfrm>
-            <a:off x="548640" y="4669104"/>
+            <a:off x="548640" y="4375988"/>
             <a:ext cx="164592" cy="330200"/>
           </a:xfrm>
           <a:prstGeom prst="rect">
@@ -4391,7 +4658,7 @@
             <a:r>
               <a:rPr lang="en-US" sz="2000" dirty="0">
                 <a:solidFill>
-                  <a:srgbClr val="8534F3"/>
+                  <a:srgbClr val="0EBE3D"/>
                 </a:solidFill>
                 <a:latin typeface="Mona Sans" pitchFamily="34" charset="0"/>
                 <a:ea typeface="Mona Sans" pitchFamily="34" charset="-122"/>
@@ -4411,7 +4678,7 @@
         </p:nvSpPr>
         <p:spPr>
           <a:xfrm>
-            <a:off x="804672" y="4669104"/>
+            <a:off x="804672" y="4375988"/>
             <a:ext cx="10838383" cy="330200"/>
           </a:xfrm>
           <a:prstGeom prst="rect">
@@ -4439,7 +4706,7 @@
                 <a:ea typeface="Mona Sans" pitchFamily="34" charset="-122"/>
                 <a:cs typeface="Mona Sans" pitchFamily="34" charset="-120"/>
               </a:rPr>
-              <a:t>62–78 · Use a canvas, inspect changes, run checks, and validate in Browser.</a:t>
+              <a:t>68–74 · Instructor demo: connect an external tool with WorkIQ MCP.</a:t>
             </a:r>
             <a:endParaRPr lang="en-US" sz="2000" dirty="0"/>
           </a:p>
@@ -4453,7 +4720,7 @@
         </p:nvSpPr>
         <p:spPr>
           <a:xfrm>
-            <a:off x="548640" y="5255336"/>
+            <a:off x="548640" y="4962220"/>
             <a:ext cx="164592" cy="330200"/>
           </a:xfrm>
           <a:prstGeom prst="rect">
@@ -4475,7 +4742,7 @@
             <a:r>
               <a:rPr lang="en-US" sz="2000" dirty="0">
                 <a:solidFill>
-                  <a:srgbClr val="8534F3"/>
+                  <a:srgbClr val="0EBE3D"/>
                 </a:solidFill>
                 <a:latin typeface="Mona Sans" pitchFamily="34" charset="0"/>
                 <a:ea typeface="Mona Sans" pitchFamily="34" charset="-122"/>
@@ -4495,7 +4762,7 @@
         </p:nvSpPr>
         <p:spPr>
           <a:xfrm>
-            <a:off x="804672" y="5255336"/>
+            <a:off x="804672" y="4962220"/>
             <a:ext cx="10838383" cy="330200"/>
           </a:xfrm>
           <a:prstGeom prst="rect">
@@ -4523,7 +4790,91 @@
                 <a:ea typeface="Mona Sans" pitchFamily="34" charset="-122"/>
                 <a:cs typeface="Mona Sans" pitchFamily="34" charset="-120"/>
               </a:rPr>
-              <a:t>78–90 · Compare evidence, debrief, and close.</a:t>
+              <a:t>74–85 · Prove the work: inspect the diff, run checks, and test in Browser.</a:t>
+            </a:r>
+            <a:endParaRPr lang="en-US" sz="2000" dirty="0"/>
+          </a:p>
+        </p:txBody>
+      </p:sp>
+      <p:sp>
+        <p:nvSpPr>
+          <p:cNvPr id="22" name="Text 19"/>
+          <p:cNvSpPr/>
+          <p:nvPr/>
+        </p:nvSpPr>
+        <p:spPr>
+          <a:xfrm>
+            <a:off x="548640" y="5548452"/>
+            <a:ext cx="164592" cy="330200"/>
+          </a:xfrm>
+          <a:prstGeom prst="rect">
+            <a:avLst/>
+          </a:prstGeom>
+          <a:noFill/>
+          <a:ln/>
+        </p:spPr>
+        <p:txBody>
+          <a:bodyPr wrap="square" lIns="0" tIns="0" rIns="0" bIns="0" rtlCol="0" anchor="t"/>
+          <a:lstStyle/>
+          <a:p>
+            <a:pPr algn="l" indent="0" marL="0">
+              <a:lnSpc>
+                <a:spcPct val="130000"/>
+              </a:lnSpc>
+              <a:buNone/>
+            </a:pPr>
+            <a:r>
+              <a:rPr lang="en-US" sz="2000" dirty="0">
+                <a:solidFill>
+                  <a:srgbClr val="0EBE3D"/>
+                </a:solidFill>
+                <a:latin typeface="Mona Sans" pitchFamily="34" charset="0"/>
+                <a:ea typeface="Mona Sans" pitchFamily="34" charset="-122"/>
+                <a:cs typeface="Mona Sans" pitchFamily="34" charset="-120"/>
+              </a:rPr>
+              <a:t>•</a:t>
+            </a:r>
+            <a:endParaRPr lang="en-US" sz="2000" dirty="0"/>
+          </a:p>
+        </p:txBody>
+      </p:sp>
+      <p:sp>
+        <p:nvSpPr>
+          <p:cNvPr id="23" name="Text 20"/>
+          <p:cNvSpPr/>
+          <p:nvPr/>
+        </p:nvSpPr>
+        <p:spPr>
+          <a:xfrm>
+            <a:off x="804672" y="5548452"/>
+            <a:ext cx="10838383" cy="330200"/>
+          </a:xfrm>
+          <a:prstGeom prst="rect">
+            <a:avLst/>
+          </a:prstGeom>
+          <a:noFill/>
+          <a:ln/>
+        </p:spPr>
+        <p:txBody>
+          <a:bodyPr wrap="square" lIns="0" tIns="0" rIns="0" bIns="0" rtlCol="0" anchor="t"/>
+          <a:lstStyle/>
+          <a:p>
+            <a:pPr algn="l" indent="0" marL="0">
+              <a:lnSpc>
+                <a:spcPct val="130000"/>
+              </a:lnSpc>
+              <a:buNone/>
+            </a:pPr>
+            <a:r>
+              <a:rPr lang="en-US" sz="2000" dirty="0">
+                <a:solidFill>
+                  <a:srgbClr val="B0BAC3"/>
+                </a:solidFill>
+                <a:latin typeface="Mona Sans" pitchFamily="34" charset="0"/>
+                <a:ea typeface="Mona Sans" pitchFamily="34" charset="-122"/>
+                <a:cs typeface="Mona Sans" pitchFamily="34" charset="-120"/>
+              </a:rPr>
+              <a:t>85–90 · Debrief and choose a three-day experiment.</a:t>
             </a:r>
             <a:endParaRPr lang="en-US" sz="2000" dirty="0"/>
           </a:p>
@@ -4589,7 +4940,7 @@
             <a:avLst/>
           </a:prstGeom>
           <a:solidFill>
-            <a:srgbClr val="8534F3"/>
+            <a:srgbClr val="0EBE3D"/>
           </a:solidFill>
           <a:ln/>
         </p:spPr>
@@ -4787,7 +5138,7 @@
                     </a:lnT>
                     <a:lnB w="25400" cap="flat" cmpd="sng" algn="ctr">
                       <a:solidFill>
-                        <a:srgbClr val="8534F3"/>
+                        <a:srgbClr val="0EBE3D"/>
                       </a:solidFill>
                       <a:prstDash val="solid"/>
                       <a:round/>
@@ -4837,7 +5188,7 @@
                     </a:lnT>
                     <a:lnB w="25400" cap="flat" cmpd="sng" algn="ctr">
                       <a:solidFill>
-                        <a:srgbClr val="8534F3"/>
+                        <a:srgbClr val="0EBE3D"/>
                       </a:solidFill>
                       <a:prstDash val="solid"/>
                       <a:round/>
@@ -5274,7 +5625,7 @@
             <a:avLst/>
           </a:prstGeom>
           <a:solidFill>
-            <a:srgbClr val="8534F3"/>
+            <a:srgbClr val="0EBE3D"/>
           </a:solidFill>
           <a:ln/>
         </p:spPr>
@@ -5818,7 +6169,7 @@
             <a:avLst/>
           </a:prstGeom>
           <a:solidFill>
-            <a:srgbClr val="8534F3"/>
+            <a:srgbClr val="0EBE3D"/>
           </a:solidFill>
           <a:ln/>
         </p:spPr>
@@ -5981,7 +6332,7 @@
             <a:r>
               <a:rPr lang="en-US" sz="2000" dirty="0">
                 <a:solidFill>
-                  <a:srgbClr val="8534F3"/>
+                  <a:srgbClr val="0EBE3D"/>
                 </a:solidFill>
                 <a:latin typeface="Mona Sans" pitchFamily="34" charset="0"/>
                 <a:ea typeface="Mona Sans" pitchFamily="34" charset="-122"/>
@@ -6065,7 +6416,7 @@
             <a:r>
               <a:rPr lang="en-US" sz="2000" dirty="0">
                 <a:solidFill>
-                  <a:srgbClr val="8534F3"/>
+                  <a:srgbClr val="0EBE3D"/>
                 </a:solidFill>
                 <a:latin typeface="Mona Sans" pitchFamily="34" charset="0"/>
                 <a:ea typeface="Mona Sans" pitchFamily="34" charset="-122"/>
@@ -6149,7 +6500,7 @@
             <a:r>
               <a:rPr lang="en-US" sz="2000" dirty="0">
                 <a:solidFill>
-                  <a:srgbClr val="8534F3"/>
+                  <a:srgbClr val="0EBE3D"/>
                 </a:solidFill>
                 <a:latin typeface="Mona Sans" pitchFamily="34" charset="0"/>
                 <a:ea typeface="Mona Sans" pitchFamily="34" charset="-122"/>
@@ -6233,7 +6584,7 @@
             <a:r>
               <a:rPr lang="en-US" sz="2000" dirty="0">
                 <a:solidFill>
-                  <a:srgbClr val="8534F3"/>
+                  <a:srgbClr val="0EBE3D"/>
                 </a:solidFill>
                 <a:latin typeface="Mona Sans" pitchFamily="34" charset="0"/>
                 <a:ea typeface="Mona Sans" pitchFamily="34" charset="-122"/>
@@ -6347,7 +6698,7 @@
             <a:avLst/>
           </a:prstGeom>
           <a:solidFill>
-            <a:srgbClr val="8534F3"/>
+            <a:srgbClr val="0EBE3D"/>
           </a:solidFill>
           <a:ln/>
         </p:spPr>
@@ -6545,7 +6896,7 @@
                     </a:lnT>
                     <a:lnB w="25400" cap="flat" cmpd="sng" algn="ctr">
                       <a:solidFill>
-                        <a:srgbClr val="8534F3"/>
+                        <a:srgbClr val="0EBE3D"/>
                       </a:solidFill>
                       <a:prstDash val="solid"/>
                       <a:round/>
@@ -6595,7 +6946,7 @@
                     </a:lnT>
                     <a:lnB w="25400" cap="flat" cmpd="sng" algn="ctr">
                       <a:solidFill>
-                        <a:srgbClr val="8534F3"/>
+                        <a:srgbClr val="0EBE3D"/>
                       </a:solidFill>
                       <a:prstDash val="solid"/>
                       <a:round/>
@@ -6850,7 +7201,7 @@
                           <a:ea typeface="Mona Sans" pitchFamily="34" charset="-122"/>
                           <a:cs typeface="Mona Sans" pitchFamily="34" charset="-120"/>
                         </a:rPr>
-                        <a:t>Implement in an isolated worktree; use a second session for review criteria.</a:t>
+                        <a:t>Build in an isolated worktree; review with a custom agent.</a:t>
                       </a:r>
                       <a:endParaRPr lang="en-US" sz="1300" dirty="0">
                         <a:latin typeface="Mona Sans" charset="0"/>
@@ -7032,7 +7383,7 @@
             <a:avLst/>
           </a:prstGeom>
           <a:solidFill>
-            <a:srgbClr val="8534F3"/>
+            <a:srgbClr val="0EBE3D"/>
           </a:solidFill>
           <a:ln/>
         </p:spPr>
@@ -7682,7 +8033,7 @@
             <a:avLst/>
           </a:prstGeom>
           <a:solidFill>
-            <a:srgbClr val="8534F3"/>
+            <a:srgbClr val="0EBE3D"/>
           </a:solidFill>
           <a:ln/>
         </p:spPr>
@@ -7809,7 +8160,7 @@
                 <a:ea typeface="Mona Sans" pitchFamily="34" charset="-122"/>
                 <a:cs typeface="Mona Sans" pitchFamily="34" charset="-120"/>
               </a:rPr>
-              <a:t>Hands-on 2 · Reviewer session</a:t>
+              <a:t>Agent example · a role with boundaries</a:t>
             </a:r>
             <a:endParaRPr lang="en-US" sz="2800" dirty="0"/>
           </a:p>
@@ -7823,7 +8174,7 @@
         </p:nvSpPr>
         <p:spPr>
           <a:xfrm>
-            <a:off x="548640" y="1993976"/>
+            <a:off x="548640" y="2287092"/>
             <a:ext cx="164592" cy="330200"/>
           </a:xfrm>
           <a:prstGeom prst="rect">
@@ -7845,7 +8196,7 @@
             <a:r>
               <a:rPr lang="en-US" sz="2000" dirty="0">
                 <a:solidFill>
-                  <a:srgbClr val="8534F3"/>
+                  <a:srgbClr val="0EBE3D"/>
                 </a:solidFill>
                 <a:latin typeface="Mona Sans" pitchFamily="34" charset="0"/>
                 <a:ea typeface="Mona Sans" pitchFamily="34" charset="-122"/>
@@ -7865,7 +8216,7 @@
         </p:nvSpPr>
         <p:spPr>
           <a:xfrm>
-            <a:off x="804672" y="1993976"/>
+            <a:off x="804672" y="2287092"/>
             <a:ext cx="10838383" cy="660400"/>
           </a:xfrm>
           <a:prstGeom prst="rect">
@@ -7893,7 +8244,7 @@
                 <a:ea typeface="Mona Sans" pitchFamily="34" charset="-122"/>
                 <a:cs typeface="Mona Sans" pitchFamily="34" charset="-120"/>
               </a:rPr>
-              <a:t>Start Session B in a separate new worktree from the default branch; select Book App</a:t>
+              <a:t>The Book App Reviewer is a repository-defined custom agent: a focused role, instructions,</a:t>
             </a:r>
             <a:endParaRPr lang="en-US" sz="2000" dirty="0"/>
           </a:p>
@@ -7913,7 +8264,7 @@
                 <a:ea typeface="Mona Sans" pitchFamily="34" charset="-122"/>
                 <a:cs typeface="Mona Sans" pitchFamily="34" charset="-120"/>
               </a:rPr>
-              <a:t>Reviewer.</a:t>
+              <a:t>and selected tools.</a:t>
             </a:r>
             <a:endParaRPr lang="en-US" sz="2000" dirty="0"/>
           </a:p>
@@ -7927,7 +8278,7 @@
         </p:nvSpPr>
         <p:spPr>
           <a:xfrm>
-            <a:off x="548640" y="2910408"/>
+            <a:off x="548640" y="3203524"/>
             <a:ext cx="164592" cy="330200"/>
           </a:xfrm>
           <a:prstGeom prst="rect">
@@ -7949,7 +8300,7 @@
             <a:r>
               <a:rPr lang="en-US" sz="2000" dirty="0">
                 <a:solidFill>
-                  <a:srgbClr val="8534F3"/>
+                  <a:srgbClr val="0EBE3D"/>
                 </a:solidFill>
                 <a:latin typeface="Mona Sans" pitchFamily="34" charset="0"/>
                 <a:ea typeface="Mona Sans" pitchFamily="34" charset="-122"/>
@@ -7969,7 +8320,7 @@
         </p:nvSpPr>
         <p:spPr>
           <a:xfrm>
-            <a:off x="804672" y="2910408"/>
+            <a:off x="804672" y="3203524"/>
             <a:ext cx="10838383" cy="330200"/>
           </a:xfrm>
           <a:prstGeom prst="rect">
@@ -7997,7 +8348,7 @@
                 <a:ea typeface="Mona Sans" pitchFamily="34" charset="-122"/>
                 <a:cs typeface="Mona Sans" pitchFamily="34" charset="-120"/>
               </a:rPr>
-              <a:t>Use the book-app-reviewer skill to produce a read-only acceptance checklist.</a:t>
+              <a:t>It is not a new model; its read-only tools let it inspect and report without editing the app.</a:t>
             </a:r>
             <a:endParaRPr lang="en-US" sz="2000" dirty="0"/>
           </a:p>
@@ -8011,7 +8362,7 @@
         </p:nvSpPr>
         <p:spPr>
           <a:xfrm>
-            <a:off x="548640" y="3496640"/>
+            <a:off x="548640" y="3789756"/>
             <a:ext cx="164592" cy="330200"/>
           </a:xfrm>
           <a:prstGeom prst="rect">
@@ -8033,7 +8384,7 @@
             <a:r>
               <a:rPr lang="en-US" sz="2000" dirty="0">
                 <a:solidFill>
-                  <a:srgbClr val="8534F3"/>
+                  <a:srgbClr val="0EBE3D"/>
                 </a:solidFill>
                 <a:latin typeface="Mona Sans" pitchFamily="34" charset="0"/>
                 <a:ea typeface="Mona Sans" pitchFamily="34" charset="-122"/>
@@ -8053,7 +8404,91 @@
         </p:nvSpPr>
         <p:spPr>
           <a:xfrm>
-            <a:off x="804672" y="3496640"/>
+            <a:off x="804672" y="3789756"/>
+            <a:ext cx="10838383" cy="330200"/>
+          </a:xfrm>
+          <a:prstGeom prst="rect">
+            <a:avLst/>
+          </a:prstGeom>
+          <a:noFill/>
+          <a:ln/>
+        </p:spPr>
+        <p:txBody>
+          <a:bodyPr wrap="square" lIns="0" tIns="0" rIns="0" bIns="0" rtlCol="0" anchor="t"/>
+          <a:lstStyle/>
+          <a:p>
+            <a:pPr algn="l" indent="0" marL="0">
+              <a:lnSpc>
+                <a:spcPct val="130000"/>
+              </a:lnSpc>
+              <a:buNone/>
+            </a:pPr>
+            <a:r>
+              <a:rPr lang="en-US" sz="2000" dirty="0">
+                <a:solidFill>
+                  <a:srgbClr val="B0BAC3"/>
+                </a:solidFill>
+                <a:latin typeface="Mona Sans" pitchFamily="34" charset="0"/>
+                <a:ea typeface="Mona Sans" pitchFamily="34" charset="-122"/>
+                <a:cs typeface="Mona Sans" pitchFamily="34" charset="-120"/>
+              </a:rPr>
+              <a:t>Run it against the Clear filters implementation and show its whitespace-only search finding.</a:t>
+            </a:r>
+            <a:endParaRPr lang="en-US" sz="2000" dirty="0"/>
+          </a:p>
+        </p:txBody>
+      </p:sp>
+      <p:sp>
+        <p:nvSpPr>
+          <p:cNvPr id="14" name="Text 11"/>
+          <p:cNvSpPr/>
+          <p:nvPr/>
+        </p:nvSpPr>
+        <p:spPr>
+          <a:xfrm>
+            <a:off x="548640" y="4375988"/>
+            <a:ext cx="164592" cy="330200"/>
+          </a:xfrm>
+          <a:prstGeom prst="rect">
+            <a:avLst/>
+          </a:prstGeom>
+          <a:noFill/>
+          <a:ln/>
+        </p:spPr>
+        <p:txBody>
+          <a:bodyPr wrap="square" lIns="0" tIns="0" rIns="0" bIns="0" rtlCol="0" anchor="t"/>
+          <a:lstStyle/>
+          <a:p>
+            <a:pPr algn="l" indent="0" marL="0">
+              <a:lnSpc>
+                <a:spcPct val="130000"/>
+              </a:lnSpc>
+              <a:buNone/>
+            </a:pPr>
+            <a:r>
+              <a:rPr lang="en-US" sz="2000" dirty="0">
+                <a:solidFill>
+                  <a:srgbClr val="0EBE3D"/>
+                </a:solidFill>
+                <a:latin typeface="Mona Sans" pitchFamily="34" charset="0"/>
+                <a:ea typeface="Mona Sans" pitchFamily="34" charset="-122"/>
+                <a:cs typeface="Mona Sans" pitchFamily="34" charset="-120"/>
+              </a:rPr>
+              <a:t>•</a:t>
+            </a:r>
+            <a:endParaRPr lang="en-US" sz="2000" dirty="0"/>
+          </a:p>
+        </p:txBody>
+      </p:sp>
+      <p:sp>
+        <p:nvSpPr>
+          <p:cNvPr id="15" name="Text 12"/>
+          <p:cNvSpPr/>
+          <p:nvPr/>
+        </p:nvSpPr>
+        <p:spPr>
+          <a:xfrm>
+            <a:off x="804672" y="4375988"/>
             <a:ext cx="10838383" cy="660400"/>
           </a:xfrm>
           <a:prstGeom prst="rect">
@@ -8081,7 +8516,7 @@
                 <a:ea typeface="Mona Sans" pitchFamily="34" charset="-122"/>
                 <a:cs typeface="Mona Sans" pitchFamily="34" charset="-120"/>
               </a:rPr>
-              <a:t>Ask it to inspect the existing code and state what must be verified—not to edit or run</a:t>
+              <a:t>The reviewer identifies a concern; the coding agent makes the fix, and people verify the</a:t>
             </a:r>
             <a:endParaRPr lang="en-US" sz="2000" dirty="0"/>
           </a:p>
@@ -8101,175 +8536,7 @@
                 <a:ea typeface="Mona Sans" pitchFamily="34" charset="-122"/>
                 <a:cs typeface="Mona Sans" pitchFamily="34" charset="-120"/>
               </a:rPr>
-              <a:t>commands.</a:t>
-            </a:r>
-            <a:endParaRPr lang="en-US" sz="2000" dirty="0"/>
-          </a:p>
-        </p:txBody>
-      </p:sp>
-      <p:sp>
-        <p:nvSpPr>
-          <p:cNvPr id="14" name="Text 11"/>
-          <p:cNvSpPr/>
-          <p:nvPr/>
-        </p:nvSpPr>
-        <p:spPr>
-          <a:xfrm>
-            <a:off x="548640" y="4413072"/>
-            <a:ext cx="164592" cy="330200"/>
-          </a:xfrm>
-          <a:prstGeom prst="rect">
-            <a:avLst/>
-          </a:prstGeom>
-          <a:noFill/>
-          <a:ln/>
-        </p:spPr>
-        <p:txBody>
-          <a:bodyPr wrap="square" lIns="0" tIns="0" rIns="0" bIns="0" rtlCol="0" anchor="t"/>
-          <a:lstStyle/>
-          <a:p>
-            <a:pPr algn="l" indent="0" marL="0">
-              <a:lnSpc>
-                <a:spcPct val="130000"/>
-              </a:lnSpc>
-              <a:buNone/>
-            </a:pPr>
-            <a:r>
-              <a:rPr lang="en-US" sz="2000" dirty="0">
-                <a:solidFill>
-                  <a:srgbClr val="8534F3"/>
-                </a:solidFill>
-                <a:latin typeface="Mona Sans" pitchFamily="34" charset="0"/>
-                <a:ea typeface="Mona Sans" pitchFamily="34" charset="-122"/>
-                <a:cs typeface="Mona Sans" pitchFamily="34" charset="-120"/>
-              </a:rPr>
-              <a:t>•</a:t>
-            </a:r>
-            <a:endParaRPr lang="en-US" sz="2000" dirty="0"/>
-          </a:p>
-        </p:txBody>
-      </p:sp>
-      <p:sp>
-        <p:nvSpPr>
-          <p:cNvPr id="15" name="Text 12"/>
-          <p:cNvSpPr/>
-          <p:nvPr/>
-        </p:nvSpPr>
-        <p:spPr>
-          <a:xfrm>
-            <a:off x="804672" y="4413072"/>
-            <a:ext cx="10838383" cy="330200"/>
-          </a:xfrm>
-          <a:prstGeom prst="rect">
-            <a:avLst/>
-          </a:prstGeom>
-          <a:noFill/>
-          <a:ln/>
-        </p:spPr>
-        <p:txBody>
-          <a:bodyPr wrap="square" lIns="0" tIns="0" rIns="0" bIns="0" rtlCol="0" anchor="t"/>
-          <a:lstStyle/>
-          <a:p>
-            <a:pPr algn="l" indent="0" marL="0">
-              <a:lnSpc>
-                <a:spcPct val="130000"/>
-              </a:lnSpc>
-              <a:buNone/>
-            </a:pPr>
-            <a:r>
-              <a:rPr lang="en-US" sz="2000" dirty="0">
-                <a:solidFill>
-                  <a:srgbClr val="B0BAC3"/>
-                </a:solidFill>
-                <a:latin typeface="Mona Sans" pitchFamily="34" charset="0"/>
-                <a:ea typeface="Mona Sans" pitchFamily="34" charset="-122"/>
-                <a:cs typeface="Mona Sans" pitchFamily="34" charset="-120"/>
-              </a:rPr>
-              <a:t>Session B is independent; it does not automatically see Session A's uncommitted diff.</a:t>
-            </a:r>
-            <a:endParaRPr lang="en-US" sz="2000" dirty="0"/>
-          </a:p>
-        </p:txBody>
-      </p:sp>
-      <p:sp>
-        <p:nvSpPr>
-          <p:cNvPr id="16" name="Text 13"/>
-          <p:cNvSpPr/>
-          <p:nvPr/>
-        </p:nvSpPr>
-        <p:spPr>
-          <a:xfrm>
-            <a:off x="548640" y="4999304"/>
-            <a:ext cx="164592" cy="330200"/>
-          </a:xfrm>
-          <a:prstGeom prst="rect">
-            <a:avLst/>
-          </a:prstGeom>
-          <a:noFill/>
-          <a:ln/>
-        </p:spPr>
-        <p:txBody>
-          <a:bodyPr wrap="square" lIns="0" tIns="0" rIns="0" bIns="0" rtlCol="0" anchor="t"/>
-          <a:lstStyle/>
-          <a:p>
-            <a:pPr algn="l" indent="0" marL="0">
-              <a:lnSpc>
-                <a:spcPct val="130000"/>
-              </a:lnSpc>
-              <a:buNone/>
-            </a:pPr>
-            <a:r>
-              <a:rPr lang="en-US" sz="2000" dirty="0">
-                <a:solidFill>
-                  <a:srgbClr val="8534F3"/>
-                </a:solidFill>
-                <a:latin typeface="Mona Sans" pitchFamily="34" charset="0"/>
-                <a:ea typeface="Mona Sans" pitchFamily="34" charset="-122"/>
-                <a:cs typeface="Mona Sans" pitchFamily="34" charset="-120"/>
-              </a:rPr>
-              <a:t>•</a:t>
-            </a:r>
-            <a:endParaRPr lang="en-US" sz="2000" dirty="0"/>
-          </a:p>
-        </p:txBody>
-      </p:sp>
-      <p:sp>
-        <p:nvSpPr>
-          <p:cNvPr id="17" name="Text 14"/>
-          <p:cNvSpPr/>
-          <p:nvPr/>
-        </p:nvSpPr>
-        <p:spPr>
-          <a:xfrm>
-            <a:off x="804672" y="4999304"/>
-            <a:ext cx="10838383" cy="330200"/>
-          </a:xfrm>
-          <a:prstGeom prst="rect">
-            <a:avLst/>
-          </a:prstGeom>
-          <a:noFill/>
-          <a:ln/>
-        </p:spPr>
-        <p:txBody>
-          <a:bodyPr wrap="square" lIns="0" tIns="0" rIns="0" bIns="0" rtlCol="0" anchor="t"/>
-          <a:lstStyle/>
-          <a:p>
-            <a:pPr algn="l" indent="0" marL="0">
-              <a:lnSpc>
-                <a:spcPct val="130000"/>
-              </a:lnSpc>
-              <a:buNone/>
-            </a:pPr>
-            <a:r>
-              <a:rPr lang="en-US" sz="2000" dirty="0">
-                <a:solidFill>
-                  <a:srgbClr val="B0BAC3"/>
-                </a:solidFill>
-                <a:latin typeface="Mona Sans" pitchFamily="34" charset="0"/>
-                <a:ea typeface="Mona Sans" pitchFamily="34" charset="-122"/>
-                <a:cs typeface="Mona Sans" pitchFamily="34" charset="-120"/>
-              </a:rPr>
-              <a:t>Later compare its checklist with Session A's actual change and browser behavior.</a:t>
+              <a:t>outcome.</a:t>
             </a:r>
             <a:endParaRPr lang="en-US" sz="2000" dirty="0"/>
           </a:p>
@@ -8335,7 +8602,7 @@
             <a:avLst/>
           </a:prstGeom>
           <a:solidFill>
-            <a:srgbClr val="8534F3"/>
+            <a:srgbClr val="0EBE3D"/>
           </a:solidFill>
           <a:ln/>
         </p:spPr>
@@ -8462,6 +8729,1946 @@
                 <a:ea typeface="Mona Sans" pitchFamily="34" charset="-122"/>
                 <a:cs typeface="Mona Sans" pitchFamily="34" charset="-120"/>
               </a:rPr>
+              <a:t>Choose a focused job for your agent</a:t>
+            </a:r>
+            <a:endParaRPr lang="en-US" sz="2800" dirty="0"/>
+          </a:p>
+        </p:txBody>
+      </p:sp>
+      <p:sp>
+        <p:nvSpPr>
+          <p:cNvPr id="8" name="Text 5"/>
+          <p:cNvSpPr/>
+          <p:nvPr/>
+        </p:nvSpPr>
+        <p:spPr>
+          <a:xfrm>
+            <a:off x="548640" y="1737944"/>
+            <a:ext cx="164592" cy="330200"/>
+          </a:xfrm>
+          <a:prstGeom prst="rect">
+            <a:avLst/>
+          </a:prstGeom>
+          <a:noFill/>
+          <a:ln/>
+        </p:spPr>
+        <p:txBody>
+          <a:bodyPr wrap="square" lIns="0" tIns="0" rIns="0" bIns="0" rtlCol="0" anchor="t"/>
+          <a:lstStyle/>
+          <a:p>
+            <a:pPr algn="l" indent="0" marL="0">
+              <a:lnSpc>
+                <a:spcPct val="130000"/>
+              </a:lnSpc>
+              <a:buNone/>
+            </a:pPr>
+            <a:r>
+              <a:rPr lang="en-US" sz="2000" dirty="0">
+                <a:solidFill>
+                  <a:srgbClr val="0EBE3D"/>
+                </a:solidFill>
+                <a:latin typeface="Mona Sans" pitchFamily="34" charset="0"/>
+                <a:ea typeface="Mona Sans" pitchFamily="34" charset="-122"/>
+                <a:cs typeface="Mona Sans" pitchFamily="34" charset="-120"/>
+              </a:rPr>
+              <a:t>•</a:t>
+            </a:r>
+            <a:endParaRPr lang="en-US" sz="2000" dirty="0"/>
+          </a:p>
+        </p:txBody>
+      </p:sp>
+      <p:sp>
+        <p:nvSpPr>
+          <p:cNvPr id="9" name="Text 6"/>
+          <p:cNvSpPr/>
+          <p:nvPr/>
+        </p:nvSpPr>
+        <p:spPr>
+          <a:xfrm>
+            <a:off x="804672" y="1737944"/>
+            <a:ext cx="10838383" cy="330200"/>
+          </a:xfrm>
+          <a:prstGeom prst="rect">
+            <a:avLst/>
+          </a:prstGeom>
+          <a:noFill/>
+          <a:ln/>
+        </p:spPr>
+        <p:txBody>
+          <a:bodyPr wrap="square" lIns="0" tIns="0" rIns="0" bIns="0" rtlCol="0" anchor="t"/>
+          <a:lstStyle/>
+          <a:p>
+            <a:pPr algn="l" indent="0" marL="0">
+              <a:lnSpc>
+                <a:spcPct val="130000"/>
+              </a:lnSpc>
+              <a:buNone/>
+            </a:pPr>
+            <a:r>
+              <a:rPr lang="en-US" sz="2000" dirty="0">
+                <a:solidFill>
+                  <a:srgbClr val="B0BAC3"/>
+                </a:solidFill>
+                <a:latin typeface="Mona Sans" pitchFamily="34" charset="0"/>
+                <a:ea typeface="Mona Sans" pitchFamily="34" charset="-122"/>
+                <a:cs typeface="Mona Sans" pitchFamily="34" charset="-120"/>
+              </a:rPr>
+              <a:t>Code reviewer: find behavior gaps and cite code evidence; read-only.</a:t>
+            </a:r>
+            <a:endParaRPr lang="en-US" sz="2000" dirty="0"/>
+          </a:p>
+        </p:txBody>
+      </p:sp>
+      <p:sp>
+        <p:nvSpPr>
+          <p:cNvPr id="10" name="Text 7"/>
+          <p:cNvSpPr/>
+          <p:nvPr/>
+        </p:nvSpPr>
+        <p:spPr>
+          <a:xfrm>
+            <a:off x="548640" y="2324176"/>
+            <a:ext cx="164592" cy="330200"/>
+          </a:xfrm>
+          <a:prstGeom prst="rect">
+            <a:avLst/>
+          </a:prstGeom>
+          <a:noFill/>
+          <a:ln/>
+        </p:spPr>
+        <p:txBody>
+          <a:bodyPr wrap="square" lIns="0" tIns="0" rIns="0" bIns="0" rtlCol="0" anchor="t"/>
+          <a:lstStyle/>
+          <a:p>
+            <a:pPr algn="l" indent="0" marL="0">
+              <a:lnSpc>
+                <a:spcPct val="130000"/>
+              </a:lnSpc>
+              <a:buNone/>
+            </a:pPr>
+            <a:r>
+              <a:rPr lang="en-US" sz="2000" dirty="0">
+                <a:solidFill>
+                  <a:srgbClr val="0EBE3D"/>
+                </a:solidFill>
+                <a:latin typeface="Mona Sans" pitchFamily="34" charset="0"/>
+                <a:ea typeface="Mona Sans" pitchFamily="34" charset="-122"/>
+                <a:cs typeface="Mona Sans" pitchFamily="34" charset="-120"/>
+              </a:rPr>
+              <a:t>•</a:t>
+            </a:r>
+            <a:endParaRPr lang="en-US" sz="2000" dirty="0"/>
+          </a:p>
+        </p:txBody>
+      </p:sp>
+      <p:sp>
+        <p:nvSpPr>
+          <p:cNvPr id="11" name="Text 8"/>
+          <p:cNvSpPr/>
+          <p:nvPr/>
+        </p:nvSpPr>
+        <p:spPr>
+          <a:xfrm>
+            <a:off x="804672" y="2324176"/>
+            <a:ext cx="10838383" cy="330200"/>
+          </a:xfrm>
+          <a:prstGeom prst="rect">
+            <a:avLst/>
+          </a:prstGeom>
+          <a:noFill/>
+          <a:ln/>
+        </p:spPr>
+        <p:txBody>
+          <a:bodyPr wrap="square" lIns="0" tIns="0" rIns="0" bIns="0" rtlCol="0" anchor="t"/>
+          <a:lstStyle/>
+          <a:p>
+            <a:pPr algn="l" indent="0" marL="0">
+              <a:lnSpc>
+                <a:spcPct val="130000"/>
+              </a:lnSpc>
+              <a:buNone/>
+            </a:pPr>
+            <a:r>
+              <a:rPr lang="en-US" sz="2000" dirty="0">
+                <a:solidFill>
+                  <a:srgbClr val="B0BAC3"/>
+                </a:solidFill>
+                <a:latin typeface="Mona Sans" pitchFamily="34" charset="0"/>
+                <a:ea typeface="Mona Sans" pitchFamily="34" charset="-122"/>
+                <a:cs typeface="Mona Sans" pitchFamily="34" charset="-120"/>
+              </a:rPr>
+              <a:t>Test designer: suggest edge cases, or write focused tests when allowed.</a:t>
+            </a:r>
+            <a:endParaRPr lang="en-US" sz="2000" dirty="0"/>
+          </a:p>
+        </p:txBody>
+      </p:sp>
+      <p:sp>
+        <p:nvSpPr>
+          <p:cNvPr id="12" name="Text 9"/>
+          <p:cNvSpPr/>
+          <p:nvPr/>
+        </p:nvSpPr>
+        <p:spPr>
+          <a:xfrm>
+            <a:off x="548640" y="2910408"/>
+            <a:ext cx="164592" cy="330200"/>
+          </a:xfrm>
+          <a:prstGeom prst="rect">
+            <a:avLst/>
+          </a:prstGeom>
+          <a:noFill/>
+          <a:ln/>
+        </p:spPr>
+        <p:txBody>
+          <a:bodyPr wrap="square" lIns="0" tIns="0" rIns="0" bIns="0" rtlCol="0" anchor="t"/>
+          <a:lstStyle/>
+          <a:p>
+            <a:pPr algn="l" indent="0" marL="0">
+              <a:lnSpc>
+                <a:spcPct val="130000"/>
+              </a:lnSpc>
+              <a:buNone/>
+            </a:pPr>
+            <a:r>
+              <a:rPr lang="en-US" sz="2000" dirty="0">
+                <a:solidFill>
+                  <a:srgbClr val="0EBE3D"/>
+                </a:solidFill>
+                <a:latin typeface="Mona Sans" pitchFamily="34" charset="0"/>
+                <a:ea typeface="Mona Sans" pitchFamily="34" charset="-122"/>
+                <a:cs typeface="Mona Sans" pitchFamily="34" charset="-120"/>
+              </a:rPr>
+              <a:t>•</a:t>
+            </a:r>
+            <a:endParaRPr lang="en-US" sz="2000" dirty="0"/>
+          </a:p>
+        </p:txBody>
+      </p:sp>
+      <p:sp>
+        <p:nvSpPr>
+          <p:cNvPr id="13" name="Text 10"/>
+          <p:cNvSpPr/>
+          <p:nvPr/>
+        </p:nvSpPr>
+        <p:spPr>
+          <a:xfrm>
+            <a:off x="804672" y="2910408"/>
+            <a:ext cx="10838383" cy="330200"/>
+          </a:xfrm>
+          <a:prstGeom prst="rect">
+            <a:avLst/>
+          </a:prstGeom>
+          <a:noFill/>
+          <a:ln/>
+        </p:spPr>
+        <p:txBody>
+          <a:bodyPr wrap="square" lIns="0" tIns="0" rIns="0" bIns="0" rtlCol="0" anchor="t"/>
+          <a:lstStyle/>
+          <a:p>
+            <a:pPr algn="l" indent="0" marL="0">
+              <a:lnSpc>
+                <a:spcPct val="130000"/>
+              </a:lnSpc>
+              <a:buNone/>
+            </a:pPr>
+            <a:r>
+              <a:rPr lang="en-US" sz="2000" dirty="0">
+                <a:solidFill>
+                  <a:srgbClr val="B0BAC3"/>
+                </a:solidFill>
+                <a:latin typeface="Mona Sans" pitchFamily="34" charset="0"/>
+                <a:ea typeface="Mona Sans" pitchFamily="34" charset="-122"/>
+                <a:cs typeface="Mona Sans" pitchFamily="34" charset="-120"/>
+              </a:rPr>
+              <a:t>Bug investigator: trace a symptom to likely causes; show evidence.</a:t>
+            </a:r>
+            <a:endParaRPr lang="en-US" sz="2000" dirty="0"/>
+          </a:p>
+        </p:txBody>
+      </p:sp>
+      <p:sp>
+        <p:nvSpPr>
+          <p:cNvPr id="14" name="Text 11"/>
+          <p:cNvSpPr/>
+          <p:nvPr/>
+        </p:nvSpPr>
+        <p:spPr>
+          <a:xfrm>
+            <a:off x="548640" y="3496640"/>
+            <a:ext cx="164592" cy="330200"/>
+          </a:xfrm>
+          <a:prstGeom prst="rect">
+            <a:avLst/>
+          </a:prstGeom>
+          <a:noFill/>
+          <a:ln/>
+        </p:spPr>
+        <p:txBody>
+          <a:bodyPr wrap="square" lIns="0" tIns="0" rIns="0" bIns="0" rtlCol="0" anchor="t"/>
+          <a:lstStyle/>
+          <a:p>
+            <a:pPr algn="l" indent="0" marL="0">
+              <a:lnSpc>
+                <a:spcPct val="130000"/>
+              </a:lnSpc>
+              <a:buNone/>
+            </a:pPr>
+            <a:r>
+              <a:rPr lang="en-US" sz="2000" dirty="0">
+                <a:solidFill>
+                  <a:srgbClr val="0EBE3D"/>
+                </a:solidFill>
+                <a:latin typeface="Mona Sans" pitchFamily="34" charset="0"/>
+                <a:ea typeface="Mona Sans" pitchFamily="34" charset="-122"/>
+                <a:cs typeface="Mona Sans" pitchFamily="34" charset="-120"/>
+              </a:rPr>
+              <a:t>•</a:t>
+            </a:r>
+            <a:endParaRPr lang="en-US" sz="2000" dirty="0"/>
+          </a:p>
+        </p:txBody>
+      </p:sp>
+      <p:sp>
+        <p:nvSpPr>
+          <p:cNvPr id="15" name="Text 12"/>
+          <p:cNvSpPr/>
+          <p:nvPr/>
+        </p:nvSpPr>
+        <p:spPr>
+          <a:xfrm>
+            <a:off x="804672" y="3496640"/>
+            <a:ext cx="10838383" cy="330200"/>
+          </a:xfrm>
+          <a:prstGeom prst="rect">
+            <a:avLst/>
+          </a:prstGeom>
+          <a:noFill/>
+          <a:ln/>
+        </p:spPr>
+        <p:txBody>
+          <a:bodyPr wrap="square" lIns="0" tIns="0" rIns="0" bIns="0" rtlCol="0" anchor="t"/>
+          <a:lstStyle/>
+          <a:p>
+            <a:pPr algn="l" indent="0" marL="0">
+              <a:lnSpc>
+                <a:spcPct val="130000"/>
+              </a:lnSpc>
+              <a:buNone/>
+            </a:pPr>
+            <a:r>
+              <a:rPr lang="en-US" sz="2000" dirty="0">
+                <a:solidFill>
+                  <a:srgbClr val="B0BAC3"/>
+                </a:solidFill>
+                <a:latin typeface="Mona Sans" pitchFamily="34" charset="0"/>
+                <a:ea typeface="Mona Sans" pitchFamily="34" charset="-122"/>
+                <a:cs typeface="Mona Sans" pitchFamily="34" charset="-120"/>
+              </a:rPr>
+              <a:t>Accessibility helper: audit labels and keyboard use, or make an approved fix.</a:t>
+            </a:r>
+            <a:endParaRPr lang="en-US" sz="2000" dirty="0"/>
+          </a:p>
+        </p:txBody>
+      </p:sp>
+      <p:sp>
+        <p:nvSpPr>
+          <p:cNvPr id="16" name="Text 13"/>
+          <p:cNvSpPr/>
+          <p:nvPr/>
+        </p:nvSpPr>
+        <p:spPr>
+          <a:xfrm>
+            <a:off x="548640" y="4082872"/>
+            <a:ext cx="164592" cy="330200"/>
+          </a:xfrm>
+          <a:prstGeom prst="rect">
+            <a:avLst/>
+          </a:prstGeom>
+          <a:noFill/>
+          <a:ln/>
+        </p:spPr>
+        <p:txBody>
+          <a:bodyPr wrap="square" lIns="0" tIns="0" rIns="0" bIns="0" rtlCol="0" anchor="t"/>
+          <a:lstStyle/>
+          <a:p>
+            <a:pPr algn="l" indent="0" marL="0">
+              <a:lnSpc>
+                <a:spcPct val="130000"/>
+              </a:lnSpc>
+              <a:buNone/>
+            </a:pPr>
+            <a:r>
+              <a:rPr lang="en-US" sz="2000" dirty="0">
+                <a:solidFill>
+                  <a:srgbClr val="0EBE3D"/>
+                </a:solidFill>
+                <a:latin typeface="Mona Sans" pitchFamily="34" charset="0"/>
+                <a:ea typeface="Mona Sans" pitchFamily="34" charset="-122"/>
+                <a:cs typeface="Mona Sans" pitchFamily="34" charset="-120"/>
+              </a:rPr>
+              <a:t>•</a:t>
+            </a:r>
+            <a:endParaRPr lang="en-US" sz="2000" dirty="0"/>
+          </a:p>
+        </p:txBody>
+      </p:sp>
+      <p:sp>
+        <p:nvSpPr>
+          <p:cNvPr id="17" name="Text 14"/>
+          <p:cNvSpPr/>
+          <p:nvPr/>
+        </p:nvSpPr>
+        <p:spPr>
+          <a:xfrm>
+            <a:off x="804672" y="4082872"/>
+            <a:ext cx="10838383" cy="330200"/>
+          </a:xfrm>
+          <a:prstGeom prst="rect">
+            <a:avLst/>
+          </a:prstGeom>
+          <a:noFill/>
+          <a:ln/>
+        </p:spPr>
+        <p:txBody>
+          <a:bodyPr wrap="square" lIns="0" tIns="0" rIns="0" bIns="0" rtlCol="0" anchor="t"/>
+          <a:lstStyle/>
+          <a:p>
+            <a:pPr algn="l" indent="0" marL="0">
+              <a:lnSpc>
+                <a:spcPct val="130000"/>
+              </a:lnSpc>
+              <a:buNone/>
+            </a:pPr>
+            <a:r>
+              <a:rPr lang="en-US" sz="2000" dirty="0">
+                <a:solidFill>
+                  <a:srgbClr val="B0BAC3"/>
+                </a:solidFill>
+                <a:latin typeface="Mona Sans" pitchFamily="34" charset="0"/>
+                <a:ea typeface="Mona Sans" pitchFamily="34" charset="-122"/>
+                <a:cs typeface="Mona Sans" pitchFamily="34" charset="-120"/>
+              </a:rPr>
+              <a:t>Code explainer: teach where a feature or behavior lives; read-only.</a:t>
+            </a:r>
+            <a:endParaRPr lang="en-US" sz="2000" dirty="0"/>
+          </a:p>
+        </p:txBody>
+      </p:sp>
+      <p:sp>
+        <p:nvSpPr>
+          <p:cNvPr id="18" name="Text 15"/>
+          <p:cNvSpPr/>
+          <p:nvPr/>
+        </p:nvSpPr>
+        <p:spPr>
+          <a:xfrm>
+            <a:off x="548640" y="4669104"/>
+            <a:ext cx="164592" cy="330200"/>
+          </a:xfrm>
+          <a:prstGeom prst="rect">
+            <a:avLst/>
+          </a:prstGeom>
+          <a:noFill/>
+          <a:ln/>
+        </p:spPr>
+        <p:txBody>
+          <a:bodyPr wrap="square" lIns="0" tIns="0" rIns="0" bIns="0" rtlCol="0" anchor="t"/>
+          <a:lstStyle/>
+          <a:p>
+            <a:pPr algn="l" indent="0" marL="0">
+              <a:lnSpc>
+                <a:spcPct val="130000"/>
+              </a:lnSpc>
+              <a:buNone/>
+            </a:pPr>
+            <a:r>
+              <a:rPr lang="en-US" sz="2000" dirty="0">
+                <a:solidFill>
+                  <a:srgbClr val="0EBE3D"/>
+                </a:solidFill>
+                <a:latin typeface="Mona Sans" pitchFamily="34" charset="0"/>
+                <a:ea typeface="Mona Sans" pitchFamily="34" charset="-122"/>
+                <a:cs typeface="Mona Sans" pitchFamily="34" charset="-120"/>
+              </a:rPr>
+              <a:t>•</a:t>
+            </a:r>
+            <a:endParaRPr lang="en-US" sz="2000" dirty="0"/>
+          </a:p>
+        </p:txBody>
+      </p:sp>
+      <p:sp>
+        <p:nvSpPr>
+          <p:cNvPr id="19" name="Text 16"/>
+          <p:cNvSpPr/>
+          <p:nvPr/>
+        </p:nvSpPr>
+        <p:spPr>
+          <a:xfrm>
+            <a:off x="804672" y="4669104"/>
+            <a:ext cx="10838383" cy="330200"/>
+          </a:xfrm>
+          <a:prstGeom prst="rect">
+            <a:avLst/>
+          </a:prstGeom>
+          <a:noFill/>
+          <a:ln/>
+        </p:spPr>
+        <p:txBody>
+          <a:bodyPr wrap="square" lIns="0" tIns="0" rIns="0" bIns="0" rtlCol="0" anchor="t"/>
+          <a:lstStyle/>
+          <a:p>
+            <a:pPr algn="l" indent="0" marL="0">
+              <a:lnSpc>
+                <a:spcPct val="130000"/>
+              </a:lnSpc>
+              <a:buNone/>
+            </a:pPr>
+            <a:r>
+              <a:rPr lang="en-US" sz="2000" dirty="0">
+                <a:solidFill>
+                  <a:srgbClr val="B0BAC3"/>
+                </a:solidFill>
+                <a:latin typeface="Mona Sans" pitchFamily="34" charset="0"/>
+                <a:ea typeface="Mona Sans" pitchFamily="34" charset="-122"/>
+                <a:cs typeface="Mona Sans" pitchFamily="34" charset="-120"/>
+              </a:rPr>
+              <a:t>Feature builder: implement one small change after a plan; inspect the diff.</a:t>
+            </a:r>
+            <a:endParaRPr lang="en-US" sz="2000" dirty="0"/>
+          </a:p>
+        </p:txBody>
+      </p:sp>
+      <p:sp>
+        <p:nvSpPr>
+          <p:cNvPr id="20" name="Text 17"/>
+          <p:cNvSpPr/>
+          <p:nvPr/>
+        </p:nvSpPr>
+        <p:spPr>
+          <a:xfrm>
+            <a:off x="548640" y="5255336"/>
+            <a:ext cx="164592" cy="330200"/>
+          </a:xfrm>
+          <a:prstGeom prst="rect">
+            <a:avLst/>
+          </a:prstGeom>
+          <a:noFill/>
+          <a:ln/>
+        </p:spPr>
+        <p:txBody>
+          <a:bodyPr wrap="square" lIns="0" tIns="0" rIns="0" bIns="0" rtlCol="0" anchor="t"/>
+          <a:lstStyle/>
+          <a:p>
+            <a:pPr algn="l" indent="0" marL="0">
+              <a:lnSpc>
+                <a:spcPct val="130000"/>
+              </a:lnSpc>
+              <a:buNone/>
+            </a:pPr>
+            <a:r>
+              <a:rPr lang="en-US" sz="2000" dirty="0">
+                <a:solidFill>
+                  <a:srgbClr val="0EBE3D"/>
+                </a:solidFill>
+                <a:latin typeface="Mona Sans" pitchFamily="34" charset="0"/>
+                <a:ea typeface="Mona Sans" pitchFamily="34" charset="-122"/>
+                <a:cs typeface="Mona Sans" pitchFamily="34" charset="-120"/>
+              </a:rPr>
+              <a:t>•</a:t>
+            </a:r>
+            <a:endParaRPr lang="en-US" sz="2000" dirty="0"/>
+          </a:p>
+        </p:txBody>
+      </p:sp>
+      <p:sp>
+        <p:nvSpPr>
+          <p:cNvPr id="21" name="Text 18"/>
+          <p:cNvSpPr/>
+          <p:nvPr/>
+        </p:nvSpPr>
+        <p:spPr>
+          <a:xfrm>
+            <a:off x="804672" y="5255336"/>
+            <a:ext cx="10838383" cy="330200"/>
+          </a:xfrm>
+          <a:prstGeom prst="rect">
+            <a:avLst/>
+          </a:prstGeom>
+          <a:noFill/>
+          <a:ln/>
+        </p:spPr>
+        <p:txBody>
+          <a:bodyPr wrap="square" lIns="0" tIns="0" rIns="0" bIns="0" rtlCol="0" anchor="t"/>
+          <a:lstStyle/>
+          <a:p>
+            <a:pPr algn="l" indent="0" marL="0">
+              <a:lnSpc>
+                <a:spcPct val="130000"/>
+              </a:lnSpc>
+              <a:buNone/>
+            </a:pPr>
+            <a:r>
+              <a:rPr lang="en-US" sz="2000" dirty="0">
+                <a:solidFill>
+                  <a:srgbClr val="B0BAC3"/>
+                </a:solidFill>
+                <a:latin typeface="Mona Sans" pitchFamily="34" charset="0"/>
+                <a:ea typeface="Mona Sans" pitchFamily="34" charset="-122"/>
+                <a:cs typeface="Mona Sans" pitchFamily="34" charset="-120"/>
+              </a:rPr>
+              <a:t>Documentation helper: draft or update one named document.</a:t>
+            </a:r>
+            <a:endParaRPr lang="en-US" sz="2000" dirty="0"/>
+          </a:p>
+        </p:txBody>
+      </p:sp>
+    </p:spTree>
+  </p:cSld>
+  <p:clrMapOvr>
+    <a:masterClrMapping/>
+  </p:clrMapOvr>
+</p:sld>
+</file>
+
+<file path=ppt/slides/slide19.xml><?xml version="1.0" encoding="utf-8"?>
+<p:sld xmlns:a="http://schemas.openxmlformats.org/drawingml/2006/main" xmlns:r="http://schemas.openxmlformats.org/officeDocument/2006/relationships" xmlns:p="http://schemas.openxmlformats.org/presentationml/2006/main">
+  <p:cSld name="Slide 19">
+    <p:spTree>
+      <p:nvGrpSpPr>
+        <p:cNvPr id="1" name=""/>
+        <p:cNvGrpSpPr/>
+        <p:nvPr/>
+      </p:nvGrpSpPr>
+      <p:grpSpPr>
+        <a:xfrm>
+          <a:off x="0" y="0"/>
+          <a:ext cx="0" cy="0"/>
+          <a:chOff x="0" y="0"/>
+          <a:chExt cx="0" cy="0"/>
+        </a:xfrm>
+      </p:grpSpPr>
+      <p:sp>
+        <p:nvSpPr>
+          <p:cNvPr id="2" name="QA:bg"/>
+          <p:cNvSpPr/>
+          <p:nvPr/>
+        </p:nvSpPr>
+        <p:spPr>
+          <a:xfrm>
+            <a:off x="0" y="0"/>
+            <a:ext cx="12191695" cy="6858000"/>
+          </a:xfrm>
+          <a:prstGeom prst="rect">
+            <a:avLst/>
+          </a:prstGeom>
+          <a:solidFill>
+            <a:srgbClr val="101411"/>
+          </a:solidFill>
+          <a:ln/>
+        </p:spPr>
+      </p:sp>
+      <p:sp>
+        <p:nvSpPr>
+          <p:cNvPr id="3" name="QA:chrome"/>
+          <p:cNvSpPr/>
+          <p:nvPr/>
+        </p:nvSpPr>
+        <p:spPr>
+          <a:xfrm>
+            <a:off x="0" y="6454800"/>
+            <a:ext cx="12191695" cy="18000"/>
+          </a:xfrm>
+          <a:prstGeom prst="rect">
+            <a:avLst/>
+          </a:prstGeom>
+          <a:solidFill>
+            <a:srgbClr val="0EBE3D"/>
+          </a:solidFill>
+          <a:ln/>
+        </p:spPr>
+      </p:sp>
+      <p:sp>
+        <p:nvSpPr>
+          <p:cNvPr id="4" name="QA:chrome"/>
+          <p:cNvSpPr/>
+          <p:nvPr/>
+        </p:nvSpPr>
+        <p:spPr>
+          <a:xfrm>
+            <a:off x="548640" y="6526800"/>
+            <a:ext cx="457200" cy="288000"/>
+          </a:xfrm>
+          <a:prstGeom prst="rect">
+            <a:avLst/>
+          </a:prstGeom>
+          <a:noFill/>
+          <a:ln/>
+        </p:spPr>
+        <p:txBody>
+          <a:bodyPr wrap="square" lIns="0" tIns="0" rIns="0" bIns="0" rtlCol="0" anchor="t"/>
+          <a:lstStyle/>
+          <a:p>
+            <a:pPr algn="l" indent="0" marL="0">
+              <a:lnSpc>
+                <a:spcPct val="120000"/>
+              </a:lnSpc>
+              <a:buNone/>
+            </a:pPr>
+            <a:r>
+              <a:rPr lang="en-US" sz="1200" dirty="0">
+                <a:solidFill>
+                  <a:srgbClr val="909692"/>
+                </a:solidFill>
+                <a:latin typeface="Mona Sans" pitchFamily="34" charset="0"/>
+                <a:ea typeface="Mona Sans" pitchFamily="34" charset="-122"/>
+                <a:cs typeface="Mona Sans" pitchFamily="34" charset="-120"/>
+              </a:rPr>
+              <a:t>19</a:t>
+            </a:r>
+            <a:endParaRPr lang="en-US" sz="1200" dirty="0"/>
+          </a:p>
+        </p:txBody>
+      </p:sp>
+      <p:pic>
+        <p:nvPicPr>
+          <p:cNvPr id="5" name="QA:chrome" descr="/Users/ekyritsi/copilot-worktrees/my-pptx-generator/ekyritsi-super-journey/assets/logos/GitHub_Invertocat_White.png">    </p:cNvPr>
+          <p:cNvPicPr>
+            <a:picLocks noChangeAspect="1"/>
+          </p:cNvPicPr>
+          <p:nvPr/>
+        </p:nvPicPr>
+        <p:blipFill>
+          <a:blip r:embed="rId1"/>
+          <a:stretch>
+            <a:fillRect/>
+          </a:stretch>
+        </p:blipFill>
+        <p:spPr>
+          <a:xfrm>
+            <a:off x="11752495" y="6530400"/>
+            <a:ext cx="259200" cy="252000"/>
+          </a:xfrm>
+          <a:prstGeom prst="rect">
+            <a:avLst/>
+          </a:prstGeom>
+        </p:spPr>
+      </p:pic>
+      <p:sp>
+        <p:nvSpPr>
+          <p:cNvPr id="6" name="QA:chrome"/>
+          <p:cNvSpPr/>
+          <p:nvPr/>
+        </p:nvSpPr>
+        <p:spPr>
+          <a:xfrm>
+            <a:off x="11669695" y="6472800"/>
+            <a:ext cx="10800" cy="385200"/>
+          </a:xfrm>
+          <a:prstGeom prst="rect">
+            <a:avLst/>
+          </a:prstGeom>
+          <a:solidFill>
+            <a:srgbClr val="909692"/>
+          </a:solidFill>
+          <a:ln/>
+        </p:spPr>
+      </p:sp>
+      <p:sp>
+        <p:nvSpPr>
+          <p:cNvPr id="7" name="QA:slide_title"/>
+          <p:cNvSpPr/>
+          <p:nvPr/>
+        </p:nvSpPr>
+        <p:spPr>
+          <a:xfrm>
+            <a:off x="548640" y="228600"/>
+            <a:ext cx="11094415" cy="594360"/>
+          </a:xfrm>
+          <a:prstGeom prst="rect">
+            <a:avLst/>
+          </a:prstGeom>
+          <a:noFill/>
+          <a:ln/>
+        </p:spPr>
+        <p:txBody>
+          <a:bodyPr wrap="square" lIns="0" tIns="0" rIns="0" bIns="0" rtlCol="0" anchor="t"/>
+          <a:lstStyle/>
+          <a:p>
+            <a:pPr algn="l" indent="0" marL="0">
+              <a:lnSpc>
+                <a:spcPct val="120000"/>
+              </a:lnSpc>
+              <a:buNone/>
+            </a:pPr>
+            <a:r>
+              <a:rPr lang="en-US" sz="2800" b="1" dirty="0">
+                <a:solidFill>
+                  <a:srgbClr val="FFFFFF"/>
+                </a:solidFill>
+                <a:latin typeface="Mona Sans" pitchFamily="34" charset="0"/>
+                <a:ea typeface="Mona Sans" pitchFamily="34" charset="-122"/>
+                <a:cs typeface="Mona Sans" pitchFamily="34" charset="-120"/>
+              </a:rPr>
+              <a:t>Hands-on 2 · Create and test your agent</a:t>
+            </a:r>
+            <a:endParaRPr lang="en-US" sz="2800" dirty="0"/>
+          </a:p>
+        </p:txBody>
+      </p:sp>
+      <p:sp>
+        <p:nvSpPr>
+          <p:cNvPr id="8" name="QA:card"/>
+          <p:cNvSpPr/>
+          <p:nvPr/>
+        </p:nvSpPr>
+        <p:spPr>
+          <a:xfrm>
+            <a:off x="548640" y="1005840"/>
+            <a:ext cx="11094415" cy="5311800"/>
+          </a:xfrm>
+          <a:prstGeom prst="roundRect">
+            <a:avLst>
+              <a:gd name="adj" fmla="val 2754"/>
+            </a:avLst>
+          </a:prstGeom>
+          <a:solidFill>
+            <a:srgbClr val="20262C"/>
+          </a:solidFill>
+          <a:ln w="9525">
+            <a:solidFill>
+              <a:srgbClr val="5A615C"/>
+            </a:solidFill>
+            <a:prstDash val="solid"/>
+          </a:ln>
+        </p:spPr>
+      </p:sp>
+      <p:sp>
+        <p:nvSpPr>
+          <p:cNvPr id="9" name="QA:check:0"/>
+          <p:cNvSpPr/>
+          <p:nvPr/>
+        </p:nvSpPr>
+        <p:spPr>
+          <a:xfrm>
+            <a:off x="914400" y="1525000"/>
+            <a:ext cx="347472" cy="347472"/>
+          </a:xfrm>
+          <a:prstGeom prst="roundRect">
+            <a:avLst>
+              <a:gd name="adj" fmla="val 50000"/>
+            </a:avLst>
+          </a:prstGeom>
+          <a:ln w="19050">
+            <a:solidFill>
+              <a:srgbClr val="909692"/>
+            </a:solidFill>
+            <a:prstDash val="solid"/>
+          </a:ln>
+        </p:spPr>
+      </p:sp>
+      <p:sp>
+        <p:nvSpPr>
+          <p:cNvPr id="10" name="QA:heading:0"/>
+          <p:cNvSpPr/>
+          <p:nvPr/>
+        </p:nvSpPr>
+        <p:spPr>
+          <a:xfrm>
+            <a:off x="1645920" y="1546336"/>
+            <a:ext cx="9631375" cy="304800"/>
+          </a:xfrm>
+          <a:prstGeom prst="rect">
+            <a:avLst/>
+          </a:prstGeom>
+          <a:noFill/>
+          <a:ln/>
+        </p:spPr>
+        <p:txBody>
+          <a:bodyPr wrap="square" lIns="0" tIns="0" rIns="0" bIns="0" rtlCol="0" anchor="t"/>
+          <a:lstStyle/>
+          <a:p>
+            <a:pPr algn="l" indent="0" marL="0">
+              <a:lnSpc>
+                <a:spcPct val="120000"/>
+              </a:lnSpc>
+              <a:buNone/>
+            </a:pPr>
+            <a:r>
+              <a:rPr lang="en-US" sz="2000" b="1" dirty="0">
+                <a:solidFill>
+                  <a:srgbClr val="FFFFFF"/>
+                </a:solidFill>
+                <a:latin typeface="Mona Sans" pitchFamily="34" charset="0"/>
+                <a:ea typeface="Mona Sans" pitchFamily="34" charset="-122"/>
+                <a:cs typeface="Mona Sans" pitchFamily="34" charset="-120"/>
+              </a:rPr>
+              <a:t>Inspect the Book App Reviewer definition</a:t>
+            </a:r>
+            <a:endParaRPr lang="en-US" sz="2000" dirty="0"/>
+          </a:p>
+        </p:txBody>
+      </p:sp>
+      <p:sp>
+        <p:nvSpPr>
+          <p:cNvPr id="11" name="Shape 8"/>
+          <p:cNvSpPr/>
+          <p:nvPr/>
+        </p:nvSpPr>
+        <p:spPr>
+          <a:xfrm>
+            <a:off x="914400" y="2183137"/>
+            <a:ext cx="10362895" cy="12700"/>
+          </a:xfrm>
+          <a:prstGeom prst="rect">
+            <a:avLst/>
+          </a:prstGeom>
+          <a:solidFill>
+            <a:srgbClr val="5A615C"/>
+          </a:solidFill>
+          <a:ln/>
+        </p:spPr>
+      </p:sp>
+      <p:sp>
+        <p:nvSpPr>
+          <p:cNvPr id="12" name="QA:check:1"/>
+          <p:cNvSpPr/>
+          <p:nvPr/>
+        </p:nvSpPr>
+        <p:spPr>
+          <a:xfrm>
+            <a:off x="914400" y="2506502"/>
+            <a:ext cx="347472" cy="347472"/>
+          </a:xfrm>
+          <a:prstGeom prst="roundRect">
+            <a:avLst>
+              <a:gd name="adj" fmla="val 50000"/>
+            </a:avLst>
+          </a:prstGeom>
+          <a:ln w="19050">
+            <a:solidFill>
+              <a:srgbClr val="909692"/>
+            </a:solidFill>
+            <a:prstDash val="solid"/>
+          </a:ln>
+        </p:spPr>
+      </p:sp>
+      <p:sp>
+        <p:nvSpPr>
+          <p:cNvPr id="13" name="QA:heading:1"/>
+          <p:cNvSpPr/>
+          <p:nvPr/>
+        </p:nvSpPr>
+        <p:spPr>
+          <a:xfrm>
+            <a:off x="1645920" y="2527838"/>
+            <a:ext cx="9631375" cy="304800"/>
+          </a:xfrm>
+          <a:prstGeom prst="rect">
+            <a:avLst/>
+          </a:prstGeom>
+          <a:noFill/>
+          <a:ln/>
+        </p:spPr>
+        <p:txBody>
+          <a:bodyPr wrap="square" lIns="0" tIns="0" rIns="0" bIns="0" rtlCol="0" anchor="t"/>
+          <a:lstStyle/>
+          <a:p>
+            <a:pPr algn="l" indent="0" marL="0">
+              <a:lnSpc>
+                <a:spcPct val="120000"/>
+              </a:lnSpc>
+              <a:buNone/>
+            </a:pPr>
+            <a:r>
+              <a:rPr lang="en-US" sz="2000" b="1" dirty="0">
+                <a:solidFill>
+                  <a:srgbClr val="FFFFFF"/>
+                </a:solidFill>
+                <a:latin typeface="Mona Sans" pitchFamily="34" charset="0"/>
+                <a:ea typeface="Mona Sans" pitchFamily="34" charset="-122"/>
+                <a:cs typeface="Mona Sans" pitchFamily="34" charset="-120"/>
+              </a:rPr>
+              <a:t>Choose a role and decide what tools it needs</a:t>
+            </a:r>
+            <a:endParaRPr lang="en-US" sz="2000" dirty="0"/>
+          </a:p>
+        </p:txBody>
+      </p:sp>
+      <p:sp>
+        <p:nvSpPr>
+          <p:cNvPr id="14" name="Shape 11"/>
+          <p:cNvSpPr/>
+          <p:nvPr/>
+        </p:nvSpPr>
+        <p:spPr>
+          <a:xfrm>
+            <a:off x="914400" y="3164639"/>
+            <a:ext cx="10362895" cy="12700"/>
+          </a:xfrm>
+          <a:prstGeom prst="rect">
+            <a:avLst/>
+          </a:prstGeom>
+          <a:solidFill>
+            <a:srgbClr val="5A615C"/>
+          </a:solidFill>
+          <a:ln/>
+        </p:spPr>
+      </p:sp>
+      <p:sp>
+        <p:nvSpPr>
+          <p:cNvPr id="15" name="QA:check:2"/>
+          <p:cNvSpPr/>
+          <p:nvPr/>
+        </p:nvSpPr>
+        <p:spPr>
+          <a:xfrm>
+            <a:off x="914400" y="3488004"/>
+            <a:ext cx="347472" cy="347472"/>
+          </a:xfrm>
+          <a:prstGeom prst="roundRect">
+            <a:avLst>
+              <a:gd name="adj" fmla="val 50000"/>
+            </a:avLst>
+          </a:prstGeom>
+          <a:ln w="19050">
+            <a:solidFill>
+              <a:srgbClr val="909692"/>
+            </a:solidFill>
+            <a:prstDash val="solid"/>
+          </a:ln>
+        </p:spPr>
+      </p:sp>
+      <p:sp>
+        <p:nvSpPr>
+          <p:cNvPr id="16" name="QA:heading:2"/>
+          <p:cNvSpPr/>
+          <p:nvPr/>
+        </p:nvSpPr>
+        <p:spPr>
+          <a:xfrm>
+            <a:off x="1645920" y="3509340"/>
+            <a:ext cx="9631375" cy="304800"/>
+          </a:xfrm>
+          <a:prstGeom prst="rect">
+            <a:avLst/>
+          </a:prstGeom>
+          <a:noFill/>
+          <a:ln/>
+        </p:spPr>
+        <p:txBody>
+          <a:bodyPr wrap="square" lIns="0" tIns="0" rIns="0" bIns="0" rtlCol="0" anchor="t"/>
+          <a:lstStyle/>
+          <a:p>
+            <a:pPr algn="l" indent="0" marL="0">
+              <a:lnSpc>
+                <a:spcPct val="120000"/>
+              </a:lnSpc>
+              <a:buNone/>
+            </a:pPr>
+            <a:r>
+              <a:rPr lang="en-US" sz="2000" b="1" dirty="0">
+                <a:solidFill>
+                  <a:srgbClr val="FFFFFF"/>
+                </a:solidFill>
+                <a:latin typeface="Mona Sans" pitchFamily="34" charset="0"/>
+                <a:ea typeface="Mona Sans" pitchFamily="34" charset="-122"/>
+                <a:cs typeface="Mona Sans" pitchFamily="34" charset="-120"/>
+              </a:rPr>
+              <a:t>Create a separate agent file under .github/agents/</a:t>
+            </a:r>
+            <a:endParaRPr lang="en-US" sz="2000" dirty="0"/>
+          </a:p>
+        </p:txBody>
+      </p:sp>
+      <p:sp>
+        <p:nvSpPr>
+          <p:cNvPr id="17" name="Shape 14"/>
+          <p:cNvSpPr/>
+          <p:nvPr/>
+        </p:nvSpPr>
+        <p:spPr>
+          <a:xfrm>
+            <a:off x="914400" y="4146141"/>
+            <a:ext cx="10362895" cy="12700"/>
+          </a:xfrm>
+          <a:prstGeom prst="rect">
+            <a:avLst/>
+          </a:prstGeom>
+          <a:solidFill>
+            <a:srgbClr val="5A615C"/>
+          </a:solidFill>
+          <a:ln/>
+        </p:spPr>
+      </p:sp>
+      <p:sp>
+        <p:nvSpPr>
+          <p:cNvPr id="18" name="QA:check:3"/>
+          <p:cNvSpPr/>
+          <p:nvPr/>
+        </p:nvSpPr>
+        <p:spPr>
+          <a:xfrm>
+            <a:off x="914400" y="4469506"/>
+            <a:ext cx="347472" cy="347472"/>
+          </a:xfrm>
+          <a:prstGeom prst="roundRect">
+            <a:avLst>
+              <a:gd name="adj" fmla="val 50000"/>
+            </a:avLst>
+          </a:prstGeom>
+          <a:ln w="19050">
+            <a:solidFill>
+              <a:srgbClr val="909692"/>
+            </a:solidFill>
+            <a:prstDash val="solid"/>
+          </a:ln>
+        </p:spPr>
+      </p:sp>
+      <p:sp>
+        <p:nvSpPr>
+          <p:cNvPr id="19" name="QA:heading:3"/>
+          <p:cNvSpPr/>
+          <p:nvPr/>
+        </p:nvSpPr>
+        <p:spPr>
+          <a:xfrm>
+            <a:off x="1645920" y="4490842"/>
+            <a:ext cx="9631375" cy="304800"/>
+          </a:xfrm>
+          <a:prstGeom prst="rect">
+            <a:avLst/>
+          </a:prstGeom>
+          <a:noFill/>
+          <a:ln/>
+        </p:spPr>
+        <p:txBody>
+          <a:bodyPr wrap="square" lIns="0" tIns="0" rIns="0" bIns="0" rtlCol="0" anchor="t"/>
+          <a:lstStyle/>
+          <a:p>
+            <a:pPr algn="l" indent="0" marL="0">
+              <a:lnSpc>
+                <a:spcPct val="120000"/>
+              </a:lnSpc>
+              <a:buNone/>
+            </a:pPr>
+            <a:r>
+              <a:rPr lang="en-US" sz="2000" b="1" dirty="0">
+                <a:solidFill>
+                  <a:srgbClr val="FFFFFF"/>
+                </a:solidFill>
+                <a:latin typeface="Mona Sans" pitchFamily="34" charset="0"/>
+                <a:ea typeface="Mona Sans" pitchFamily="34" charset="-122"/>
+                <a:cs typeface="Mona Sans" pitchFamily="34" charset="-120"/>
+              </a:rPr>
+              <a:t>Reload if needed; select it and try its role on Clear filters</a:t>
+            </a:r>
+            <a:endParaRPr lang="en-US" sz="2000" dirty="0"/>
+          </a:p>
+        </p:txBody>
+      </p:sp>
+      <p:sp>
+        <p:nvSpPr>
+          <p:cNvPr id="20" name="Shape 17"/>
+          <p:cNvSpPr/>
+          <p:nvPr/>
+        </p:nvSpPr>
+        <p:spPr>
+          <a:xfrm>
+            <a:off x="914400" y="5127643"/>
+            <a:ext cx="10362895" cy="12700"/>
+          </a:xfrm>
+          <a:prstGeom prst="rect">
+            <a:avLst/>
+          </a:prstGeom>
+          <a:solidFill>
+            <a:srgbClr val="5A615C"/>
+          </a:solidFill>
+          <a:ln/>
+        </p:spPr>
+      </p:sp>
+      <p:sp>
+        <p:nvSpPr>
+          <p:cNvPr id="21" name="QA:check:4"/>
+          <p:cNvSpPr/>
+          <p:nvPr/>
+        </p:nvSpPr>
+        <p:spPr>
+          <a:xfrm>
+            <a:off x="914400" y="5451008"/>
+            <a:ext cx="347472" cy="347472"/>
+          </a:xfrm>
+          <a:prstGeom prst="roundRect">
+            <a:avLst>
+              <a:gd name="adj" fmla="val 50000"/>
+            </a:avLst>
+          </a:prstGeom>
+          <a:ln w="19050">
+            <a:solidFill>
+              <a:srgbClr val="909692"/>
+            </a:solidFill>
+            <a:prstDash val="solid"/>
+          </a:ln>
+        </p:spPr>
+      </p:sp>
+      <p:sp>
+        <p:nvSpPr>
+          <p:cNvPr id="22" name="QA:heading:4"/>
+          <p:cNvSpPr/>
+          <p:nvPr/>
+        </p:nvSpPr>
+        <p:spPr>
+          <a:xfrm>
+            <a:off x="1645920" y="5472344"/>
+            <a:ext cx="9631375" cy="304800"/>
+          </a:xfrm>
+          <a:prstGeom prst="rect">
+            <a:avLst/>
+          </a:prstGeom>
+          <a:noFill/>
+          <a:ln/>
+        </p:spPr>
+        <p:txBody>
+          <a:bodyPr wrap="square" lIns="0" tIns="0" rIns="0" bIns="0" rtlCol="0" anchor="t"/>
+          <a:lstStyle/>
+          <a:p>
+            <a:pPr algn="l" indent="0" marL="0">
+              <a:lnSpc>
+                <a:spcPct val="120000"/>
+              </a:lnSpc>
+              <a:buNone/>
+            </a:pPr>
+            <a:r>
+              <a:rPr lang="en-US" sz="2000" b="1" dirty="0">
+                <a:solidFill>
+                  <a:srgbClr val="FFFFFF"/>
+                </a:solidFill>
+                <a:latin typeface="Mona Sans" pitchFamily="34" charset="0"/>
+                <a:ea typeface="Mona Sans" pitchFamily="34" charset="-122"/>
+                <a:cs typeface="Mona Sans" pitchFamily="34" charset="-120"/>
+              </a:rPr>
+              <a:t>Check its evidence and inspect any changes it made</a:t>
+            </a:r>
+            <a:endParaRPr lang="en-US" sz="2000" dirty="0"/>
+          </a:p>
+        </p:txBody>
+      </p:sp>
+    </p:spTree>
+  </p:cSld>
+  <p:clrMapOvr>
+    <a:masterClrMapping/>
+  </p:clrMapOvr>
+</p:sld>
+</file>
+
+<file path=ppt/slides/slide2.xml><?xml version="1.0" encoding="utf-8"?>
+<p:sld xmlns:a="http://schemas.openxmlformats.org/drawingml/2006/main" xmlns:r="http://schemas.openxmlformats.org/officeDocument/2006/relationships" xmlns:p="http://schemas.openxmlformats.org/presentationml/2006/main">
+  <p:cSld name="Slide 2">
+    <p:spTree>
+      <p:nvGrpSpPr>
+        <p:cNvPr id="1" name=""/>
+        <p:cNvGrpSpPr/>
+        <p:nvPr/>
+      </p:nvGrpSpPr>
+      <p:grpSpPr>
+        <a:xfrm>
+          <a:off x="0" y="0"/>
+          <a:ext cx="0" cy="0"/>
+          <a:chOff x="0" y="0"/>
+          <a:chExt cx="0" cy="0"/>
+        </a:xfrm>
+      </p:grpSpPr>
+      <p:sp>
+        <p:nvSpPr>
+          <p:cNvPr id="2" name="QA:bg"/>
+          <p:cNvSpPr/>
+          <p:nvPr/>
+        </p:nvSpPr>
+        <p:spPr>
+          <a:xfrm>
+            <a:off x="0" y="0"/>
+            <a:ext cx="12191695" cy="6858000"/>
+          </a:xfrm>
+          <a:prstGeom prst="rect">
+            <a:avLst/>
+          </a:prstGeom>
+          <a:solidFill>
+            <a:srgbClr val="101411"/>
+          </a:solidFill>
+          <a:ln/>
+        </p:spPr>
+      </p:sp>
+      <p:sp>
+        <p:nvSpPr>
+          <p:cNvPr id="3" name="QA:chrome"/>
+          <p:cNvSpPr/>
+          <p:nvPr/>
+        </p:nvSpPr>
+        <p:spPr>
+          <a:xfrm>
+            <a:off x="0" y="6454800"/>
+            <a:ext cx="12191695" cy="18000"/>
+          </a:xfrm>
+          <a:prstGeom prst="rect">
+            <a:avLst/>
+          </a:prstGeom>
+          <a:solidFill>
+            <a:srgbClr val="0EBE3D"/>
+          </a:solidFill>
+          <a:ln/>
+        </p:spPr>
+      </p:sp>
+      <p:sp>
+        <p:nvSpPr>
+          <p:cNvPr id="4" name="QA:chrome"/>
+          <p:cNvSpPr/>
+          <p:nvPr/>
+        </p:nvSpPr>
+        <p:spPr>
+          <a:xfrm>
+            <a:off x="548640" y="6526800"/>
+            <a:ext cx="457200" cy="288000"/>
+          </a:xfrm>
+          <a:prstGeom prst="rect">
+            <a:avLst/>
+          </a:prstGeom>
+          <a:noFill/>
+          <a:ln/>
+        </p:spPr>
+        <p:txBody>
+          <a:bodyPr wrap="square" lIns="0" tIns="0" rIns="0" bIns="0" rtlCol="0" anchor="t"/>
+          <a:lstStyle/>
+          <a:p>
+            <a:pPr algn="l" indent="0" marL="0">
+              <a:lnSpc>
+                <a:spcPct val="120000"/>
+              </a:lnSpc>
+              <a:buNone/>
+            </a:pPr>
+            <a:r>
+              <a:rPr lang="en-US" sz="1200" dirty="0">
+                <a:solidFill>
+                  <a:srgbClr val="909692"/>
+                </a:solidFill>
+                <a:latin typeface="Mona Sans" pitchFamily="34" charset="0"/>
+                <a:ea typeface="Mona Sans" pitchFamily="34" charset="-122"/>
+                <a:cs typeface="Mona Sans" pitchFamily="34" charset="-120"/>
+              </a:rPr>
+              <a:t>2</a:t>
+            </a:r>
+            <a:endParaRPr lang="en-US" sz="1200" dirty="0"/>
+          </a:p>
+        </p:txBody>
+      </p:sp>
+      <p:pic>
+        <p:nvPicPr>
+          <p:cNvPr id="5" name="QA:chrome" descr="/Users/ekyritsi/copilot-worktrees/my-pptx-generator/ekyritsi-super-journey/assets/logos/GitHub_Invertocat_White.png">    </p:cNvPr>
+          <p:cNvPicPr>
+            <a:picLocks noChangeAspect="1"/>
+          </p:cNvPicPr>
+          <p:nvPr/>
+        </p:nvPicPr>
+        <p:blipFill>
+          <a:blip r:embed="rId1"/>
+          <a:stretch>
+            <a:fillRect/>
+          </a:stretch>
+        </p:blipFill>
+        <p:spPr>
+          <a:xfrm>
+            <a:off x="11752495" y="6530400"/>
+            <a:ext cx="259200" cy="252000"/>
+          </a:xfrm>
+          <a:prstGeom prst="rect">
+            <a:avLst/>
+          </a:prstGeom>
+        </p:spPr>
+      </p:pic>
+      <p:sp>
+        <p:nvSpPr>
+          <p:cNvPr id="6" name="QA:chrome"/>
+          <p:cNvSpPr/>
+          <p:nvPr/>
+        </p:nvSpPr>
+        <p:spPr>
+          <a:xfrm>
+            <a:off x="11669695" y="6472800"/>
+            <a:ext cx="10800" cy="385200"/>
+          </a:xfrm>
+          <a:prstGeom prst="rect">
+            <a:avLst/>
+          </a:prstGeom>
+          <a:solidFill>
+            <a:srgbClr val="909692"/>
+          </a:solidFill>
+          <a:ln/>
+        </p:spPr>
+      </p:sp>
+      <p:sp>
+        <p:nvSpPr>
+          <p:cNvPr id="7" name="QA:slide_title"/>
+          <p:cNvSpPr/>
+          <p:nvPr/>
+        </p:nvSpPr>
+        <p:spPr>
+          <a:xfrm>
+            <a:off x="548640" y="228600"/>
+            <a:ext cx="11094415" cy="594360"/>
+          </a:xfrm>
+          <a:prstGeom prst="rect">
+            <a:avLst/>
+          </a:prstGeom>
+          <a:noFill/>
+          <a:ln/>
+        </p:spPr>
+        <p:txBody>
+          <a:bodyPr wrap="square" lIns="0" tIns="0" rIns="0" bIns="0" rtlCol="0" anchor="t"/>
+          <a:lstStyle/>
+          <a:p>
+            <a:pPr algn="l" indent="0" marL="0">
+              <a:lnSpc>
+                <a:spcPct val="120000"/>
+              </a:lnSpc>
+              <a:buNone/>
+            </a:pPr>
+            <a:r>
+              <a:rPr lang="en-US" sz="2800" b="1" dirty="0">
+                <a:solidFill>
+                  <a:srgbClr val="FFFFFF"/>
+                </a:solidFill>
+                <a:latin typeface="Mona Sans" pitchFamily="34" charset="0"/>
+                <a:ea typeface="Mona Sans" pitchFamily="34" charset="-122"/>
+                <a:cs typeface="Mona Sans" pitchFamily="34" charset="-120"/>
+              </a:rPr>
+              <a:t>What makes the app different?</a:t>
+            </a:r>
+            <a:endParaRPr lang="en-US" sz="2800" dirty="0"/>
+          </a:p>
+        </p:txBody>
+      </p:sp>
+      <p:sp>
+        <p:nvSpPr>
+          <p:cNvPr id="8" name="Text 5"/>
+          <p:cNvSpPr/>
+          <p:nvPr/>
+        </p:nvSpPr>
+        <p:spPr>
+          <a:xfrm>
+            <a:off x="548640" y="2617292"/>
+            <a:ext cx="164592" cy="330200"/>
+          </a:xfrm>
+          <a:prstGeom prst="rect">
+            <a:avLst/>
+          </a:prstGeom>
+          <a:noFill/>
+          <a:ln/>
+        </p:spPr>
+        <p:txBody>
+          <a:bodyPr wrap="square" lIns="0" tIns="0" rIns="0" bIns="0" rtlCol="0" anchor="t"/>
+          <a:lstStyle/>
+          <a:p>
+            <a:pPr algn="l" indent="0" marL="0">
+              <a:lnSpc>
+                <a:spcPct val="130000"/>
+              </a:lnSpc>
+              <a:buNone/>
+            </a:pPr>
+            <a:r>
+              <a:rPr lang="en-US" sz="2000" dirty="0">
+                <a:solidFill>
+                  <a:srgbClr val="0EBE3D"/>
+                </a:solidFill>
+                <a:latin typeface="Mona Sans" pitchFamily="34" charset="0"/>
+                <a:ea typeface="Mona Sans" pitchFamily="34" charset="-122"/>
+                <a:cs typeface="Mona Sans" pitchFamily="34" charset="-120"/>
+              </a:rPr>
+              <a:t>•</a:t>
+            </a:r>
+            <a:endParaRPr lang="en-US" sz="2000" dirty="0"/>
+          </a:p>
+        </p:txBody>
+      </p:sp>
+      <p:sp>
+        <p:nvSpPr>
+          <p:cNvPr id="9" name="Text 6"/>
+          <p:cNvSpPr/>
+          <p:nvPr/>
+        </p:nvSpPr>
+        <p:spPr>
+          <a:xfrm>
+            <a:off x="804672" y="2617292"/>
+            <a:ext cx="10838383" cy="330200"/>
+          </a:xfrm>
+          <a:prstGeom prst="rect">
+            <a:avLst/>
+          </a:prstGeom>
+          <a:noFill/>
+          <a:ln/>
+        </p:spPr>
+        <p:txBody>
+          <a:bodyPr wrap="square" lIns="0" tIns="0" rIns="0" bIns="0" rtlCol="0" anchor="t"/>
+          <a:lstStyle/>
+          <a:p>
+            <a:pPr algn="l" indent="0" marL="0">
+              <a:lnSpc>
+                <a:spcPct val="130000"/>
+              </a:lnSpc>
+              <a:buNone/>
+            </a:pPr>
+            <a:r>
+              <a:rPr lang="en-US" sz="2000" dirty="0">
+                <a:solidFill>
+                  <a:srgbClr val="B0BAC3"/>
+                </a:solidFill>
+                <a:latin typeface="Mona Sans" pitchFamily="34" charset="0"/>
+                <a:ea typeface="Mona Sans" pitchFamily="34" charset="-122"/>
+                <a:cs typeface="Mona Sans" pitchFamily="34" charset="-120"/>
+              </a:rPr>
+              <a:t>Separate sessions: run focused tasks in parallel, each in its own worktree.</a:t>
+            </a:r>
+            <a:endParaRPr lang="en-US" sz="2000" dirty="0"/>
+          </a:p>
+        </p:txBody>
+      </p:sp>
+      <p:sp>
+        <p:nvSpPr>
+          <p:cNvPr id="10" name="Text 7"/>
+          <p:cNvSpPr/>
+          <p:nvPr/>
+        </p:nvSpPr>
+        <p:spPr>
+          <a:xfrm>
+            <a:off x="548640" y="3203524"/>
+            <a:ext cx="164592" cy="330200"/>
+          </a:xfrm>
+          <a:prstGeom prst="rect">
+            <a:avLst/>
+          </a:prstGeom>
+          <a:noFill/>
+          <a:ln/>
+        </p:spPr>
+        <p:txBody>
+          <a:bodyPr wrap="square" lIns="0" tIns="0" rIns="0" bIns="0" rtlCol="0" anchor="t"/>
+          <a:lstStyle/>
+          <a:p>
+            <a:pPr algn="l" indent="0" marL="0">
+              <a:lnSpc>
+                <a:spcPct val="130000"/>
+              </a:lnSpc>
+              <a:buNone/>
+            </a:pPr>
+            <a:r>
+              <a:rPr lang="en-US" sz="2000" dirty="0">
+                <a:solidFill>
+                  <a:srgbClr val="0EBE3D"/>
+                </a:solidFill>
+                <a:latin typeface="Mona Sans" pitchFamily="34" charset="0"/>
+                <a:ea typeface="Mona Sans" pitchFamily="34" charset="-122"/>
+                <a:cs typeface="Mona Sans" pitchFamily="34" charset="-120"/>
+              </a:rPr>
+              <a:t>•</a:t>
+            </a:r>
+            <a:endParaRPr lang="en-US" sz="2000" dirty="0"/>
+          </a:p>
+        </p:txBody>
+      </p:sp>
+      <p:sp>
+        <p:nvSpPr>
+          <p:cNvPr id="11" name="Text 8"/>
+          <p:cNvSpPr/>
+          <p:nvPr/>
+        </p:nvSpPr>
+        <p:spPr>
+          <a:xfrm>
+            <a:off x="804672" y="3203524"/>
+            <a:ext cx="10838383" cy="330200"/>
+          </a:xfrm>
+          <a:prstGeom prst="rect">
+            <a:avLst/>
+          </a:prstGeom>
+          <a:noFill/>
+          <a:ln/>
+        </p:spPr>
+        <p:txBody>
+          <a:bodyPr wrap="square" lIns="0" tIns="0" rIns="0" bIns="0" rtlCol="0" anchor="t"/>
+          <a:lstStyle/>
+          <a:p>
+            <a:pPr algn="l" indent="0" marL="0">
+              <a:lnSpc>
+                <a:spcPct val="130000"/>
+              </a:lnSpc>
+              <a:buNone/>
+            </a:pPr>
+            <a:r>
+              <a:rPr lang="en-US" sz="2000" dirty="0">
+                <a:solidFill>
+                  <a:srgbClr val="B0BAC3"/>
+                </a:solidFill>
+                <a:latin typeface="Mona Sans" pitchFamily="34" charset="0"/>
+                <a:ea typeface="Mona Sans" pitchFamily="34" charset="-122"/>
+                <a:cs typeface="Mona Sans" pitchFamily="34" charset="-120"/>
+              </a:rPr>
+              <a:t>See the work: keep plans, diffs, terminal output, and browser preview in one session.</a:t>
+            </a:r>
+            <a:endParaRPr lang="en-US" sz="2000" dirty="0"/>
+          </a:p>
+        </p:txBody>
+      </p:sp>
+      <p:sp>
+        <p:nvSpPr>
+          <p:cNvPr id="12" name="Text 9"/>
+          <p:cNvSpPr/>
+          <p:nvPr/>
+        </p:nvSpPr>
+        <p:spPr>
+          <a:xfrm>
+            <a:off x="548640" y="3789756"/>
+            <a:ext cx="164592" cy="330200"/>
+          </a:xfrm>
+          <a:prstGeom prst="rect">
+            <a:avLst/>
+          </a:prstGeom>
+          <a:noFill/>
+          <a:ln/>
+        </p:spPr>
+        <p:txBody>
+          <a:bodyPr wrap="square" lIns="0" tIns="0" rIns="0" bIns="0" rtlCol="0" anchor="t"/>
+          <a:lstStyle/>
+          <a:p>
+            <a:pPr algn="l" indent="0" marL="0">
+              <a:lnSpc>
+                <a:spcPct val="130000"/>
+              </a:lnSpc>
+              <a:buNone/>
+            </a:pPr>
+            <a:r>
+              <a:rPr lang="en-US" sz="2000" dirty="0">
+                <a:solidFill>
+                  <a:srgbClr val="0EBE3D"/>
+                </a:solidFill>
+                <a:latin typeface="Mona Sans" pitchFamily="34" charset="0"/>
+                <a:ea typeface="Mona Sans" pitchFamily="34" charset="-122"/>
+                <a:cs typeface="Mona Sans" pitchFamily="34" charset="-120"/>
+              </a:rPr>
+              <a:t>•</a:t>
+            </a:r>
+            <a:endParaRPr lang="en-US" sz="2000" dirty="0"/>
+          </a:p>
+        </p:txBody>
+      </p:sp>
+      <p:sp>
+        <p:nvSpPr>
+          <p:cNvPr id="13" name="Text 10"/>
+          <p:cNvSpPr/>
+          <p:nvPr/>
+        </p:nvSpPr>
+        <p:spPr>
+          <a:xfrm>
+            <a:off x="804672" y="3789756"/>
+            <a:ext cx="10838383" cy="330200"/>
+          </a:xfrm>
+          <a:prstGeom prst="rect">
+            <a:avLst/>
+          </a:prstGeom>
+          <a:noFill/>
+          <a:ln/>
+        </p:spPr>
+        <p:txBody>
+          <a:bodyPr wrap="square" lIns="0" tIns="0" rIns="0" bIns="0" rtlCol="0" anchor="t"/>
+          <a:lstStyle/>
+          <a:p>
+            <a:pPr algn="l" indent="0" marL="0">
+              <a:lnSpc>
+                <a:spcPct val="130000"/>
+              </a:lnSpc>
+              <a:buNone/>
+            </a:pPr>
+            <a:r>
+              <a:rPr lang="en-US" sz="2000" dirty="0">
+                <a:solidFill>
+                  <a:srgbClr val="B0BAC3"/>
+                </a:solidFill>
+                <a:latin typeface="Mona Sans" pitchFamily="34" charset="0"/>
+                <a:ea typeface="Mona Sans" pitchFamily="34" charset="-122"/>
+                <a:cs typeface="Mona Sans" pitchFamily="34" charset="-120"/>
+              </a:rPr>
+              <a:t>Specialize help: use a custom agent for a defined role and a skill for reusable task guidance.</a:t>
+            </a:r>
+            <a:endParaRPr lang="en-US" sz="2000" dirty="0"/>
+          </a:p>
+        </p:txBody>
+      </p:sp>
+      <p:sp>
+        <p:nvSpPr>
+          <p:cNvPr id="14" name="Text 11"/>
+          <p:cNvSpPr/>
+          <p:nvPr/>
+        </p:nvSpPr>
+        <p:spPr>
+          <a:xfrm>
+            <a:off x="548640" y="4375988"/>
+            <a:ext cx="164592" cy="330200"/>
+          </a:xfrm>
+          <a:prstGeom prst="rect">
+            <a:avLst/>
+          </a:prstGeom>
+          <a:noFill/>
+          <a:ln/>
+        </p:spPr>
+        <p:txBody>
+          <a:bodyPr wrap="square" lIns="0" tIns="0" rIns="0" bIns="0" rtlCol="0" anchor="t"/>
+          <a:lstStyle/>
+          <a:p>
+            <a:pPr algn="l" indent="0" marL="0">
+              <a:lnSpc>
+                <a:spcPct val="130000"/>
+              </a:lnSpc>
+              <a:buNone/>
+            </a:pPr>
+            <a:r>
+              <a:rPr lang="en-US" sz="2000" dirty="0">
+                <a:solidFill>
+                  <a:srgbClr val="0EBE3D"/>
+                </a:solidFill>
+                <a:latin typeface="Mona Sans" pitchFamily="34" charset="0"/>
+                <a:ea typeface="Mona Sans" pitchFamily="34" charset="-122"/>
+                <a:cs typeface="Mona Sans" pitchFamily="34" charset="-120"/>
+              </a:rPr>
+              <a:t>•</a:t>
+            </a:r>
+            <a:endParaRPr lang="en-US" sz="2000" dirty="0"/>
+          </a:p>
+        </p:txBody>
+      </p:sp>
+      <p:sp>
+        <p:nvSpPr>
+          <p:cNvPr id="15" name="Text 12"/>
+          <p:cNvSpPr/>
+          <p:nvPr/>
+        </p:nvSpPr>
+        <p:spPr>
+          <a:xfrm>
+            <a:off x="804672" y="4375988"/>
+            <a:ext cx="10838383" cy="330200"/>
+          </a:xfrm>
+          <a:prstGeom prst="rect">
+            <a:avLst/>
+          </a:prstGeom>
+          <a:noFill/>
+          <a:ln/>
+        </p:spPr>
+        <p:txBody>
+          <a:bodyPr wrap="square" lIns="0" tIns="0" rIns="0" bIns="0" rtlCol="0" anchor="t"/>
+          <a:lstStyle/>
+          <a:p>
+            <a:pPr algn="l" indent="0" marL="0">
+              <a:lnSpc>
+                <a:spcPct val="130000"/>
+              </a:lnSpc>
+              <a:buNone/>
+            </a:pPr>
+            <a:r>
+              <a:rPr lang="en-US" sz="2000" dirty="0">
+                <a:solidFill>
+                  <a:srgbClr val="B0BAC3"/>
+                </a:solidFill>
+                <a:latin typeface="Mona Sans" pitchFamily="34" charset="0"/>
+                <a:ea typeface="Mona Sans" pitchFamily="34" charset="-122"/>
+                <a:cs typeface="Mona Sans" pitchFamily="34" charset="-120"/>
+              </a:rPr>
+              <a:t>Share state: use a canvas to keep decisions and validation evidence visible beside the work.</a:t>
+            </a:r>
+            <a:endParaRPr lang="en-US" sz="2000" dirty="0"/>
+          </a:p>
+        </p:txBody>
+      </p:sp>
+    </p:spTree>
+  </p:cSld>
+  <p:clrMapOvr>
+    <a:masterClrMapping/>
+  </p:clrMapOvr>
+</p:sld>
+</file>
+
+<file path=ppt/slides/slide20.xml><?xml version="1.0" encoding="utf-8"?>
+<p:sld xmlns:a="http://schemas.openxmlformats.org/drawingml/2006/main" xmlns:r="http://schemas.openxmlformats.org/officeDocument/2006/relationships" xmlns:p="http://schemas.openxmlformats.org/presentationml/2006/main">
+  <p:cSld name="Slide 20">
+    <p:spTree>
+      <p:nvGrpSpPr>
+        <p:cNvPr id="1" name=""/>
+        <p:cNvGrpSpPr/>
+        <p:nvPr/>
+      </p:nvGrpSpPr>
+      <p:grpSpPr>
+        <a:xfrm>
+          <a:off x="0" y="0"/>
+          <a:ext cx="0" cy="0"/>
+          <a:chOff x="0" y="0"/>
+          <a:chExt cx="0" cy="0"/>
+        </a:xfrm>
+      </p:grpSpPr>
+      <p:sp>
+        <p:nvSpPr>
+          <p:cNvPr id="2" name="QA:bg"/>
+          <p:cNvSpPr/>
+          <p:nvPr/>
+        </p:nvSpPr>
+        <p:spPr>
+          <a:xfrm>
+            <a:off x="0" y="0"/>
+            <a:ext cx="12191695" cy="6858000"/>
+          </a:xfrm>
+          <a:prstGeom prst="rect">
+            <a:avLst/>
+          </a:prstGeom>
+          <a:solidFill>
+            <a:srgbClr val="101411"/>
+          </a:solidFill>
+          <a:ln/>
+        </p:spPr>
+      </p:sp>
+      <p:sp>
+        <p:nvSpPr>
+          <p:cNvPr id="3" name="QA:chrome"/>
+          <p:cNvSpPr/>
+          <p:nvPr/>
+        </p:nvSpPr>
+        <p:spPr>
+          <a:xfrm>
+            <a:off x="0" y="6454800"/>
+            <a:ext cx="12191695" cy="18000"/>
+          </a:xfrm>
+          <a:prstGeom prst="rect">
+            <a:avLst/>
+          </a:prstGeom>
+          <a:solidFill>
+            <a:srgbClr val="0EBE3D"/>
+          </a:solidFill>
+          <a:ln/>
+        </p:spPr>
+      </p:sp>
+      <p:sp>
+        <p:nvSpPr>
+          <p:cNvPr id="4" name="QA:chrome"/>
+          <p:cNvSpPr/>
+          <p:nvPr/>
+        </p:nvSpPr>
+        <p:spPr>
+          <a:xfrm>
+            <a:off x="548640" y="6526800"/>
+            <a:ext cx="457200" cy="288000"/>
+          </a:xfrm>
+          <a:prstGeom prst="rect">
+            <a:avLst/>
+          </a:prstGeom>
+          <a:noFill/>
+          <a:ln/>
+        </p:spPr>
+        <p:txBody>
+          <a:bodyPr wrap="square" lIns="0" tIns="0" rIns="0" bIns="0" rtlCol="0" anchor="t"/>
+          <a:lstStyle/>
+          <a:p>
+            <a:pPr algn="l" indent="0" marL="0">
+              <a:lnSpc>
+                <a:spcPct val="120000"/>
+              </a:lnSpc>
+              <a:buNone/>
+            </a:pPr>
+            <a:r>
+              <a:rPr lang="en-US" sz="1200" dirty="0">
+                <a:solidFill>
+                  <a:srgbClr val="909692"/>
+                </a:solidFill>
+                <a:latin typeface="Mona Sans" pitchFamily="34" charset="0"/>
+                <a:ea typeface="Mona Sans" pitchFamily="34" charset="-122"/>
+                <a:cs typeface="Mona Sans" pitchFamily="34" charset="-120"/>
+              </a:rPr>
+              <a:t>20</a:t>
+            </a:r>
+            <a:endParaRPr lang="en-US" sz="1200" dirty="0"/>
+          </a:p>
+        </p:txBody>
+      </p:sp>
+      <p:pic>
+        <p:nvPicPr>
+          <p:cNvPr id="5" name="QA:chrome" descr="/Users/ekyritsi/copilot-worktrees/my-pptx-generator/ekyritsi-super-journey/assets/logos/GitHub_Invertocat_White.png">    </p:cNvPr>
+          <p:cNvPicPr>
+            <a:picLocks noChangeAspect="1"/>
+          </p:cNvPicPr>
+          <p:nvPr/>
+        </p:nvPicPr>
+        <p:blipFill>
+          <a:blip r:embed="rId1"/>
+          <a:stretch>
+            <a:fillRect/>
+          </a:stretch>
+        </p:blipFill>
+        <p:spPr>
+          <a:xfrm>
+            <a:off x="11752495" y="6530400"/>
+            <a:ext cx="259200" cy="252000"/>
+          </a:xfrm>
+          <a:prstGeom prst="rect">
+            <a:avLst/>
+          </a:prstGeom>
+        </p:spPr>
+      </p:pic>
+      <p:sp>
+        <p:nvSpPr>
+          <p:cNvPr id="6" name="QA:chrome"/>
+          <p:cNvSpPr/>
+          <p:nvPr/>
+        </p:nvSpPr>
+        <p:spPr>
+          <a:xfrm>
+            <a:off x="11669695" y="6472800"/>
+            <a:ext cx="10800" cy="385200"/>
+          </a:xfrm>
+          <a:prstGeom prst="rect">
+            <a:avLst/>
+          </a:prstGeom>
+          <a:solidFill>
+            <a:srgbClr val="909692"/>
+          </a:solidFill>
+          <a:ln/>
+        </p:spPr>
+      </p:sp>
+      <p:sp>
+        <p:nvSpPr>
+          <p:cNvPr id="7" name="QA:slide_title"/>
+          <p:cNvSpPr/>
+          <p:nvPr/>
+        </p:nvSpPr>
+        <p:spPr>
+          <a:xfrm>
+            <a:off x="548640" y="228600"/>
+            <a:ext cx="11094415" cy="594360"/>
+          </a:xfrm>
+          <a:prstGeom prst="rect">
+            <a:avLst/>
+          </a:prstGeom>
+          <a:noFill/>
+          <a:ln/>
+        </p:spPr>
+        <p:txBody>
+          <a:bodyPr wrap="square" lIns="0" tIns="0" rIns="0" bIns="0" rtlCol="0" anchor="t"/>
+          <a:lstStyle/>
+          <a:p>
+            <a:pPr algn="l" indent="0" marL="0">
+              <a:lnSpc>
+                <a:spcPct val="120000"/>
+              </a:lnSpc>
+              <a:buNone/>
+            </a:pPr>
+            <a:r>
+              <a:rPr lang="en-US" sz="2800" b="1" dirty="0">
+                <a:solidFill>
+                  <a:srgbClr val="FFFFFF"/>
+                </a:solidFill>
+                <a:latin typeface="Mona Sans" pitchFamily="34" charset="0"/>
+                <a:ea typeface="Mona Sans" pitchFamily="34" charset="-122"/>
+                <a:cs typeface="Mona Sans" pitchFamily="34" charset="-120"/>
+              </a:rPr>
               <a:t>Mini-teach · Keep the work in context</a:t>
             </a:r>
             <a:endParaRPr lang="en-US" sz="2800" dirty="0"/>
@@ -8470,7 +10677,7 @@
       </p:sp>
       <p:graphicFrame>
         <p:nvGraphicFramePr>
-          <p:cNvPr id="19" name="QA:table"/>
+          <p:cNvPr id="21" name="QA:table"/>
           <p:cNvGraphicFramePr>
             <a:graphicFrameLocks noGrp="1"/>
           </p:cNvGraphicFramePr>
@@ -8533,7 +10740,7 @@
                     </a:lnT>
                     <a:lnB w="25400" cap="flat" cmpd="sng" algn="ctr">
                       <a:solidFill>
-                        <a:srgbClr val="8534F3"/>
+                        <a:srgbClr val="0EBE3D"/>
                       </a:solidFill>
                       <a:prstDash val="solid"/>
                       <a:round/>
@@ -8583,7 +10790,7 @@
                     </a:lnT>
                     <a:lnB w="25400" cap="flat" cmpd="sng" algn="ctr">
                       <a:solidFill>
-                        <a:srgbClr val="8534F3"/>
+                        <a:srgbClr val="0EBE3D"/>
                       </a:solidFill>
                       <a:prstDash val="solid"/>
                       <a:round/>
@@ -8968,1734 +11175,6 @@
 </p:sld>
 </file>
 
-<file path=ppt/slides/slide19.xml><?xml version="1.0" encoding="utf-8"?>
-<p:sld xmlns:a="http://schemas.openxmlformats.org/drawingml/2006/main" xmlns:r="http://schemas.openxmlformats.org/officeDocument/2006/relationships" xmlns:p="http://schemas.openxmlformats.org/presentationml/2006/main">
-  <p:cSld name="Slide 19">
-    <p:spTree>
-      <p:nvGrpSpPr>
-        <p:cNvPr id="1" name=""/>
-        <p:cNvGrpSpPr/>
-        <p:nvPr/>
-      </p:nvGrpSpPr>
-      <p:grpSpPr>
-        <a:xfrm>
-          <a:off x="0" y="0"/>
-          <a:ext cx="0" cy="0"/>
-          <a:chOff x="0" y="0"/>
-          <a:chExt cx="0" cy="0"/>
-        </a:xfrm>
-      </p:grpSpPr>
-      <p:sp>
-        <p:nvSpPr>
-          <p:cNvPr id="2" name="QA:bg"/>
-          <p:cNvSpPr/>
-          <p:nvPr/>
-        </p:nvSpPr>
-        <p:spPr>
-          <a:xfrm>
-            <a:off x="0" y="0"/>
-            <a:ext cx="12191695" cy="6858000"/>
-          </a:xfrm>
-          <a:prstGeom prst="rect">
-            <a:avLst/>
-          </a:prstGeom>
-          <a:solidFill>
-            <a:srgbClr val="101411"/>
-          </a:solidFill>
-          <a:ln/>
-        </p:spPr>
-      </p:sp>
-      <p:sp>
-        <p:nvSpPr>
-          <p:cNvPr id="3" name="QA:chrome"/>
-          <p:cNvSpPr/>
-          <p:nvPr/>
-        </p:nvSpPr>
-        <p:spPr>
-          <a:xfrm>
-            <a:off x="0" y="6454800"/>
-            <a:ext cx="12191695" cy="18000"/>
-          </a:xfrm>
-          <a:prstGeom prst="rect">
-            <a:avLst/>
-          </a:prstGeom>
-          <a:solidFill>
-            <a:srgbClr val="8534F3"/>
-          </a:solidFill>
-          <a:ln/>
-        </p:spPr>
-      </p:sp>
-      <p:sp>
-        <p:nvSpPr>
-          <p:cNvPr id="4" name="QA:chrome"/>
-          <p:cNvSpPr/>
-          <p:nvPr/>
-        </p:nvSpPr>
-        <p:spPr>
-          <a:xfrm>
-            <a:off x="548640" y="6526800"/>
-            <a:ext cx="457200" cy="288000"/>
-          </a:xfrm>
-          <a:prstGeom prst="rect">
-            <a:avLst/>
-          </a:prstGeom>
-          <a:noFill/>
-          <a:ln/>
-        </p:spPr>
-        <p:txBody>
-          <a:bodyPr wrap="square" lIns="0" tIns="0" rIns="0" bIns="0" rtlCol="0" anchor="t"/>
-          <a:lstStyle/>
-          <a:p>
-            <a:pPr algn="l" indent="0" marL="0">
-              <a:lnSpc>
-                <a:spcPct val="120000"/>
-              </a:lnSpc>
-              <a:buNone/>
-            </a:pPr>
-            <a:r>
-              <a:rPr lang="en-US" sz="1200" dirty="0">
-                <a:solidFill>
-                  <a:srgbClr val="909692"/>
-                </a:solidFill>
-                <a:latin typeface="Mona Sans" pitchFamily="34" charset="0"/>
-                <a:ea typeface="Mona Sans" pitchFamily="34" charset="-122"/>
-                <a:cs typeface="Mona Sans" pitchFamily="34" charset="-120"/>
-              </a:rPr>
-              <a:t>19</a:t>
-            </a:r>
-            <a:endParaRPr lang="en-US" sz="1200" dirty="0"/>
-          </a:p>
-        </p:txBody>
-      </p:sp>
-      <p:pic>
-        <p:nvPicPr>
-          <p:cNvPr id="5" name="QA:chrome" descr="/Users/ekyritsi/copilot-worktrees/my-pptx-generator/ekyritsi-super-journey/assets/logos/GitHub_Invertocat_White.png">    </p:cNvPr>
-          <p:cNvPicPr>
-            <a:picLocks noChangeAspect="1"/>
-          </p:cNvPicPr>
-          <p:nvPr/>
-        </p:nvPicPr>
-        <p:blipFill>
-          <a:blip r:embed="rId1"/>
-          <a:stretch>
-            <a:fillRect/>
-          </a:stretch>
-        </p:blipFill>
-        <p:spPr>
-          <a:xfrm>
-            <a:off x="11752495" y="6530400"/>
-            <a:ext cx="259200" cy="252000"/>
-          </a:xfrm>
-          <a:prstGeom prst="rect">
-            <a:avLst/>
-          </a:prstGeom>
-        </p:spPr>
-      </p:pic>
-      <p:sp>
-        <p:nvSpPr>
-          <p:cNvPr id="6" name="QA:chrome"/>
-          <p:cNvSpPr/>
-          <p:nvPr/>
-        </p:nvSpPr>
-        <p:spPr>
-          <a:xfrm>
-            <a:off x="11669695" y="6472800"/>
-            <a:ext cx="10800" cy="385200"/>
-          </a:xfrm>
-          <a:prstGeom prst="rect">
-            <a:avLst/>
-          </a:prstGeom>
-          <a:solidFill>
-            <a:srgbClr val="909692"/>
-          </a:solidFill>
-          <a:ln/>
-        </p:spPr>
-      </p:sp>
-      <p:sp>
-        <p:nvSpPr>
-          <p:cNvPr id="7" name="QA:slide_title"/>
-          <p:cNvSpPr/>
-          <p:nvPr/>
-        </p:nvSpPr>
-        <p:spPr>
-          <a:xfrm>
-            <a:off x="548640" y="228600"/>
-            <a:ext cx="11094415" cy="594360"/>
-          </a:xfrm>
-          <a:prstGeom prst="rect">
-            <a:avLst/>
-          </a:prstGeom>
-          <a:noFill/>
-          <a:ln/>
-        </p:spPr>
-        <p:txBody>
-          <a:bodyPr wrap="square" lIns="0" tIns="0" rIns="0" bIns="0" rtlCol="0" anchor="t"/>
-          <a:lstStyle/>
-          <a:p>
-            <a:pPr algn="l" indent="0" marL="0">
-              <a:lnSpc>
-                <a:spcPct val="120000"/>
-              </a:lnSpc>
-              <a:buNone/>
-            </a:pPr>
-            <a:r>
-              <a:rPr lang="en-US" sz="2800" b="1" dirty="0">
-                <a:solidFill>
-                  <a:srgbClr val="FFFFFF"/>
-                </a:solidFill>
-                <a:latin typeface="Mona Sans" pitchFamily="34" charset="0"/>
-                <a:ea typeface="Mona Sans" pitchFamily="34" charset="-122"/>
-                <a:cs typeface="Mona Sans" pitchFamily="34" charset="-120"/>
-              </a:rPr>
-              <a:t>Mini-teach · Canvas as the shared board</a:t>
-            </a:r>
-            <a:endParaRPr lang="en-US" sz="2800" dirty="0"/>
-          </a:p>
-        </p:txBody>
-      </p:sp>
-      <p:sp>
-        <p:nvSpPr>
-          <p:cNvPr id="8" name="Text 5"/>
-          <p:cNvSpPr/>
-          <p:nvPr/>
-        </p:nvSpPr>
-        <p:spPr>
-          <a:xfrm>
-            <a:off x="548640" y="2452192"/>
-            <a:ext cx="164592" cy="330200"/>
-          </a:xfrm>
-          <a:prstGeom prst="rect">
-            <a:avLst/>
-          </a:prstGeom>
-          <a:noFill/>
-          <a:ln/>
-        </p:spPr>
-        <p:txBody>
-          <a:bodyPr wrap="square" lIns="0" tIns="0" rIns="0" bIns="0" rtlCol="0" anchor="t"/>
-          <a:lstStyle/>
-          <a:p>
-            <a:pPr algn="l" indent="0" marL="0">
-              <a:lnSpc>
-                <a:spcPct val="130000"/>
-              </a:lnSpc>
-              <a:buNone/>
-            </a:pPr>
-            <a:r>
-              <a:rPr lang="en-US" sz="2000" dirty="0">
-                <a:solidFill>
-                  <a:srgbClr val="8534F3"/>
-                </a:solidFill>
-                <a:latin typeface="Mona Sans" pitchFamily="34" charset="0"/>
-                <a:ea typeface="Mona Sans" pitchFamily="34" charset="-122"/>
-                <a:cs typeface="Mona Sans" pitchFamily="34" charset="-120"/>
-              </a:rPr>
-              <a:t>•</a:t>
-            </a:r>
-            <a:endParaRPr lang="en-US" sz="2000" dirty="0"/>
-          </a:p>
-        </p:txBody>
-      </p:sp>
-      <p:sp>
-        <p:nvSpPr>
-          <p:cNvPr id="9" name="Text 6"/>
-          <p:cNvSpPr/>
-          <p:nvPr/>
-        </p:nvSpPr>
-        <p:spPr>
-          <a:xfrm>
-            <a:off x="804672" y="2452192"/>
-            <a:ext cx="10838383" cy="330200"/>
-          </a:xfrm>
-          <a:prstGeom prst="rect">
-            <a:avLst/>
-          </a:prstGeom>
-          <a:noFill/>
-          <a:ln/>
-        </p:spPr>
-        <p:txBody>
-          <a:bodyPr wrap="square" lIns="0" tIns="0" rIns="0" bIns="0" rtlCol="0" anchor="t"/>
-          <a:lstStyle/>
-          <a:p>
-            <a:pPr algn="l" indent="0" marL="0">
-              <a:lnSpc>
-                <a:spcPct val="130000"/>
-              </a:lnSpc>
-              <a:buNone/>
-            </a:pPr>
-            <a:r>
-              <a:rPr lang="en-US" sz="2000" dirty="0">
-                <a:solidFill>
-                  <a:srgbClr val="B0BAC3"/>
-                </a:solidFill>
-                <a:latin typeface="Mona Sans" pitchFamily="34" charset="0"/>
-                <a:ea typeface="Mona Sans" pitchFamily="34" charset="-122"/>
-                <a:cs typeface="Mona Sans" pitchFamily="34" charset="-120"/>
-              </a:rPr>
-              <a:t>Create or open a compact work board in the session side panel.</a:t>
-            </a:r>
-            <a:endParaRPr lang="en-US" sz="2000" dirty="0"/>
-          </a:p>
-        </p:txBody>
-      </p:sp>
-      <p:sp>
-        <p:nvSpPr>
-          <p:cNvPr id="10" name="Text 7"/>
-          <p:cNvSpPr/>
-          <p:nvPr/>
-        </p:nvSpPr>
-        <p:spPr>
-          <a:xfrm>
-            <a:off x="548640" y="3038424"/>
-            <a:ext cx="164592" cy="330200"/>
-          </a:xfrm>
-          <a:prstGeom prst="rect">
-            <a:avLst/>
-          </a:prstGeom>
-          <a:noFill/>
-          <a:ln/>
-        </p:spPr>
-        <p:txBody>
-          <a:bodyPr wrap="square" lIns="0" tIns="0" rIns="0" bIns="0" rtlCol="0" anchor="t"/>
-          <a:lstStyle/>
-          <a:p>
-            <a:pPr algn="l" indent="0" marL="0">
-              <a:lnSpc>
-                <a:spcPct val="130000"/>
-              </a:lnSpc>
-              <a:buNone/>
-            </a:pPr>
-            <a:r>
-              <a:rPr lang="en-US" sz="2000" dirty="0">
-                <a:solidFill>
-                  <a:srgbClr val="8534F3"/>
-                </a:solidFill>
-                <a:latin typeface="Mona Sans" pitchFamily="34" charset="0"/>
-                <a:ea typeface="Mona Sans" pitchFamily="34" charset="-122"/>
-                <a:cs typeface="Mona Sans" pitchFamily="34" charset="-120"/>
-              </a:rPr>
-              <a:t>•</a:t>
-            </a:r>
-            <a:endParaRPr lang="en-US" sz="2000" dirty="0"/>
-          </a:p>
-        </p:txBody>
-      </p:sp>
-      <p:sp>
-        <p:nvSpPr>
-          <p:cNvPr id="11" name="Text 8"/>
-          <p:cNvSpPr/>
-          <p:nvPr/>
-        </p:nvSpPr>
-        <p:spPr>
-          <a:xfrm>
-            <a:off x="804672" y="3038424"/>
-            <a:ext cx="10838383" cy="660400"/>
-          </a:xfrm>
-          <a:prstGeom prst="rect">
-            <a:avLst/>
-          </a:prstGeom>
-          <a:noFill/>
-          <a:ln/>
-        </p:spPr>
-        <p:txBody>
-          <a:bodyPr wrap="square" lIns="0" tIns="0" rIns="0" bIns="0" rtlCol="0" anchor="t"/>
-          <a:lstStyle/>
-          <a:p>
-            <a:pPr algn="l" indent="0" marL="0">
-              <a:lnSpc>
-                <a:spcPct val="130000"/>
-              </a:lnSpc>
-              <a:buNone/>
-            </a:pPr>
-            <a:r>
-              <a:rPr lang="en-US" sz="2000" dirty="0">
-                <a:solidFill>
-                  <a:srgbClr val="B0BAC3"/>
-                </a:solidFill>
-                <a:latin typeface="Mona Sans" pitchFamily="34" charset="0"/>
-                <a:ea typeface="Mona Sans" pitchFamily="34" charset="-122"/>
-                <a:cs typeface="Mona Sans" pitchFamily="34" charset="-120"/>
-              </a:rPr>
-              <a:t>Track the feature proposal, Session A implementation, Session B review checklist, and</a:t>
-            </a:r>
-            <a:endParaRPr lang="en-US" sz="2000" dirty="0"/>
-          </a:p>
-          <a:p>
-            <a:pPr algn="l" indent="0" marL="0">
-              <a:lnSpc>
-                <a:spcPct val="130000"/>
-              </a:lnSpc>
-              <a:buNone/>
-            </a:pPr>
-            <a:r>
-              <a:rPr lang="en-US" sz="2000" dirty="0">
-                <a:solidFill>
-                  <a:srgbClr val="B0BAC3"/>
-                </a:solidFill>
-                <a:latin typeface="Mona Sans" pitchFamily="34" charset="0"/>
-                <a:ea typeface="Mona Sans" pitchFamily="34" charset="-122"/>
-                <a:cs typeface="Mona Sans" pitchFamily="34" charset="-120"/>
-              </a:rPr>
-              <a:t>verification evidence.</a:t>
-            </a:r>
-            <a:endParaRPr lang="en-US" sz="2000" dirty="0"/>
-          </a:p>
-        </p:txBody>
-      </p:sp>
-      <p:sp>
-        <p:nvSpPr>
-          <p:cNvPr id="12" name="Text 9"/>
-          <p:cNvSpPr/>
-          <p:nvPr/>
-        </p:nvSpPr>
-        <p:spPr>
-          <a:xfrm>
-            <a:off x="548640" y="3954856"/>
-            <a:ext cx="164592" cy="330200"/>
-          </a:xfrm>
-          <a:prstGeom prst="rect">
-            <a:avLst/>
-          </a:prstGeom>
-          <a:noFill/>
-          <a:ln/>
-        </p:spPr>
-        <p:txBody>
-          <a:bodyPr wrap="square" lIns="0" tIns="0" rIns="0" bIns="0" rtlCol="0" anchor="t"/>
-          <a:lstStyle/>
-          <a:p>
-            <a:pPr algn="l" indent="0" marL="0">
-              <a:lnSpc>
-                <a:spcPct val="130000"/>
-              </a:lnSpc>
-              <a:buNone/>
-            </a:pPr>
-            <a:r>
-              <a:rPr lang="en-US" sz="2000" dirty="0">
-                <a:solidFill>
-                  <a:srgbClr val="8534F3"/>
-                </a:solidFill>
-                <a:latin typeface="Mona Sans" pitchFamily="34" charset="0"/>
-                <a:ea typeface="Mona Sans" pitchFamily="34" charset="-122"/>
-                <a:cs typeface="Mona Sans" pitchFamily="34" charset="-120"/>
-              </a:rPr>
-              <a:t>•</a:t>
-            </a:r>
-            <a:endParaRPr lang="en-US" sz="2000" dirty="0"/>
-          </a:p>
-        </p:txBody>
-      </p:sp>
-      <p:sp>
-        <p:nvSpPr>
-          <p:cNvPr id="13" name="Text 10"/>
-          <p:cNvSpPr/>
-          <p:nvPr/>
-        </p:nvSpPr>
-        <p:spPr>
-          <a:xfrm>
-            <a:off x="804672" y="3954856"/>
-            <a:ext cx="10838383" cy="330200"/>
-          </a:xfrm>
-          <a:prstGeom prst="rect">
-            <a:avLst/>
-          </a:prstGeom>
-          <a:noFill/>
-          <a:ln/>
-        </p:spPr>
-        <p:txBody>
-          <a:bodyPr wrap="square" lIns="0" tIns="0" rIns="0" bIns="0" rtlCol="0" anchor="t"/>
-          <a:lstStyle/>
-          <a:p>
-            <a:pPr algn="l" indent="0" marL="0">
-              <a:lnSpc>
-                <a:spcPct val="130000"/>
-              </a:lnSpc>
-              <a:buNone/>
-            </a:pPr>
-            <a:r>
-              <a:rPr lang="en-US" sz="2000" dirty="0">
-                <a:solidFill>
-                  <a:srgbClr val="B0BAC3"/>
-                </a:solidFill>
-                <a:latin typeface="Mona Sans" pitchFamily="34" charset="0"/>
-                <a:ea typeface="Mona Sans" pitchFamily="34" charset="-122"/>
-                <a:cs typeface="Mona Sans" pitchFamily="34" charset="-120"/>
-              </a:rPr>
-              <a:t>The canvas makes status visible; it does not replace reviewing the diff or running checks.</a:t>
-            </a:r>
-            <a:endParaRPr lang="en-US" sz="2000" dirty="0"/>
-          </a:p>
-        </p:txBody>
-      </p:sp>
-      <p:sp>
-        <p:nvSpPr>
-          <p:cNvPr id="14" name="Text 11"/>
-          <p:cNvSpPr/>
-          <p:nvPr/>
-        </p:nvSpPr>
-        <p:spPr>
-          <a:xfrm>
-            <a:off x="548640" y="4541088"/>
-            <a:ext cx="164592" cy="330200"/>
-          </a:xfrm>
-          <a:prstGeom prst="rect">
-            <a:avLst/>
-          </a:prstGeom>
-          <a:noFill/>
-          <a:ln/>
-        </p:spPr>
-        <p:txBody>
-          <a:bodyPr wrap="square" lIns="0" tIns="0" rIns="0" bIns="0" rtlCol="0" anchor="t"/>
-          <a:lstStyle/>
-          <a:p>
-            <a:pPr algn="l" indent="0" marL="0">
-              <a:lnSpc>
-                <a:spcPct val="130000"/>
-              </a:lnSpc>
-              <a:buNone/>
-            </a:pPr>
-            <a:r>
-              <a:rPr lang="en-US" sz="2000" dirty="0">
-                <a:solidFill>
-                  <a:srgbClr val="8534F3"/>
-                </a:solidFill>
-                <a:latin typeface="Mona Sans" pitchFamily="34" charset="0"/>
-                <a:ea typeface="Mona Sans" pitchFamily="34" charset="-122"/>
-                <a:cs typeface="Mona Sans" pitchFamily="34" charset="-120"/>
-              </a:rPr>
-              <a:t>•</a:t>
-            </a:r>
-            <a:endParaRPr lang="en-US" sz="2000" dirty="0"/>
-          </a:p>
-        </p:txBody>
-      </p:sp>
-      <p:sp>
-        <p:nvSpPr>
-          <p:cNvPr id="15" name="Text 12"/>
-          <p:cNvSpPr/>
-          <p:nvPr/>
-        </p:nvSpPr>
-        <p:spPr>
-          <a:xfrm>
-            <a:off x="804672" y="4541088"/>
-            <a:ext cx="10838383" cy="330200"/>
-          </a:xfrm>
-          <a:prstGeom prst="rect">
-            <a:avLst/>
-          </a:prstGeom>
-          <a:noFill/>
-          <a:ln/>
-        </p:spPr>
-        <p:txBody>
-          <a:bodyPr wrap="square" lIns="0" tIns="0" rIns="0" bIns="0" rtlCol="0" anchor="t"/>
-          <a:lstStyle/>
-          <a:p>
-            <a:pPr algn="l" indent="0" marL="0">
-              <a:lnSpc>
-                <a:spcPct val="130000"/>
-              </a:lnSpc>
-              <a:buNone/>
-            </a:pPr>
-            <a:r>
-              <a:rPr lang="en-US" sz="2000" dirty="0">
-                <a:solidFill>
-                  <a:srgbClr val="B0BAC3"/>
-                </a:solidFill>
-                <a:latin typeface="Mona Sans" pitchFamily="34" charset="0"/>
-                <a:ea typeface="Mona Sans" pitchFamily="34" charset="-122"/>
-                <a:cs typeface="Mona Sans" pitchFamily="34" charset="-120"/>
-              </a:rPr>
-              <a:t>Use the board to tell what needs attention without searching a long chat.</a:t>
-            </a:r>
-            <a:endParaRPr lang="en-US" sz="2000" dirty="0"/>
-          </a:p>
-        </p:txBody>
-      </p:sp>
-    </p:spTree>
-  </p:cSld>
-  <p:clrMapOvr>
-    <a:masterClrMapping/>
-  </p:clrMapOvr>
-</p:sld>
-</file>
-
-<file path=ppt/slides/slide2.xml><?xml version="1.0" encoding="utf-8"?>
-<p:sld xmlns:a="http://schemas.openxmlformats.org/drawingml/2006/main" xmlns:r="http://schemas.openxmlformats.org/officeDocument/2006/relationships" xmlns:p="http://schemas.openxmlformats.org/presentationml/2006/main">
-  <p:cSld name="Slide 2">
-    <p:spTree>
-      <p:nvGrpSpPr>
-        <p:cNvPr id="1" name=""/>
-        <p:cNvGrpSpPr/>
-        <p:nvPr/>
-      </p:nvGrpSpPr>
-      <p:grpSpPr>
-        <a:xfrm>
-          <a:off x="0" y="0"/>
-          <a:ext cx="0" cy="0"/>
-          <a:chOff x="0" y="0"/>
-          <a:chExt cx="0" cy="0"/>
-        </a:xfrm>
-      </p:grpSpPr>
-      <p:sp>
-        <p:nvSpPr>
-          <p:cNvPr id="2" name="QA:bg"/>
-          <p:cNvSpPr/>
-          <p:nvPr/>
-        </p:nvSpPr>
-        <p:spPr>
-          <a:xfrm>
-            <a:off x="0" y="0"/>
-            <a:ext cx="12191695" cy="6858000"/>
-          </a:xfrm>
-          <a:prstGeom prst="rect">
-            <a:avLst/>
-          </a:prstGeom>
-          <a:solidFill>
-            <a:srgbClr val="101411"/>
-          </a:solidFill>
-          <a:ln/>
-        </p:spPr>
-      </p:sp>
-      <p:sp>
-        <p:nvSpPr>
-          <p:cNvPr id="3" name="QA:chrome"/>
-          <p:cNvSpPr/>
-          <p:nvPr/>
-        </p:nvSpPr>
-        <p:spPr>
-          <a:xfrm>
-            <a:off x="0" y="6454800"/>
-            <a:ext cx="12191695" cy="18000"/>
-          </a:xfrm>
-          <a:prstGeom prst="rect">
-            <a:avLst/>
-          </a:prstGeom>
-          <a:solidFill>
-            <a:srgbClr val="8534F3"/>
-          </a:solidFill>
-          <a:ln/>
-        </p:spPr>
-      </p:sp>
-      <p:sp>
-        <p:nvSpPr>
-          <p:cNvPr id="4" name="QA:chrome"/>
-          <p:cNvSpPr/>
-          <p:nvPr/>
-        </p:nvSpPr>
-        <p:spPr>
-          <a:xfrm>
-            <a:off x="548640" y="6526800"/>
-            <a:ext cx="457200" cy="288000"/>
-          </a:xfrm>
-          <a:prstGeom prst="rect">
-            <a:avLst/>
-          </a:prstGeom>
-          <a:noFill/>
-          <a:ln/>
-        </p:spPr>
-        <p:txBody>
-          <a:bodyPr wrap="square" lIns="0" tIns="0" rIns="0" bIns="0" rtlCol="0" anchor="t"/>
-          <a:lstStyle/>
-          <a:p>
-            <a:pPr algn="l" indent="0" marL="0">
-              <a:lnSpc>
-                <a:spcPct val="120000"/>
-              </a:lnSpc>
-              <a:buNone/>
-            </a:pPr>
-            <a:r>
-              <a:rPr lang="en-US" sz="1200" dirty="0">
-                <a:solidFill>
-                  <a:srgbClr val="909692"/>
-                </a:solidFill>
-                <a:latin typeface="Mona Sans" pitchFamily="34" charset="0"/>
-                <a:ea typeface="Mona Sans" pitchFamily="34" charset="-122"/>
-                <a:cs typeface="Mona Sans" pitchFamily="34" charset="-120"/>
-              </a:rPr>
-              <a:t>2</a:t>
-            </a:r>
-            <a:endParaRPr lang="en-US" sz="1200" dirty="0"/>
-          </a:p>
-        </p:txBody>
-      </p:sp>
-      <p:pic>
-        <p:nvPicPr>
-          <p:cNvPr id="5" name="QA:chrome" descr="/Users/ekyritsi/copilot-worktrees/my-pptx-generator/ekyritsi-super-journey/assets/logos/GitHub_Invertocat_White.png">    </p:cNvPr>
-          <p:cNvPicPr>
-            <a:picLocks noChangeAspect="1"/>
-          </p:cNvPicPr>
-          <p:nvPr/>
-        </p:nvPicPr>
-        <p:blipFill>
-          <a:blip r:embed="rId1"/>
-          <a:stretch>
-            <a:fillRect/>
-          </a:stretch>
-        </p:blipFill>
-        <p:spPr>
-          <a:xfrm>
-            <a:off x="11752495" y="6530400"/>
-            <a:ext cx="259200" cy="252000"/>
-          </a:xfrm>
-          <a:prstGeom prst="rect">
-            <a:avLst/>
-          </a:prstGeom>
-        </p:spPr>
-      </p:pic>
-      <p:sp>
-        <p:nvSpPr>
-          <p:cNvPr id="6" name="QA:chrome"/>
-          <p:cNvSpPr/>
-          <p:nvPr/>
-        </p:nvSpPr>
-        <p:spPr>
-          <a:xfrm>
-            <a:off x="11669695" y="6472800"/>
-            <a:ext cx="10800" cy="385200"/>
-          </a:xfrm>
-          <a:prstGeom prst="rect">
-            <a:avLst/>
-          </a:prstGeom>
-          <a:solidFill>
-            <a:srgbClr val="909692"/>
-          </a:solidFill>
-          <a:ln/>
-        </p:spPr>
-      </p:sp>
-      <p:sp>
-        <p:nvSpPr>
-          <p:cNvPr id="7" name="QA:slide_title"/>
-          <p:cNvSpPr/>
-          <p:nvPr/>
-        </p:nvSpPr>
-        <p:spPr>
-          <a:xfrm>
-            <a:off x="548640" y="228600"/>
-            <a:ext cx="11094415" cy="594360"/>
-          </a:xfrm>
-          <a:prstGeom prst="rect">
-            <a:avLst/>
-          </a:prstGeom>
-          <a:noFill/>
-          <a:ln/>
-        </p:spPr>
-        <p:txBody>
-          <a:bodyPr wrap="square" lIns="0" tIns="0" rIns="0" bIns="0" rtlCol="0" anchor="t"/>
-          <a:lstStyle/>
-          <a:p>
-            <a:pPr algn="l" indent="0" marL="0">
-              <a:lnSpc>
-                <a:spcPct val="120000"/>
-              </a:lnSpc>
-              <a:buNone/>
-            </a:pPr>
-            <a:r>
-              <a:rPr lang="en-US" sz="2800" b="1" dirty="0">
-                <a:solidFill>
-                  <a:srgbClr val="FFFFFF"/>
-                </a:solidFill>
-                <a:latin typeface="Mona Sans" pitchFamily="34" charset="0"/>
-                <a:ea typeface="Mona Sans" pitchFamily="34" charset="-122"/>
-                <a:cs typeface="Mona Sans" pitchFamily="34" charset="-120"/>
-              </a:rPr>
-              <a:t>What makes the app different?</a:t>
-            </a:r>
-            <a:endParaRPr lang="en-US" sz="2800" dirty="0"/>
-          </a:p>
-        </p:txBody>
-      </p:sp>
-      <p:sp>
-        <p:nvSpPr>
-          <p:cNvPr id="8" name="Text 5"/>
-          <p:cNvSpPr/>
-          <p:nvPr/>
-        </p:nvSpPr>
-        <p:spPr>
-          <a:xfrm>
-            <a:off x="548640" y="2617292"/>
-            <a:ext cx="164592" cy="330200"/>
-          </a:xfrm>
-          <a:prstGeom prst="rect">
-            <a:avLst/>
-          </a:prstGeom>
-          <a:noFill/>
-          <a:ln/>
-        </p:spPr>
-        <p:txBody>
-          <a:bodyPr wrap="square" lIns="0" tIns="0" rIns="0" bIns="0" rtlCol="0" anchor="t"/>
-          <a:lstStyle/>
-          <a:p>
-            <a:pPr algn="l" indent="0" marL="0">
-              <a:lnSpc>
-                <a:spcPct val="130000"/>
-              </a:lnSpc>
-              <a:buNone/>
-            </a:pPr>
-            <a:r>
-              <a:rPr lang="en-US" sz="2000" dirty="0">
-                <a:solidFill>
-                  <a:srgbClr val="8534F3"/>
-                </a:solidFill>
-                <a:latin typeface="Mona Sans" pitchFamily="34" charset="0"/>
-                <a:ea typeface="Mona Sans" pitchFamily="34" charset="-122"/>
-                <a:cs typeface="Mona Sans" pitchFamily="34" charset="-120"/>
-              </a:rPr>
-              <a:t>•</a:t>
-            </a:r>
-            <a:endParaRPr lang="en-US" sz="2000" dirty="0"/>
-          </a:p>
-        </p:txBody>
-      </p:sp>
-      <p:sp>
-        <p:nvSpPr>
-          <p:cNvPr id="9" name="Text 6"/>
-          <p:cNvSpPr/>
-          <p:nvPr/>
-        </p:nvSpPr>
-        <p:spPr>
-          <a:xfrm>
-            <a:off x="804672" y="2617292"/>
-            <a:ext cx="10838383" cy="330200"/>
-          </a:xfrm>
-          <a:prstGeom prst="rect">
-            <a:avLst/>
-          </a:prstGeom>
-          <a:noFill/>
-          <a:ln/>
-        </p:spPr>
-        <p:txBody>
-          <a:bodyPr wrap="square" lIns="0" tIns="0" rIns="0" bIns="0" rtlCol="0" anchor="t"/>
-          <a:lstStyle/>
-          <a:p>
-            <a:pPr algn="l" indent="0" marL="0">
-              <a:lnSpc>
-                <a:spcPct val="130000"/>
-              </a:lnSpc>
-              <a:buNone/>
-            </a:pPr>
-            <a:r>
-              <a:rPr lang="en-US" sz="2000" dirty="0">
-                <a:solidFill>
-                  <a:srgbClr val="B0BAC3"/>
-                </a:solidFill>
-                <a:latin typeface="Mona Sans" pitchFamily="34" charset="0"/>
-                <a:ea typeface="Mona Sans" pitchFamily="34" charset="-122"/>
-                <a:cs typeface="Mona Sans" pitchFamily="34" charset="-120"/>
-              </a:rPr>
-              <a:t>Separate sessions: run focused tasks in parallel, each in its own worktree.</a:t>
-            </a:r>
-            <a:endParaRPr lang="en-US" sz="2000" dirty="0"/>
-          </a:p>
-        </p:txBody>
-      </p:sp>
-      <p:sp>
-        <p:nvSpPr>
-          <p:cNvPr id="10" name="Text 7"/>
-          <p:cNvSpPr/>
-          <p:nvPr/>
-        </p:nvSpPr>
-        <p:spPr>
-          <a:xfrm>
-            <a:off x="548640" y="3203524"/>
-            <a:ext cx="164592" cy="330200"/>
-          </a:xfrm>
-          <a:prstGeom prst="rect">
-            <a:avLst/>
-          </a:prstGeom>
-          <a:noFill/>
-          <a:ln/>
-        </p:spPr>
-        <p:txBody>
-          <a:bodyPr wrap="square" lIns="0" tIns="0" rIns="0" bIns="0" rtlCol="0" anchor="t"/>
-          <a:lstStyle/>
-          <a:p>
-            <a:pPr algn="l" indent="0" marL="0">
-              <a:lnSpc>
-                <a:spcPct val="130000"/>
-              </a:lnSpc>
-              <a:buNone/>
-            </a:pPr>
-            <a:r>
-              <a:rPr lang="en-US" sz="2000" dirty="0">
-                <a:solidFill>
-                  <a:srgbClr val="8534F3"/>
-                </a:solidFill>
-                <a:latin typeface="Mona Sans" pitchFamily="34" charset="0"/>
-                <a:ea typeface="Mona Sans" pitchFamily="34" charset="-122"/>
-                <a:cs typeface="Mona Sans" pitchFamily="34" charset="-120"/>
-              </a:rPr>
-              <a:t>•</a:t>
-            </a:r>
-            <a:endParaRPr lang="en-US" sz="2000" dirty="0"/>
-          </a:p>
-        </p:txBody>
-      </p:sp>
-      <p:sp>
-        <p:nvSpPr>
-          <p:cNvPr id="11" name="Text 8"/>
-          <p:cNvSpPr/>
-          <p:nvPr/>
-        </p:nvSpPr>
-        <p:spPr>
-          <a:xfrm>
-            <a:off x="804672" y="3203524"/>
-            <a:ext cx="10838383" cy="330200"/>
-          </a:xfrm>
-          <a:prstGeom prst="rect">
-            <a:avLst/>
-          </a:prstGeom>
-          <a:noFill/>
-          <a:ln/>
-        </p:spPr>
-        <p:txBody>
-          <a:bodyPr wrap="square" lIns="0" tIns="0" rIns="0" bIns="0" rtlCol="0" anchor="t"/>
-          <a:lstStyle/>
-          <a:p>
-            <a:pPr algn="l" indent="0" marL="0">
-              <a:lnSpc>
-                <a:spcPct val="130000"/>
-              </a:lnSpc>
-              <a:buNone/>
-            </a:pPr>
-            <a:r>
-              <a:rPr lang="en-US" sz="2000" dirty="0">
-                <a:solidFill>
-                  <a:srgbClr val="B0BAC3"/>
-                </a:solidFill>
-                <a:latin typeface="Mona Sans" pitchFamily="34" charset="0"/>
-                <a:ea typeface="Mona Sans" pitchFamily="34" charset="-122"/>
-                <a:cs typeface="Mona Sans" pitchFamily="34" charset="-120"/>
-              </a:rPr>
-              <a:t>See the work: keep plans, diffs, terminal output, and browser preview in one session.</a:t>
-            </a:r>
-            <a:endParaRPr lang="en-US" sz="2000" dirty="0"/>
-          </a:p>
-        </p:txBody>
-      </p:sp>
-      <p:sp>
-        <p:nvSpPr>
-          <p:cNvPr id="12" name="Text 9"/>
-          <p:cNvSpPr/>
-          <p:nvPr/>
-        </p:nvSpPr>
-        <p:spPr>
-          <a:xfrm>
-            <a:off x="548640" y="3789756"/>
-            <a:ext cx="164592" cy="330200"/>
-          </a:xfrm>
-          <a:prstGeom prst="rect">
-            <a:avLst/>
-          </a:prstGeom>
-          <a:noFill/>
-          <a:ln/>
-        </p:spPr>
-        <p:txBody>
-          <a:bodyPr wrap="square" lIns="0" tIns="0" rIns="0" bIns="0" rtlCol="0" anchor="t"/>
-          <a:lstStyle/>
-          <a:p>
-            <a:pPr algn="l" indent="0" marL="0">
-              <a:lnSpc>
-                <a:spcPct val="130000"/>
-              </a:lnSpc>
-              <a:buNone/>
-            </a:pPr>
-            <a:r>
-              <a:rPr lang="en-US" sz="2000" dirty="0">
-                <a:solidFill>
-                  <a:srgbClr val="8534F3"/>
-                </a:solidFill>
-                <a:latin typeface="Mona Sans" pitchFamily="34" charset="0"/>
-                <a:ea typeface="Mona Sans" pitchFamily="34" charset="-122"/>
-                <a:cs typeface="Mona Sans" pitchFamily="34" charset="-120"/>
-              </a:rPr>
-              <a:t>•</a:t>
-            </a:r>
-            <a:endParaRPr lang="en-US" sz="2000" dirty="0"/>
-          </a:p>
-        </p:txBody>
-      </p:sp>
-      <p:sp>
-        <p:nvSpPr>
-          <p:cNvPr id="13" name="Text 10"/>
-          <p:cNvSpPr/>
-          <p:nvPr/>
-        </p:nvSpPr>
-        <p:spPr>
-          <a:xfrm>
-            <a:off x="804672" y="3789756"/>
-            <a:ext cx="10838383" cy="330200"/>
-          </a:xfrm>
-          <a:prstGeom prst="rect">
-            <a:avLst/>
-          </a:prstGeom>
-          <a:noFill/>
-          <a:ln/>
-        </p:spPr>
-        <p:txBody>
-          <a:bodyPr wrap="square" lIns="0" tIns="0" rIns="0" bIns="0" rtlCol="0" anchor="t"/>
-          <a:lstStyle/>
-          <a:p>
-            <a:pPr algn="l" indent="0" marL="0">
-              <a:lnSpc>
-                <a:spcPct val="130000"/>
-              </a:lnSpc>
-              <a:buNone/>
-            </a:pPr>
-            <a:r>
-              <a:rPr lang="en-US" sz="2000" dirty="0">
-                <a:solidFill>
-                  <a:srgbClr val="B0BAC3"/>
-                </a:solidFill>
-                <a:latin typeface="Mona Sans" pitchFamily="34" charset="0"/>
-                <a:ea typeface="Mona Sans" pitchFamily="34" charset="-122"/>
-                <a:cs typeface="Mona Sans" pitchFamily="34" charset="-120"/>
-              </a:rPr>
-              <a:t>Specialize help: use a custom agent for a defined role and a skill for reusable task guidance.</a:t>
-            </a:r>
-            <a:endParaRPr lang="en-US" sz="2000" dirty="0"/>
-          </a:p>
-        </p:txBody>
-      </p:sp>
-      <p:sp>
-        <p:nvSpPr>
-          <p:cNvPr id="14" name="Text 11"/>
-          <p:cNvSpPr/>
-          <p:nvPr/>
-        </p:nvSpPr>
-        <p:spPr>
-          <a:xfrm>
-            <a:off x="548640" y="4375988"/>
-            <a:ext cx="164592" cy="330200"/>
-          </a:xfrm>
-          <a:prstGeom prst="rect">
-            <a:avLst/>
-          </a:prstGeom>
-          <a:noFill/>
-          <a:ln/>
-        </p:spPr>
-        <p:txBody>
-          <a:bodyPr wrap="square" lIns="0" tIns="0" rIns="0" bIns="0" rtlCol="0" anchor="t"/>
-          <a:lstStyle/>
-          <a:p>
-            <a:pPr algn="l" indent="0" marL="0">
-              <a:lnSpc>
-                <a:spcPct val="130000"/>
-              </a:lnSpc>
-              <a:buNone/>
-            </a:pPr>
-            <a:r>
-              <a:rPr lang="en-US" sz="2000" dirty="0">
-                <a:solidFill>
-                  <a:srgbClr val="8534F3"/>
-                </a:solidFill>
-                <a:latin typeface="Mona Sans" pitchFamily="34" charset="0"/>
-                <a:ea typeface="Mona Sans" pitchFamily="34" charset="-122"/>
-                <a:cs typeface="Mona Sans" pitchFamily="34" charset="-120"/>
-              </a:rPr>
-              <a:t>•</a:t>
-            </a:r>
-            <a:endParaRPr lang="en-US" sz="2000" dirty="0"/>
-          </a:p>
-        </p:txBody>
-      </p:sp>
-      <p:sp>
-        <p:nvSpPr>
-          <p:cNvPr id="15" name="Text 12"/>
-          <p:cNvSpPr/>
-          <p:nvPr/>
-        </p:nvSpPr>
-        <p:spPr>
-          <a:xfrm>
-            <a:off x="804672" y="4375988"/>
-            <a:ext cx="10838383" cy="330200"/>
-          </a:xfrm>
-          <a:prstGeom prst="rect">
-            <a:avLst/>
-          </a:prstGeom>
-          <a:noFill/>
-          <a:ln/>
-        </p:spPr>
-        <p:txBody>
-          <a:bodyPr wrap="square" lIns="0" tIns="0" rIns="0" bIns="0" rtlCol="0" anchor="t"/>
-          <a:lstStyle/>
-          <a:p>
-            <a:pPr algn="l" indent="0" marL="0">
-              <a:lnSpc>
-                <a:spcPct val="130000"/>
-              </a:lnSpc>
-              <a:buNone/>
-            </a:pPr>
-            <a:r>
-              <a:rPr lang="en-US" sz="2000" dirty="0">
-                <a:solidFill>
-                  <a:srgbClr val="B0BAC3"/>
-                </a:solidFill>
-                <a:latin typeface="Mona Sans" pitchFamily="34" charset="0"/>
-                <a:ea typeface="Mona Sans" pitchFamily="34" charset="-122"/>
-                <a:cs typeface="Mona Sans" pitchFamily="34" charset="-120"/>
-              </a:rPr>
-              <a:t>Share state: use a canvas to keep decisions and validation evidence visible beside the work.</a:t>
-            </a:r>
-            <a:endParaRPr lang="en-US" sz="2000" dirty="0"/>
-          </a:p>
-        </p:txBody>
-      </p:sp>
-    </p:spTree>
-  </p:cSld>
-  <p:clrMapOvr>
-    <a:masterClrMapping/>
-  </p:clrMapOvr>
-</p:sld>
-</file>
-
-<file path=ppt/slides/slide20.xml><?xml version="1.0" encoding="utf-8"?>
-<p:sld xmlns:a="http://schemas.openxmlformats.org/drawingml/2006/main" xmlns:r="http://schemas.openxmlformats.org/officeDocument/2006/relationships" xmlns:p="http://schemas.openxmlformats.org/presentationml/2006/main">
-  <p:cSld name="Slide 20">
-    <p:spTree>
-      <p:nvGrpSpPr>
-        <p:cNvPr id="1" name=""/>
-        <p:cNvGrpSpPr/>
-        <p:nvPr/>
-      </p:nvGrpSpPr>
-      <p:grpSpPr>
-        <a:xfrm>
-          <a:off x="0" y="0"/>
-          <a:ext cx="0" cy="0"/>
-          <a:chOff x="0" y="0"/>
-          <a:chExt cx="0" cy="0"/>
-        </a:xfrm>
-      </p:grpSpPr>
-      <p:sp>
-        <p:nvSpPr>
-          <p:cNvPr id="2" name="QA:bg"/>
-          <p:cNvSpPr/>
-          <p:nvPr/>
-        </p:nvSpPr>
-        <p:spPr>
-          <a:xfrm>
-            <a:off x="0" y="0"/>
-            <a:ext cx="12191695" cy="6858000"/>
-          </a:xfrm>
-          <a:prstGeom prst="rect">
-            <a:avLst/>
-          </a:prstGeom>
-          <a:solidFill>
-            <a:srgbClr val="101411"/>
-          </a:solidFill>
-          <a:ln/>
-        </p:spPr>
-      </p:sp>
-      <p:sp>
-        <p:nvSpPr>
-          <p:cNvPr id="3" name="QA:chrome"/>
-          <p:cNvSpPr/>
-          <p:nvPr/>
-        </p:nvSpPr>
-        <p:spPr>
-          <a:xfrm>
-            <a:off x="0" y="6454800"/>
-            <a:ext cx="12191695" cy="18000"/>
-          </a:xfrm>
-          <a:prstGeom prst="rect">
-            <a:avLst/>
-          </a:prstGeom>
-          <a:solidFill>
-            <a:srgbClr val="8534F3"/>
-          </a:solidFill>
-          <a:ln/>
-        </p:spPr>
-      </p:sp>
-      <p:sp>
-        <p:nvSpPr>
-          <p:cNvPr id="4" name="QA:chrome"/>
-          <p:cNvSpPr/>
-          <p:nvPr/>
-        </p:nvSpPr>
-        <p:spPr>
-          <a:xfrm>
-            <a:off x="548640" y="6526800"/>
-            <a:ext cx="457200" cy="288000"/>
-          </a:xfrm>
-          <a:prstGeom prst="rect">
-            <a:avLst/>
-          </a:prstGeom>
-          <a:noFill/>
-          <a:ln/>
-        </p:spPr>
-        <p:txBody>
-          <a:bodyPr wrap="square" lIns="0" tIns="0" rIns="0" bIns="0" rtlCol="0" anchor="t"/>
-          <a:lstStyle/>
-          <a:p>
-            <a:pPr algn="l" indent="0" marL="0">
-              <a:lnSpc>
-                <a:spcPct val="120000"/>
-              </a:lnSpc>
-              <a:buNone/>
-            </a:pPr>
-            <a:r>
-              <a:rPr lang="en-US" sz="1200" dirty="0">
-                <a:solidFill>
-                  <a:srgbClr val="909692"/>
-                </a:solidFill>
-                <a:latin typeface="Mona Sans" pitchFamily="34" charset="0"/>
-                <a:ea typeface="Mona Sans" pitchFamily="34" charset="-122"/>
-                <a:cs typeface="Mona Sans" pitchFamily="34" charset="-120"/>
-              </a:rPr>
-              <a:t>20</a:t>
-            </a:r>
-            <a:endParaRPr lang="en-US" sz="1200" dirty="0"/>
-          </a:p>
-        </p:txBody>
-      </p:sp>
-      <p:pic>
-        <p:nvPicPr>
-          <p:cNvPr id="5" name="QA:chrome" descr="/Users/ekyritsi/copilot-worktrees/my-pptx-generator/ekyritsi-super-journey/assets/logos/GitHub_Invertocat_White.png">    </p:cNvPr>
-          <p:cNvPicPr>
-            <a:picLocks noChangeAspect="1"/>
-          </p:cNvPicPr>
-          <p:nvPr/>
-        </p:nvPicPr>
-        <p:blipFill>
-          <a:blip r:embed="rId1"/>
-          <a:stretch>
-            <a:fillRect/>
-          </a:stretch>
-        </p:blipFill>
-        <p:spPr>
-          <a:xfrm>
-            <a:off x="11752495" y="6530400"/>
-            <a:ext cx="259200" cy="252000"/>
-          </a:xfrm>
-          <a:prstGeom prst="rect">
-            <a:avLst/>
-          </a:prstGeom>
-        </p:spPr>
-      </p:pic>
-      <p:sp>
-        <p:nvSpPr>
-          <p:cNvPr id="6" name="QA:chrome"/>
-          <p:cNvSpPr/>
-          <p:nvPr/>
-        </p:nvSpPr>
-        <p:spPr>
-          <a:xfrm>
-            <a:off x="11669695" y="6472800"/>
-            <a:ext cx="10800" cy="385200"/>
-          </a:xfrm>
-          <a:prstGeom prst="rect">
-            <a:avLst/>
-          </a:prstGeom>
-          <a:solidFill>
-            <a:srgbClr val="909692"/>
-          </a:solidFill>
-          <a:ln/>
-        </p:spPr>
-      </p:sp>
-      <p:sp>
-        <p:nvSpPr>
-          <p:cNvPr id="7" name="QA:slide_title"/>
-          <p:cNvSpPr/>
-          <p:nvPr/>
-        </p:nvSpPr>
-        <p:spPr>
-          <a:xfrm>
-            <a:off x="548640" y="228600"/>
-            <a:ext cx="11094415" cy="594360"/>
-          </a:xfrm>
-          <a:prstGeom prst="rect">
-            <a:avLst/>
-          </a:prstGeom>
-          <a:noFill/>
-          <a:ln/>
-        </p:spPr>
-        <p:txBody>
-          <a:bodyPr wrap="square" lIns="0" tIns="0" rIns="0" bIns="0" rtlCol="0" anchor="t"/>
-          <a:lstStyle/>
-          <a:p>
-            <a:pPr algn="l" indent="0" marL="0">
-              <a:lnSpc>
-                <a:spcPct val="120000"/>
-              </a:lnSpc>
-              <a:buNone/>
-            </a:pPr>
-            <a:r>
-              <a:rPr lang="en-US" sz="2800" b="1" dirty="0">
-                <a:solidFill>
-                  <a:srgbClr val="FFFFFF"/>
-                </a:solidFill>
-                <a:latin typeface="Mona Sans" pitchFamily="34" charset="0"/>
-                <a:ea typeface="Mona Sans" pitchFamily="34" charset="-122"/>
-                <a:cs typeface="Mona Sans" pitchFamily="34" charset="-120"/>
-              </a:rPr>
-              <a:t>Hands-on 3 · Record and verify</a:t>
-            </a:r>
-            <a:endParaRPr lang="en-US" sz="2800" dirty="0"/>
-          </a:p>
-        </p:txBody>
-      </p:sp>
-      <p:sp>
-        <p:nvSpPr>
-          <p:cNvPr id="8" name="QA:card"/>
-          <p:cNvSpPr/>
-          <p:nvPr/>
-        </p:nvSpPr>
-        <p:spPr>
-          <a:xfrm>
-            <a:off x="548640" y="1005840"/>
-            <a:ext cx="11094415" cy="5311800"/>
-          </a:xfrm>
-          <a:prstGeom prst="roundRect">
-            <a:avLst>
-              <a:gd name="adj" fmla="val 2754"/>
-            </a:avLst>
-          </a:prstGeom>
-          <a:solidFill>
-            <a:srgbClr val="20262C"/>
-          </a:solidFill>
-          <a:ln w="9525">
-            <a:solidFill>
-              <a:srgbClr val="5A615C"/>
-            </a:solidFill>
-            <a:prstDash val="solid"/>
-          </a:ln>
-        </p:spPr>
-      </p:sp>
-      <p:sp>
-        <p:nvSpPr>
-          <p:cNvPr id="9" name="QA:check:0"/>
-          <p:cNvSpPr/>
-          <p:nvPr/>
-        </p:nvSpPr>
-        <p:spPr>
-          <a:xfrm>
-            <a:off x="914400" y="1525000"/>
-            <a:ext cx="347472" cy="347472"/>
-          </a:xfrm>
-          <a:prstGeom prst="roundRect">
-            <a:avLst>
-              <a:gd name="adj" fmla="val 50000"/>
-            </a:avLst>
-          </a:prstGeom>
-          <a:ln w="19050">
-            <a:solidFill>
-              <a:srgbClr val="909692"/>
-            </a:solidFill>
-            <a:prstDash val="solid"/>
-          </a:ln>
-        </p:spPr>
-      </p:sp>
-      <p:sp>
-        <p:nvSpPr>
-          <p:cNvPr id="10" name="QA:heading:0"/>
-          <p:cNvSpPr/>
-          <p:nvPr/>
-        </p:nvSpPr>
-        <p:spPr>
-          <a:xfrm>
-            <a:off x="1645920" y="1393936"/>
-            <a:ext cx="9631375" cy="609600"/>
-          </a:xfrm>
-          <a:prstGeom prst="rect">
-            <a:avLst/>
-          </a:prstGeom>
-          <a:noFill/>
-          <a:ln/>
-        </p:spPr>
-        <p:txBody>
-          <a:bodyPr wrap="square" lIns="0" tIns="0" rIns="0" bIns="0" rtlCol="0" anchor="t"/>
-          <a:lstStyle/>
-          <a:p>
-            <a:pPr algn="l" indent="0" marL="0">
-              <a:lnSpc>
-                <a:spcPct val="120000"/>
-              </a:lnSpc>
-              <a:buNone/>
-            </a:pPr>
-            <a:r>
-              <a:rPr lang="en-US" sz="2000" b="1" dirty="0">
-                <a:solidFill>
-                  <a:srgbClr val="FFFFFF"/>
-                </a:solidFill>
-                <a:latin typeface="Mona Sans" pitchFamily="34" charset="0"/>
-                <a:ea typeface="Mona Sans" pitchFamily="34" charset="-122"/>
-                <a:cs typeface="Mona Sans" pitchFamily="34" charset="-120"/>
-              </a:rPr>
-              <a:t>Put acceptance criteria on the canvas; update both session lanes from what</a:t>
-            </a:r>
-            <a:endParaRPr lang="en-US" sz="2000" dirty="0"/>
-          </a:p>
-          <a:p>
-            <a:pPr algn="l" indent="0" marL="0">
-              <a:lnSpc>
-                <a:spcPct val="120000"/>
-              </a:lnSpc>
-              <a:buNone/>
-            </a:pPr>
-            <a:r>
-              <a:rPr lang="en-US" sz="2000" b="1" dirty="0">
-                <a:solidFill>
-                  <a:srgbClr val="FFFFFF"/>
-                </a:solidFill>
-                <a:latin typeface="Mona Sans" pitchFamily="34" charset="0"/>
-                <a:ea typeface="Mona Sans" pitchFamily="34" charset="-122"/>
-                <a:cs typeface="Mona Sans" pitchFamily="34" charset="-120"/>
-              </a:rPr>
-              <a:t>actually happened</a:t>
-            </a:r>
-            <a:endParaRPr lang="en-US" sz="2000" dirty="0"/>
-          </a:p>
-        </p:txBody>
-      </p:sp>
-      <p:sp>
-        <p:nvSpPr>
-          <p:cNvPr id="11" name="Shape 8"/>
-          <p:cNvSpPr/>
-          <p:nvPr/>
-        </p:nvSpPr>
-        <p:spPr>
-          <a:xfrm>
-            <a:off x="914400" y="2183137"/>
-            <a:ext cx="10362895" cy="12700"/>
-          </a:xfrm>
-          <a:prstGeom prst="rect">
-            <a:avLst/>
-          </a:prstGeom>
-          <a:solidFill>
-            <a:srgbClr val="5A615C"/>
-          </a:solidFill>
-          <a:ln/>
-        </p:spPr>
-      </p:sp>
-      <p:sp>
-        <p:nvSpPr>
-          <p:cNvPr id="12" name="QA:check:1"/>
-          <p:cNvSpPr/>
-          <p:nvPr/>
-        </p:nvSpPr>
-        <p:spPr>
-          <a:xfrm>
-            <a:off x="914400" y="2506502"/>
-            <a:ext cx="347472" cy="347472"/>
-          </a:xfrm>
-          <a:prstGeom prst="roundRect">
-            <a:avLst>
-              <a:gd name="adj" fmla="val 50000"/>
-            </a:avLst>
-          </a:prstGeom>
-          <a:ln w="19050">
-            <a:solidFill>
-              <a:srgbClr val="909692"/>
-            </a:solidFill>
-            <a:prstDash val="solid"/>
-          </a:ln>
-        </p:spPr>
-      </p:sp>
-      <p:sp>
-        <p:nvSpPr>
-          <p:cNvPr id="13" name="QA:heading:1"/>
-          <p:cNvSpPr/>
-          <p:nvPr/>
-        </p:nvSpPr>
-        <p:spPr>
-          <a:xfrm>
-            <a:off x="1645920" y="2527838"/>
-            <a:ext cx="9631375" cy="304800"/>
-          </a:xfrm>
-          <a:prstGeom prst="rect">
-            <a:avLst/>
-          </a:prstGeom>
-          <a:noFill/>
-          <a:ln/>
-        </p:spPr>
-        <p:txBody>
-          <a:bodyPr wrap="square" lIns="0" tIns="0" rIns="0" bIns="0" rtlCol="0" anchor="t"/>
-          <a:lstStyle/>
-          <a:p>
-            <a:pPr algn="l" indent="0" marL="0">
-              <a:lnSpc>
-                <a:spcPct val="120000"/>
-              </a:lnSpc>
-              <a:buNone/>
-            </a:pPr>
-            <a:r>
-              <a:rPr lang="en-US" sz="2000" b="1" dirty="0">
-                <a:solidFill>
-                  <a:srgbClr val="FFFFFF"/>
-                </a:solidFill>
-                <a:latin typeface="Mona Sans" pitchFamily="34" charset="0"/>
-                <a:ea typeface="Mona Sans" pitchFamily="34" charset="-122"/>
-                <a:cs typeface="Mona Sans" pitchFamily="34" charset="-120"/>
-              </a:rPr>
-              <a:t>Inspect Session A's Changes diff; compare it with Session B's checklist</a:t>
-            </a:r>
-            <a:endParaRPr lang="en-US" sz="2000" dirty="0"/>
-          </a:p>
-        </p:txBody>
-      </p:sp>
-      <p:sp>
-        <p:nvSpPr>
-          <p:cNvPr id="14" name="Shape 11"/>
-          <p:cNvSpPr/>
-          <p:nvPr/>
-        </p:nvSpPr>
-        <p:spPr>
-          <a:xfrm>
-            <a:off x="914400" y="3164639"/>
-            <a:ext cx="10362895" cy="12700"/>
-          </a:xfrm>
-          <a:prstGeom prst="rect">
-            <a:avLst/>
-          </a:prstGeom>
-          <a:solidFill>
-            <a:srgbClr val="5A615C"/>
-          </a:solidFill>
-          <a:ln/>
-        </p:spPr>
-      </p:sp>
-      <p:sp>
-        <p:nvSpPr>
-          <p:cNvPr id="15" name="QA:check:2"/>
-          <p:cNvSpPr/>
-          <p:nvPr/>
-        </p:nvSpPr>
-        <p:spPr>
-          <a:xfrm>
-            <a:off x="914400" y="3488004"/>
-            <a:ext cx="347472" cy="347472"/>
-          </a:xfrm>
-          <a:prstGeom prst="roundRect">
-            <a:avLst>
-              <a:gd name="adj" fmla="val 50000"/>
-            </a:avLst>
-          </a:prstGeom>
-          <a:ln w="19050">
-            <a:solidFill>
-              <a:srgbClr val="909692"/>
-            </a:solidFill>
-            <a:prstDash val="solid"/>
-          </a:ln>
-        </p:spPr>
-      </p:sp>
-      <p:sp>
-        <p:nvSpPr>
-          <p:cNvPr id="16" name="QA:heading:2"/>
-          <p:cNvSpPr/>
-          <p:nvPr/>
-        </p:nvSpPr>
-        <p:spPr>
-          <a:xfrm>
-            <a:off x="1645920" y="3509340"/>
-            <a:ext cx="9631375" cy="304800"/>
-          </a:xfrm>
-          <a:prstGeom prst="rect">
-            <a:avLst/>
-          </a:prstGeom>
-          <a:noFill/>
-          <a:ln/>
-        </p:spPr>
-        <p:txBody>
-          <a:bodyPr wrap="square" lIns="0" tIns="0" rIns="0" bIns="0" rtlCol="0" anchor="t"/>
-          <a:lstStyle/>
-          <a:p>
-            <a:pPr algn="l" indent="0" marL="0">
-              <a:lnSpc>
-                <a:spcPct val="120000"/>
-              </a:lnSpc>
-              <a:buNone/>
-            </a:pPr>
-            <a:r>
-              <a:rPr lang="en-US" sz="2000" b="1" dirty="0">
-                <a:solidFill>
-                  <a:srgbClr val="FFFFFF"/>
-                </a:solidFill>
-                <a:latin typeface="Mona Sans" pitchFamily="34" charset="0"/>
-                <a:ea typeface="Mona Sans" pitchFamily="34" charset="-122"/>
-                <a:cs typeface="Mona Sans" pitchFamily="34" charset="-120"/>
-              </a:rPr>
-              <a:t>Run npm test -- --run and npm run build in samples/book-app-web</a:t>
-            </a:r>
-            <a:endParaRPr lang="en-US" sz="2000" dirty="0"/>
-          </a:p>
-        </p:txBody>
-      </p:sp>
-      <p:sp>
-        <p:nvSpPr>
-          <p:cNvPr id="17" name="Shape 14"/>
-          <p:cNvSpPr/>
-          <p:nvPr/>
-        </p:nvSpPr>
-        <p:spPr>
-          <a:xfrm>
-            <a:off x="914400" y="4146141"/>
-            <a:ext cx="10362895" cy="12700"/>
-          </a:xfrm>
-          <a:prstGeom prst="rect">
-            <a:avLst/>
-          </a:prstGeom>
-          <a:solidFill>
-            <a:srgbClr val="5A615C"/>
-          </a:solidFill>
-          <a:ln/>
-        </p:spPr>
-      </p:sp>
-      <p:sp>
-        <p:nvSpPr>
-          <p:cNvPr id="18" name="QA:check:3"/>
-          <p:cNvSpPr/>
-          <p:nvPr/>
-        </p:nvSpPr>
-        <p:spPr>
-          <a:xfrm>
-            <a:off x="914400" y="4469506"/>
-            <a:ext cx="347472" cy="347472"/>
-          </a:xfrm>
-          <a:prstGeom prst="roundRect">
-            <a:avLst>
-              <a:gd name="adj" fmla="val 50000"/>
-            </a:avLst>
-          </a:prstGeom>
-          <a:ln w="19050">
-            <a:solidFill>
-              <a:srgbClr val="909692"/>
-            </a:solidFill>
-            <a:prstDash val="solid"/>
-          </a:ln>
-        </p:spPr>
-      </p:sp>
-      <p:sp>
-        <p:nvSpPr>
-          <p:cNvPr id="19" name="QA:heading:3"/>
-          <p:cNvSpPr/>
-          <p:nvPr/>
-        </p:nvSpPr>
-        <p:spPr>
-          <a:xfrm>
-            <a:off x="1645920" y="4490842"/>
-            <a:ext cx="9631375" cy="304800"/>
-          </a:xfrm>
-          <a:prstGeom prst="rect">
-            <a:avLst/>
-          </a:prstGeom>
-          <a:noFill/>
-          <a:ln/>
-        </p:spPr>
-        <p:txBody>
-          <a:bodyPr wrap="square" lIns="0" tIns="0" rIns="0" bIns="0" rtlCol="0" anchor="t"/>
-          <a:lstStyle/>
-          <a:p>
-            <a:pPr algn="l" indent="0" marL="0">
-              <a:lnSpc>
-                <a:spcPct val="120000"/>
-              </a:lnSpc>
-              <a:buNone/>
-            </a:pPr>
-            <a:r>
-              <a:rPr lang="en-US" sz="2000" b="1" dirty="0">
-                <a:solidFill>
-                  <a:srgbClr val="FFFFFF"/>
-                </a:solidFill>
-                <a:latin typeface="Mona Sans" pitchFamily="34" charset="0"/>
-                <a:ea typeface="Mona Sans" pitchFamily="34" charset="-122"/>
-                <a:cs typeface="Mona Sans" pitchFamily="34" charset="-120"/>
-              </a:rPr>
-              <a:t>In Browser, test no filters, each active filter, and reset behavior</a:t>
-            </a:r>
-            <a:endParaRPr lang="en-US" sz="2000" dirty="0"/>
-          </a:p>
-        </p:txBody>
-      </p:sp>
-      <p:sp>
-        <p:nvSpPr>
-          <p:cNvPr id="20" name="Shape 17"/>
-          <p:cNvSpPr/>
-          <p:nvPr/>
-        </p:nvSpPr>
-        <p:spPr>
-          <a:xfrm>
-            <a:off x="914400" y="5127643"/>
-            <a:ext cx="10362895" cy="12700"/>
-          </a:xfrm>
-          <a:prstGeom prst="rect">
-            <a:avLst/>
-          </a:prstGeom>
-          <a:solidFill>
-            <a:srgbClr val="5A615C"/>
-          </a:solidFill>
-          <a:ln/>
-        </p:spPr>
-      </p:sp>
-      <p:sp>
-        <p:nvSpPr>
-          <p:cNvPr id="21" name="QA:check:4"/>
-          <p:cNvSpPr/>
-          <p:nvPr/>
-        </p:nvSpPr>
-        <p:spPr>
-          <a:xfrm>
-            <a:off x="914400" y="5451008"/>
-            <a:ext cx="347472" cy="347472"/>
-          </a:xfrm>
-          <a:prstGeom prst="roundRect">
-            <a:avLst>
-              <a:gd name="adj" fmla="val 50000"/>
-            </a:avLst>
-          </a:prstGeom>
-          <a:ln w="19050">
-            <a:solidFill>
-              <a:srgbClr val="909692"/>
-            </a:solidFill>
-            <a:prstDash val="solid"/>
-          </a:ln>
-        </p:spPr>
-      </p:sp>
-      <p:sp>
-        <p:nvSpPr>
-          <p:cNvPr id="22" name="QA:heading:4"/>
-          <p:cNvSpPr/>
-          <p:nvPr/>
-        </p:nvSpPr>
-        <p:spPr>
-          <a:xfrm>
-            <a:off x="1645920" y="5472344"/>
-            <a:ext cx="9631375" cy="304800"/>
-          </a:xfrm>
-          <a:prstGeom prst="rect">
-            <a:avLst/>
-          </a:prstGeom>
-          <a:noFill/>
-          <a:ln/>
-        </p:spPr>
-        <p:txBody>
-          <a:bodyPr wrap="square" lIns="0" tIns="0" rIns="0" bIns="0" rtlCol="0" anchor="t"/>
-          <a:lstStyle/>
-          <a:p>
-            <a:pPr algn="l" indent="0" marL="0">
-              <a:lnSpc>
-                <a:spcPct val="120000"/>
-              </a:lnSpc>
-              <a:buNone/>
-            </a:pPr>
-            <a:r>
-              <a:rPr lang="en-US" sz="2000" b="1" dirty="0">
-                <a:solidFill>
-                  <a:srgbClr val="FFFFFF"/>
-                </a:solidFill>
-                <a:latin typeface="Mona Sans" pitchFamily="34" charset="0"/>
-                <a:ea typeface="Mona Sans" pitchFamily="34" charset="-122"/>
-                <a:cs typeface="Mona Sans" pitchFamily="34" charset="-120"/>
-              </a:rPr>
-              <a:t>Record only checks you personally observed; mark blocked checks as not run</a:t>
-            </a:r>
-            <a:endParaRPr lang="en-US" sz="2000" dirty="0"/>
-          </a:p>
-        </p:txBody>
-      </p:sp>
-    </p:spTree>
-  </p:cSld>
-  <p:clrMapOvr>
-    <a:masterClrMapping/>
-  </p:clrMapOvr>
-</p:sld>
-</file>
-
 <file path=ppt/slides/slide21.xml><?xml version="1.0" encoding="utf-8"?>
 <p:sld xmlns:a="http://schemas.openxmlformats.org/drawingml/2006/main" xmlns:r="http://schemas.openxmlformats.org/officeDocument/2006/relationships" xmlns:p="http://schemas.openxmlformats.org/presentationml/2006/main">
   <p:cSld name="Slide 21">
@@ -10748,7 +11227,7 @@
             <a:avLst/>
           </a:prstGeom>
           <a:solidFill>
-            <a:srgbClr val="8534F3"/>
+            <a:srgbClr val="0EBE3D"/>
           </a:solidFill>
           <a:ln/>
         </p:spPr>
@@ -10875,6 +11354,1838 @@
                 <a:ea typeface="Mona Sans" pitchFamily="34" charset="-122"/>
                 <a:cs typeface="Mona Sans" pitchFamily="34" charset="-120"/>
               </a:rPr>
+              <a:t>Instructor demo · WorkIQ through MCP</a:t>
+            </a:r>
+            <a:endParaRPr lang="en-US" sz="2800" dirty="0"/>
+          </a:p>
+        </p:txBody>
+      </p:sp>
+      <p:sp>
+        <p:nvSpPr>
+          <p:cNvPr id="8" name="Text 5"/>
+          <p:cNvSpPr/>
+          <p:nvPr/>
+        </p:nvSpPr>
+        <p:spPr>
+          <a:xfrm>
+            <a:off x="548640" y="2159076"/>
+            <a:ext cx="164592" cy="330200"/>
+          </a:xfrm>
+          <a:prstGeom prst="rect">
+            <a:avLst/>
+          </a:prstGeom>
+          <a:noFill/>
+          <a:ln/>
+        </p:spPr>
+        <p:txBody>
+          <a:bodyPr wrap="square" lIns="0" tIns="0" rIns="0" bIns="0" rtlCol="0" anchor="t"/>
+          <a:lstStyle/>
+          <a:p>
+            <a:pPr algn="l" indent="0" marL="0">
+              <a:lnSpc>
+                <a:spcPct val="130000"/>
+              </a:lnSpc>
+              <a:buNone/>
+            </a:pPr>
+            <a:r>
+              <a:rPr lang="en-US" sz="2000" dirty="0">
+                <a:solidFill>
+                  <a:srgbClr val="0EBE3D"/>
+                </a:solidFill>
+                <a:latin typeface="Mona Sans" pitchFamily="34" charset="0"/>
+                <a:ea typeface="Mona Sans" pitchFamily="34" charset="-122"/>
+                <a:cs typeface="Mona Sans" pitchFamily="34" charset="-120"/>
+              </a:rPr>
+              <a:t>•</a:t>
+            </a:r>
+            <a:endParaRPr lang="en-US" sz="2000" dirty="0"/>
+          </a:p>
+        </p:txBody>
+      </p:sp>
+      <p:sp>
+        <p:nvSpPr>
+          <p:cNvPr id="9" name="Text 6"/>
+          <p:cNvSpPr/>
+          <p:nvPr/>
+        </p:nvSpPr>
+        <p:spPr>
+          <a:xfrm>
+            <a:off x="804672" y="2159076"/>
+            <a:ext cx="10838383" cy="330200"/>
+          </a:xfrm>
+          <a:prstGeom prst="rect">
+            <a:avLst/>
+          </a:prstGeom>
+          <a:noFill/>
+          <a:ln/>
+        </p:spPr>
+        <p:txBody>
+          <a:bodyPr wrap="square" lIns="0" tIns="0" rIns="0" bIns="0" rtlCol="0" anchor="t"/>
+          <a:lstStyle/>
+          <a:p>
+            <a:pPr algn="l" indent="0" marL="0">
+              <a:lnSpc>
+                <a:spcPct val="130000"/>
+              </a:lnSpc>
+              <a:buNone/>
+            </a:pPr>
+            <a:r>
+              <a:rPr lang="en-US" sz="2000" dirty="0">
+                <a:solidFill>
+                  <a:srgbClr val="B0BAC3"/>
+                </a:solidFill>
+                <a:latin typeface="Mona Sans" pitchFamily="34" charset="0"/>
+                <a:ea typeface="Mona Sans" pitchFamily="34" charset="-122"/>
+                <a:cs typeface="Mona Sans" pitchFamily="34" charset="-120"/>
+              </a:rPr>
+              <a:t>MCP connects an agent session to tools and information beyond the repository.</a:t>
+            </a:r>
+            <a:endParaRPr lang="en-US" sz="2000" dirty="0"/>
+          </a:p>
+        </p:txBody>
+      </p:sp>
+      <p:sp>
+        <p:nvSpPr>
+          <p:cNvPr id="10" name="Text 7"/>
+          <p:cNvSpPr/>
+          <p:nvPr/>
+        </p:nvSpPr>
+        <p:spPr>
+          <a:xfrm>
+            <a:off x="548640" y="2745308"/>
+            <a:ext cx="164592" cy="330200"/>
+          </a:xfrm>
+          <a:prstGeom prst="rect">
+            <a:avLst/>
+          </a:prstGeom>
+          <a:noFill/>
+          <a:ln/>
+        </p:spPr>
+        <p:txBody>
+          <a:bodyPr wrap="square" lIns="0" tIns="0" rIns="0" bIns="0" rtlCol="0" anchor="t"/>
+          <a:lstStyle/>
+          <a:p>
+            <a:pPr algn="l" indent="0" marL="0">
+              <a:lnSpc>
+                <a:spcPct val="130000"/>
+              </a:lnSpc>
+              <a:buNone/>
+            </a:pPr>
+            <a:r>
+              <a:rPr lang="en-US" sz="2000" dirty="0">
+                <a:solidFill>
+                  <a:srgbClr val="0EBE3D"/>
+                </a:solidFill>
+                <a:latin typeface="Mona Sans" pitchFamily="34" charset="0"/>
+                <a:ea typeface="Mona Sans" pitchFamily="34" charset="-122"/>
+                <a:cs typeface="Mona Sans" pitchFamily="34" charset="-120"/>
+              </a:rPr>
+              <a:t>•</a:t>
+            </a:r>
+            <a:endParaRPr lang="en-US" sz="2000" dirty="0"/>
+          </a:p>
+        </p:txBody>
+      </p:sp>
+      <p:sp>
+        <p:nvSpPr>
+          <p:cNvPr id="11" name="Text 8"/>
+          <p:cNvSpPr/>
+          <p:nvPr/>
+        </p:nvSpPr>
+        <p:spPr>
+          <a:xfrm>
+            <a:off x="804672" y="2745308"/>
+            <a:ext cx="10838383" cy="330200"/>
+          </a:xfrm>
+          <a:prstGeom prst="rect">
+            <a:avLst/>
+          </a:prstGeom>
+          <a:noFill/>
+          <a:ln/>
+        </p:spPr>
+        <p:txBody>
+          <a:bodyPr wrap="square" lIns="0" tIns="0" rIns="0" bIns="0" rtlCol="0" anchor="t"/>
+          <a:lstStyle/>
+          <a:p>
+            <a:pPr algn="l" indent="0" marL="0">
+              <a:lnSpc>
+                <a:spcPct val="130000"/>
+              </a:lnSpc>
+              <a:buNone/>
+            </a:pPr>
+            <a:r>
+              <a:rPr lang="en-US" sz="2000" dirty="0">
+                <a:solidFill>
+                  <a:srgbClr val="B0BAC3"/>
+                </a:solidFill>
+                <a:latin typeface="Mona Sans" pitchFamily="34" charset="0"/>
+                <a:ea typeface="Mona Sans" pitchFamily="34" charset="-122"/>
+                <a:cs typeface="Mona Sans" pitchFamily="34" charset="-120"/>
+              </a:rPr>
+              <a:t>Watch the facilitator use a preconfigured WorkIQ server for one safe, authorized example.</a:t>
+            </a:r>
+            <a:endParaRPr lang="en-US" sz="2000" dirty="0"/>
+          </a:p>
+        </p:txBody>
+      </p:sp>
+      <p:sp>
+        <p:nvSpPr>
+          <p:cNvPr id="12" name="Text 9"/>
+          <p:cNvSpPr/>
+          <p:nvPr/>
+        </p:nvSpPr>
+        <p:spPr>
+          <a:xfrm>
+            <a:off x="548640" y="3331540"/>
+            <a:ext cx="164592" cy="330200"/>
+          </a:xfrm>
+          <a:prstGeom prst="rect">
+            <a:avLst/>
+          </a:prstGeom>
+          <a:noFill/>
+          <a:ln/>
+        </p:spPr>
+        <p:txBody>
+          <a:bodyPr wrap="square" lIns="0" tIns="0" rIns="0" bIns="0" rtlCol="0" anchor="t"/>
+          <a:lstStyle/>
+          <a:p>
+            <a:pPr algn="l" indent="0" marL="0">
+              <a:lnSpc>
+                <a:spcPct val="130000"/>
+              </a:lnSpc>
+              <a:buNone/>
+            </a:pPr>
+            <a:r>
+              <a:rPr lang="en-US" sz="2000" dirty="0">
+                <a:solidFill>
+                  <a:srgbClr val="0EBE3D"/>
+                </a:solidFill>
+                <a:latin typeface="Mona Sans" pitchFamily="34" charset="0"/>
+                <a:ea typeface="Mona Sans" pitchFamily="34" charset="-122"/>
+                <a:cs typeface="Mona Sans" pitchFamily="34" charset="-120"/>
+              </a:rPr>
+              <a:t>•</a:t>
+            </a:r>
+            <a:endParaRPr lang="en-US" sz="2000" dirty="0"/>
+          </a:p>
+        </p:txBody>
+      </p:sp>
+      <p:sp>
+        <p:nvSpPr>
+          <p:cNvPr id="13" name="Text 10"/>
+          <p:cNvSpPr/>
+          <p:nvPr/>
+        </p:nvSpPr>
+        <p:spPr>
+          <a:xfrm>
+            <a:off x="804672" y="3331540"/>
+            <a:ext cx="10838383" cy="660400"/>
+          </a:xfrm>
+          <a:prstGeom prst="rect">
+            <a:avLst/>
+          </a:prstGeom>
+          <a:noFill/>
+          <a:ln/>
+        </p:spPr>
+        <p:txBody>
+          <a:bodyPr wrap="square" lIns="0" tIns="0" rIns="0" bIns="0" rtlCol="0" anchor="t"/>
+          <a:lstStyle/>
+          <a:p>
+            <a:pPr algn="l" indent="0" marL="0">
+              <a:lnSpc>
+                <a:spcPct val="130000"/>
+              </a:lnSpc>
+              <a:buNone/>
+            </a:pPr>
+            <a:r>
+              <a:rPr lang="en-US" sz="2000" dirty="0">
+                <a:solidFill>
+                  <a:srgbClr val="B0BAC3"/>
+                </a:solidFill>
+                <a:latin typeface="Mona Sans" pitchFamily="34" charset="0"/>
+                <a:ea typeface="Mona Sans" pitchFamily="34" charset="-122"/>
+                <a:cs typeface="Mona Sans" pitchFamily="34" charset="-120"/>
+              </a:rPr>
+              <a:t>Notice when the agent calls the tool, what information it receives, and how the result helps</a:t>
+            </a:r>
+            <a:endParaRPr lang="en-US" sz="2000" dirty="0"/>
+          </a:p>
+          <a:p>
+            <a:pPr algn="l" indent="0" marL="0">
+              <a:lnSpc>
+                <a:spcPct val="130000"/>
+              </a:lnSpc>
+              <a:buNone/>
+            </a:pPr>
+            <a:r>
+              <a:rPr lang="en-US" sz="2000" dirty="0">
+                <a:solidFill>
+                  <a:srgbClr val="B0BAC3"/>
+                </a:solidFill>
+                <a:latin typeface="Mona Sans" pitchFamily="34" charset="0"/>
+                <a:ea typeface="Mona Sans" pitchFamily="34" charset="-122"/>
+                <a:cs typeface="Mona Sans" pitchFamily="34" charset="-120"/>
+              </a:rPr>
+              <a:t>the task.</a:t>
+            </a:r>
+            <a:endParaRPr lang="en-US" sz="2000" dirty="0"/>
+          </a:p>
+        </p:txBody>
+      </p:sp>
+      <p:sp>
+        <p:nvSpPr>
+          <p:cNvPr id="14" name="Text 11"/>
+          <p:cNvSpPr/>
+          <p:nvPr/>
+        </p:nvSpPr>
+        <p:spPr>
+          <a:xfrm>
+            <a:off x="548640" y="4247972"/>
+            <a:ext cx="164592" cy="330200"/>
+          </a:xfrm>
+          <a:prstGeom prst="rect">
+            <a:avLst/>
+          </a:prstGeom>
+          <a:noFill/>
+          <a:ln/>
+        </p:spPr>
+        <p:txBody>
+          <a:bodyPr wrap="square" lIns="0" tIns="0" rIns="0" bIns="0" rtlCol="0" anchor="t"/>
+          <a:lstStyle/>
+          <a:p>
+            <a:pPr algn="l" indent="0" marL="0">
+              <a:lnSpc>
+                <a:spcPct val="130000"/>
+              </a:lnSpc>
+              <a:buNone/>
+            </a:pPr>
+            <a:r>
+              <a:rPr lang="en-US" sz="2000" dirty="0">
+                <a:solidFill>
+                  <a:srgbClr val="0EBE3D"/>
+                </a:solidFill>
+                <a:latin typeface="Mona Sans" pitchFamily="34" charset="0"/>
+                <a:ea typeface="Mona Sans" pitchFamily="34" charset="-122"/>
+                <a:cs typeface="Mona Sans" pitchFamily="34" charset="-120"/>
+              </a:rPr>
+              <a:t>•</a:t>
+            </a:r>
+            <a:endParaRPr lang="en-US" sz="2000" dirty="0"/>
+          </a:p>
+        </p:txBody>
+      </p:sp>
+      <p:sp>
+        <p:nvSpPr>
+          <p:cNvPr id="15" name="Text 12"/>
+          <p:cNvSpPr/>
+          <p:nvPr/>
+        </p:nvSpPr>
+        <p:spPr>
+          <a:xfrm>
+            <a:off x="804672" y="4247972"/>
+            <a:ext cx="10838383" cy="330200"/>
+          </a:xfrm>
+          <a:prstGeom prst="rect">
+            <a:avLst/>
+          </a:prstGeom>
+          <a:noFill/>
+          <a:ln/>
+        </p:spPr>
+        <p:txBody>
+          <a:bodyPr wrap="square" lIns="0" tIns="0" rIns="0" bIns="0" rtlCol="0" anchor="t"/>
+          <a:lstStyle/>
+          <a:p>
+            <a:pPr algn="l" indent="0" marL="0">
+              <a:lnSpc>
+                <a:spcPct val="130000"/>
+              </a:lnSpc>
+              <a:buNone/>
+            </a:pPr>
+            <a:r>
+              <a:rPr lang="en-US" sz="2000" dirty="0">
+                <a:solidFill>
+                  <a:srgbClr val="B0BAC3"/>
+                </a:solidFill>
+                <a:latin typeface="Mona Sans" pitchFamily="34" charset="0"/>
+                <a:ea typeface="Mona Sans" pitchFamily="34" charset="-122"/>
+                <a:cs typeface="Mona Sans" pitchFamily="34" charset="-120"/>
+              </a:rPr>
+              <a:t>Participants observe only; no WorkIQ setup or account access is required.</a:t>
+            </a:r>
+            <a:endParaRPr lang="en-US" sz="2000" dirty="0"/>
+          </a:p>
+        </p:txBody>
+      </p:sp>
+      <p:sp>
+        <p:nvSpPr>
+          <p:cNvPr id="16" name="Text 13"/>
+          <p:cNvSpPr/>
+          <p:nvPr/>
+        </p:nvSpPr>
+        <p:spPr>
+          <a:xfrm>
+            <a:off x="548640" y="4834204"/>
+            <a:ext cx="164592" cy="330200"/>
+          </a:xfrm>
+          <a:prstGeom prst="rect">
+            <a:avLst/>
+          </a:prstGeom>
+          <a:noFill/>
+          <a:ln/>
+        </p:spPr>
+        <p:txBody>
+          <a:bodyPr wrap="square" lIns="0" tIns="0" rIns="0" bIns="0" rtlCol="0" anchor="t"/>
+          <a:lstStyle/>
+          <a:p>
+            <a:pPr algn="l" indent="0" marL="0">
+              <a:lnSpc>
+                <a:spcPct val="130000"/>
+              </a:lnSpc>
+              <a:buNone/>
+            </a:pPr>
+            <a:r>
+              <a:rPr lang="en-US" sz="2000" dirty="0">
+                <a:solidFill>
+                  <a:srgbClr val="0EBE3D"/>
+                </a:solidFill>
+                <a:latin typeface="Mona Sans" pitchFamily="34" charset="0"/>
+                <a:ea typeface="Mona Sans" pitchFamily="34" charset="-122"/>
+                <a:cs typeface="Mona Sans" pitchFamily="34" charset="-120"/>
+              </a:rPr>
+              <a:t>•</a:t>
+            </a:r>
+            <a:endParaRPr lang="en-US" sz="2000" dirty="0"/>
+          </a:p>
+        </p:txBody>
+      </p:sp>
+      <p:sp>
+        <p:nvSpPr>
+          <p:cNvPr id="17" name="Text 14"/>
+          <p:cNvSpPr/>
+          <p:nvPr/>
+        </p:nvSpPr>
+        <p:spPr>
+          <a:xfrm>
+            <a:off x="804672" y="4834204"/>
+            <a:ext cx="10838383" cy="330200"/>
+          </a:xfrm>
+          <a:prstGeom prst="rect">
+            <a:avLst/>
+          </a:prstGeom>
+          <a:noFill/>
+          <a:ln/>
+        </p:spPr>
+        <p:txBody>
+          <a:bodyPr wrap="square" lIns="0" tIns="0" rIns="0" bIns="0" rtlCol="0" anchor="t"/>
+          <a:lstStyle/>
+          <a:p>
+            <a:pPr algn="l" indent="0" marL="0">
+              <a:lnSpc>
+                <a:spcPct val="130000"/>
+              </a:lnSpc>
+              <a:buNone/>
+            </a:pPr>
+            <a:r>
+              <a:rPr lang="en-US" sz="2000" dirty="0">
+                <a:solidFill>
+                  <a:srgbClr val="B0BAC3"/>
+                </a:solidFill>
+                <a:latin typeface="Mona Sans" pitchFamily="34" charset="0"/>
+                <a:ea typeface="Mona Sans" pitchFamily="34" charset="-122"/>
+                <a:cs typeface="Mona Sans" pitchFamily="34" charset="-120"/>
+              </a:rPr>
+              <a:t>Treat tool output as context to review, not as proof that code or a decision is correct.</a:t>
+            </a:r>
+            <a:endParaRPr lang="en-US" sz="2000" dirty="0"/>
+          </a:p>
+        </p:txBody>
+      </p:sp>
+    </p:spTree>
+  </p:cSld>
+  <p:clrMapOvr>
+    <a:masterClrMapping/>
+  </p:clrMapOvr>
+</p:sld>
+</file>
+
+<file path=ppt/slides/slide22.xml><?xml version="1.0" encoding="utf-8"?>
+<p:sld xmlns:a="http://schemas.openxmlformats.org/drawingml/2006/main" xmlns:r="http://schemas.openxmlformats.org/officeDocument/2006/relationships" xmlns:p="http://schemas.openxmlformats.org/presentationml/2006/main">
+  <p:cSld name="Slide 22">
+    <p:spTree>
+      <p:nvGrpSpPr>
+        <p:cNvPr id="1" name=""/>
+        <p:cNvGrpSpPr/>
+        <p:nvPr/>
+      </p:nvGrpSpPr>
+      <p:grpSpPr>
+        <a:xfrm>
+          <a:off x="0" y="0"/>
+          <a:ext cx="0" cy="0"/>
+          <a:chOff x="0" y="0"/>
+          <a:chExt cx="0" cy="0"/>
+        </a:xfrm>
+      </p:grpSpPr>
+      <p:sp>
+        <p:nvSpPr>
+          <p:cNvPr id="2" name="QA:bg"/>
+          <p:cNvSpPr/>
+          <p:nvPr/>
+        </p:nvSpPr>
+        <p:spPr>
+          <a:xfrm>
+            <a:off x="0" y="0"/>
+            <a:ext cx="12191695" cy="6858000"/>
+          </a:xfrm>
+          <a:prstGeom prst="rect">
+            <a:avLst/>
+          </a:prstGeom>
+          <a:solidFill>
+            <a:srgbClr val="101411"/>
+          </a:solidFill>
+          <a:ln/>
+        </p:spPr>
+      </p:sp>
+      <p:sp>
+        <p:nvSpPr>
+          <p:cNvPr id="3" name="QA:chrome"/>
+          <p:cNvSpPr/>
+          <p:nvPr/>
+        </p:nvSpPr>
+        <p:spPr>
+          <a:xfrm>
+            <a:off x="0" y="6454800"/>
+            <a:ext cx="12191695" cy="18000"/>
+          </a:xfrm>
+          <a:prstGeom prst="rect">
+            <a:avLst/>
+          </a:prstGeom>
+          <a:solidFill>
+            <a:srgbClr val="0EBE3D"/>
+          </a:solidFill>
+          <a:ln/>
+        </p:spPr>
+      </p:sp>
+      <p:sp>
+        <p:nvSpPr>
+          <p:cNvPr id="4" name="QA:chrome"/>
+          <p:cNvSpPr/>
+          <p:nvPr/>
+        </p:nvSpPr>
+        <p:spPr>
+          <a:xfrm>
+            <a:off x="548640" y="6526800"/>
+            <a:ext cx="457200" cy="288000"/>
+          </a:xfrm>
+          <a:prstGeom prst="rect">
+            <a:avLst/>
+          </a:prstGeom>
+          <a:noFill/>
+          <a:ln/>
+        </p:spPr>
+        <p:txBody>
+          <a:bodyPr wrap="square" lIns="0" tIns="0" rIns="0" bIns="0" rtlCol="0" anchor="t"/>
+          <a:lstStyle/>
+          <a:p>
+            <a:pPr algn="l" indent="0" marL="0">
+              <a:lnSpc>
+                <a:spcPct val="120000"/>
+              </a:lnSpc>
+              <a:buNone/>
+            </a:pPr>
+            <a:r>
+              <a:rPr lang="en-US" sz="1200" dirty="0">
+                <a:solidFill>
+                  <a:srgbClr val="909692"/>
+                </a:solidFill>
+                <a:latin typeface="Mona Sans" pitchFamily="34" charset="0"/>
+                <a:ea typeface="Mona Sans" pitchFamily="34" charset="-122"/>
+                <a:cs typeface="Mona Sans" pitchFamily="34" charset="-120"/>
+              </a:rPr>
+              <a:t>22</a:t>
+            </a:r>
+            <a:endParaRPr lang="en-US" sz="1200" dirty="0"/>
+          </a:p>
+        </p:txBody>
+      </p:sp>
+      <p:pic>
+        <p:nvPicPr>
+          <p:cNvPr id="5" name="QA:chrome" descr="/Users/ekyritsi/copilot-worktrees/my-pptx-generator/ekyritsi-super-journey/assets/logos/GitHub_Invertocat_White.png">    </p:cNvPr>
+          <p:cNvPicPr>
+            <a:picLocks noChangeAspect="1"/>
+          </p:cNvPicPr>
+          <p:nvPr/>
+        </p:nvPicPr>
+        <p:blipFill>
+          <a:blip r:embed="rId1"/>
+          <a:stretch>
+            <a:fillRect/>
+          </a:stretch>
+        </p:blipFill>
+        <p:spPr>
+          <a:xfrm>
+            <a:off x="11752495" y="6530400"/>
+            <a:ext cx="259200" cy="252000"/>
+          </a:xfrm>
+          <a:prstGeom prst="rect">
+            <a:avLst/>
+          </a:prstGeom>
+        </p:spPr>
+      </p:pic>
+      <p:sp>
+        <p:nvSpPr>
+          <p:cNvPr id="6" name="QA:chrome"/>
+          <p:cNvSpPr/>
+          <p:nvPr/>
+        </p:nvSpPr>
+        <p:spPr>
+          <a:xfrm>
+            <a:off x="11669695" y="6472800"/>
+            <a:ext cx="10800" cy="385200"/>
+          </a:xfrm>
+          <a:prstGeom prst="rect">
+            <a:avLst/>
+          </a:prstGeom>
+          <a:solidFill>
+            <a:srgbClr val="909692"/>
+          </a:solidFill>
+          <a:ln/>
+        </p:spPr>
+      </p:sp>
+      <p:sp>
+        <p:nvSpPr>
+          <p:cNvPr id="7" name="QA:slide_title"/>
+          <p:cNvSpPr/>
+          <p:nvPr/>
+        </p:nvSpPr>
+        <p:spPr>
+          <a:xfrm>
+            <a:off x="548640" y="228600"/>
+            <a:ext cx="11094415" cy="594360"/>
+          </a:xfrm>
+          <a:prstGeom prst="rect">
+            <a:avLst/>
+          </a:prstGeom>
+          <a:noFill/>
+          <a:ln/>
+        </p:spPr>
+        <p:txBody>
+          <a:bodyPr wrap="square" lIns="0" tIns="0" rIns="0" bIns="0" rtlCol="0" anchor="t"/>
+          <a:lstStyle/>
+          <a:p>
+            <a:pPr algn="l" indent="0" marL="0">
+              <a:lnSpc>
+                <a:spcPct val="120000"/>
+              </a:lnSpc>
+              <a:buNone/>
+            </a:pPr>
+            <a:r>
+              <a:rPr lang="en-US" sz="2800" b="1" dirty="0">
+                <a:solidFill>
+                  <a:srgbClr val="FFFFFF"/>
+                </a:solidFill>
+                <a:latin typeface="Mona Sans" pitchFamily="34" charset="0"/>
+                <a:ea typeface="Mona Sans" pitchFamily="34" charset="-122"/>
+                <a:cs typeface="Mona Sans" pitchFamily="34" charset="-120"/>
+              </a:rPr>
+              <a:t>Mini-teach · Canvas as the shared board</a:t>
+            </a:r>
+            <a:endParaRPr lang="en-US" sz="2800" dirty="0"/>
+          </a:p>
+        </p:txBody>
+      </p:sp>
+      <p:sp>
+        <p:nvSpPr>
+          <p:cNvPr id="8" name="Text 5"/>
+          <p:cNvSpPr/>
+          <p:nvPr/>
+        </p:nvSpPr>
+        <p:spPr>
+          <a:xfrm>
+            <a:off x="548640" y="2452192"/>
+            <a:ext cx="164592" cy="330200"/>
+          </a:xfrm>
+          <a:prstGeom prst="rect">
+            <a:avLst/>
+          </a:prstGeom>
+          <a:noFill/>
+          <a:ln/>
+        </p:spPr>
+        <p:txBody>
+          <a:bodyPr wrap="square" lIns="0" tIns="0" rIns="0" bIns="0" rtlCol="0" anchor="t"/>
+          <a:lstStyle/>
+          <a:p>
+            <a:pPr algn="l" indent="0" marL="0">
+              <a:lnSpc>
+                <a:spcPct val="130000"/>
+              </a:lnSpc>
+              <a:buNone/>
+            </a:pPr>
+            <a:r>
+              <a:rPr lang="en-US" sz="2000" dirty="0">
+                <a:solidFill>
+                  <a:srgbClr val="0EBE3D"/>
+                </a:solidFill>
+                <a:latin typeface="Mona Sans" pitchFamily="34" charset="0"/>
+                <a:ea typeface="Mona Sans" pitchFamily="34" charset="-122"/>
+                <a:cs typeface="Mona Sans" pitchFamily="34" charset="-120"/>
+              </a:rPr>
+              <a:t>•</a:t>
+            </a:r>
+            <a:endParaRPr lang="en-US" sz="2000" dirty="0"/>
+          </a:p>
+        </p:txBody>
+      </p:sp>
+      <p:sp>
+        <p:nvSpPr>
+          <p:cNvPr id="9" name="Text 6"/>
+          <p:cNvSpPr/>
+          <p:nvPr/>
+        </p:nvSpPr>
+        <p:spPr>
+          <a:xfrm>
+            <a:off x="804672" y="2452192"/>
+            <a:ext cx="10838383" cy="330200"/>
+          </a:xfrm>
+          <a:prstGeom prst="rect">
+            <a:avLst/>
+          </a:prstGeom>
+          <a:noFill/>
+          <a:ln/>
+        </p:spPr>
+        <p:txBody>
+          <a:bodyPr wrap="square" lIns="0" tIns="0" rIns="0" bIns="0" rtlCol="0" anchor="t"/>
+          <a:lstStyle/>
+          <a:p>
+            <a:pPr algn="l" indent="0" marL="0">
+              <a:lnSpc>
+                <a:spcPct val="130000"/>
+              </a:lnSpc>
+              <a:buNone/>
+            </a:pPr>
+            <a:r>
+              <a:rPr lang="en-US" sz="2000" dirty="0">
+                <a:solidFill>
+                  <a:srgbClr val="B0BAC3"/>
+                </a:solidFill>
+                <a:latin typeface="Mona Sans" pitchFamily="34" charset="0"/>
+                <a:ea typeface="Mona Sans" pitchFamily="34" charset="-122"/>
+                <a:cs typeface="Mona Sans" pitchFamily="34" charset="-120"/>
+              </a:rPr>
+              <a:t>Create or open a compact work board in the session side panel.</a:t>
+            </a:r>
+            <a:endParaRPr lang="en-US" sz="2000" dirty="0"/>
+          </a:p>
+        </p:txBody>
+      </p:sp>
+      <p:sp>
+        <p:nvSpPr>
+          <p:cNvPr id="10" name="Text 7"/>
+          <p:cNvSpPr/>
+          <p:nvPr/>
+        </p:nvSpPr>
+        <p:spPr>
+          <a:xfrm>
+            <a:off x="548640" y="3038424"/>
+            <a:ext cx="164592" cy="330200"/>
+          </a:xfrm>
+          <a:prstGeom prst="rect">
+            <a:avLst/>
+          </a:prstGeom>
+          <a:noFill/>
+          <a:ln/>
+        </p:spPr>
+        <p:txBody>
+          <a:bodyPr wrap="square" lIns="0" tIns="0" rIns="0" bIns="0" rtlCol="0" anchor="t"/>
+          <a:lstStyle/>
+          <a:p>
+            <a:pPr algn="l" indent="0" marL="0">
+              <a:lnSpc>
+                <a:spcPct val="130000"/>
+              </a:lnSpc>
+              <a:buNone/>
+            </a:pPr>
+            <a:r>
+              <a:rPr lang="en-US" sz="2000" dirty="0">
+                <a:solidFill>
+                  <a:srgbClr val="0EBE3D"/>
+                </a:solidFill>
+                <a:latin typeface="Mona Sans" pitchFamily="34" charset="0"/>
+                <a:ea typeface="Mona Sans" pitchFamily="34" charset="-122"/>
+                <a:cs typeface="Mona Sans" pitchFamily="34" charset="-120"/>
+              </a:rPr>
+              <a:t>•</a:t>
+            </a:r>
+            <a:endParaRPr lang="en-US" sz="2000" dirty="0"/>
+          </a:p>
+        </p:txBody>
+      </p:sp>
+      <p:sp>
+        <p:nvSpPr>
+          <p:cNvPr id="11" name="Text 8"/>
+          <p:cNvSpPr/>
+          <p:nvPr/>
+        </p:nvSpPr>
+        <p:spPr>
+          <a:xfrm>
+            <a:off x="804672" y="3038424"/>
+            <a:ext cx="10838383" cy="660400"/>
+          </a:xfrm>
+          <a:prstGeom prst="rect">
+            <a:avLst/>
+          </a:prstGeom>
+          <a:noFill/>
+          <a:ln/>
+        </p:spPr>
+        <p:txBody>
+          <a:bodyPr wrap="square" lIns="0" tIns="0" rIns="0" bIns="0" rtlCol="0" anchor="t"/>
+          <a:lstStyle/>
+          <a:p>
+            <a:pPr algn="l" indent="0" marL="0">
+              <a:lnSpc>
+                <a:spcPct val="130000"/>
+              </a:lnSpc>
+              <a:buNone/>
+            </a:pPr>
+            <a:r>
+              <a:rPr lang="en-US" sz="2000" dirty="0">
+                <a:solidFill>
+                  <a:srgbClr val="B0BAC3"/>
+                </a:solidFill>
+                <a:latin typeface="Mona Sans" pitchFamily="34" charset="0"/>
+                <a:ea typeface="Mona Sans" pitchFamily="34" charset="-122"/>
+                <a:cs typeface="Mona Sans" pitchFamily="34" charset="-120"/>
+              </a:rPr>
+              <a:t>Track the feature plan, implementation, chosen agent role and work, and verification</a:t>
+            </a:r>
+            <a:endParaRPr lang="en-US" sz="2000" dirty="0"/>
+          </a:p>
+          <a:p>
+            <a:pPr algn="l" indent="0" marL="0">
+              <a:lnSpc>
+                <a:spcPct val="130000"/>
+              </a:lnSpc>
+              <a:buNone/>
+            </a:pPr>
+            <a:r>
+              <a:rPr lang="en-US" sz="2000" dirty="0">
+                <a:solidFill>
+                  <a:srgbClr val="B0BAC3"/>
+                </a:solidFill>
+                <a:latin typeface="Mona Sans" pitchFamily="34" charset="0"/>
+                <a:ea typeface="Mona Sans" pitchFamily="34" charset="-122"/>
+                <a:cs typeface="Mona Sans" pitchFamily="34" charset="-120"/>
+              </a:rPr>
+              <a:t>evidence.</a:t>
+            </a:r>
+            <a:endParaRPr lang="en-US" sz="2000" dirty="0"/>
+          </a:p>
+        </p:txBody>
+      </p:sp>
+      <p:sp>
+        <p:nvSpPr>
+          <p:cNvPr id="12" name="Text 9"/>
+          <p:cNvSpPr/>
+          <p:nvPr/>
+        </p:nvSpPr>
+        <p:spPr>
+          <a:xfrm>
+            <a:off x="548640" y="3954856"/>
+            <a:ext cx="164592" cy="330200"/>
+          </a:xfrm>
+          <a:prstGeom prst="rect">
+            <a:avLst/>
+          </a:prstGeom>
+          <a:noFill/>
+          <a:ln/>
+        </p:spPr>
+        <p:txBody>
+          <a:bodyPr wrap="square" lIns="0" tIns="0" rIns="0" bIns="0" rtlCol="0" anchor="t"/>
+          <a:lstStyle/>
+          <a:p>
+            <a:pPr algn="l" indent="0" marL="0">
+              <a:lnSpc>
+                <a:spcPct val="130000"/>
+              </a:lnSpc>
+              <a:buNone/>
+            </a:pPr>
+            <a:r>
+              <a:rPr lang="en-US" sz="2000" dirty="0">
+                <a:solidFill>
+                  <a:srgbClr val="0EBE3D"/>
+                </a:solidFill>
+                <a:latin typeface="Mona Sans" pitchFamily="34" charset="0"/>
+                <a:ea typeface="Mona Sans" pitchFamily="34" charset="-122"/>
+                <a:cs typeface="Mona Sans" pitchFamily="34" charset="-120"/>
+              </a:rPr>
+              <a:t>•</a:t>
+            </a:r>
+            <a:endParaRPr lang="en-US" sz="2000" dirty="0"/>
+          </a:p>
+        </p:txBody>
+      </p:sp>
+      <p:sp>
+        <p:nvSpPr>
+          <p:cNvPr id="13" name="Text 10"/>
+          <p:cNvSpPr/>
+          <p:nvPr/>
+        </p:nvSpPr>
+        <p:spPr>
+          <a:xfrm>
+            <a:off x="804672" y="3954856"/>
+            <a:ext cx="10838383" cy="330200"/>
+          </a:xfrm>
+          <a:prstGeom prst="rect">
+            <a:avLst/>
+          </a:prstGeom>
+          <a:noFill/>
+          <a:ln/>
+        </p:spPr>
+        <p:txBody>
+          <a:bodyPr wrap="square" lIns="0" tIns="0" rIns="0" bIns="0" rtlCol="0" anchor="t"/>
+          <a:lstStyle/>
+          <a:p>
+            <a:pPr algn="l" indent="0" marL="0">
+              <a:lnSpc>
+                <a:spcPct val="130000"/>
+              </a:lnSpc>
+              <a:buNone/>
+            </a:pPr>
+            <a:r>
+              <a:rPr lang="en-US" sz="2000" dirty="0">
+                <a:solidFill>
+                  <a:srgbClr val="B0BAC3"/>
+                </a:solidFill>
+                <a:latin typeface="Mona Sans" pitchFamily="34" charset="0"/>
+                <a:ea typeface="Mona Sans" pitchFamily="34" charset="-122"/>
+                <a:cs typeface="Mona Sans" pitchFamily="34" charset="-120"/>
+              </a:rPr>
+              <a:t>The canvas makes status visible; it does not replace reviewing the diff or running checks.</a:t>
+            </a:r>
+            <a:endParaRPr lang="en-US" sz="2000" dirty="0"/>
+          </a:p>
+        </p:txBody>
+      </p:sp>
+      <p:sp>
+        <p:nvSpPr>
+          <p:cNvPr id="14" name="Text 11"/>
+          <p:cNvSpPr/>
+          <p:nvPr/>
+        </p:nvSpPr>
+        <p:spPr>
+          <a:xfrm>
+            <a:off x="548640" y="4541088"/>
+            <a:ext cx="164592" cy="330200"/>
+          </a:xfrm>
+          <a:prstGeom prst="rect">
+            <a:avLst/>
+          </a:prstGeom>
+          <a:noFill/>
+          <a:ln/>
+        </p:spPr>
+        <p:txBody>
+          <a:bodyPr wrap="square" lIns="0" tIns="0" rIns="0" bIns="0" rtlCol="0" anchor="t"/>
+          <a:lstStyle/>
+          <a:p>
+            <a:pPr algn="l" indent="0" marL="0">
+              <a:lnSpc>
+                <a:spcPct val="130000"/>
+              </a:lnSpc>
+              <a:buNone/>
+            </a:pPr>
+            <a:r>
+              <a:rPr lang="en-US" sz="2000" dirty="0">
+                <a:solidFill>
+                  <a:srgbClr val="0EBE3D"/>
+                </a:solidFill>
+                <a:latin typeface="Mona Sans" pitchFamily="34" charset="0"/>
+                <a:ea typeface="Mona Sans" pitchFamily="34" charset="-122"/>
+                <a:cs typeface="Mona Sans" pitchFamily="34" charset="-120"/>
+              </a:rPr>
+              <a:t>•</a:t>
+            </a:r>
+            <a:endParaRPr lang="en-US" sz="2000" dirty="0"/>
+          </a:p>
+        </p:txBody>
+      </p:sp>
+      <p:sp>
+        <p:nvSpPr>
+          <p:cNvPr id="15" name="Text 12"/>
+          <p:cNvSpPr/>
+          <p:nvPr/>
+        </p:nvSpPr>
+        <p:spPr>
+          <a:xfrm>
+            <a:off x="804672" y="4541088"/>
+            <a:ext cx="10838383" cy="330200"/>
+          </a:xfrm>
+          <a:prstGeom prst="rect">
+            <a:avLst/>
+          </a:prstGeom>
+          <a:noFill/>
+          <a:ln/>
+        </p:spPr>
+        <p:txBody>
+          <a:bodyPr wrap="square" lIns="0" tIns="0" rIns="0" bIns="0" rtlCol="0" anchor="t"/>
+          <a:lstStyle/>
+          <a:p>
+            <a:pPr algn="l" indent="0" marL="0">
+              <a:lnSpc>
+                <a:spcPct val="130000"/>
+              </a:lnSpc>
+              <a:buNone/>
+            </a:pPr>
+            <a:r>
+              <a:rPr lang="en-US" sz="2000" dirty="0">
+                <a:solidFill>
+                  <a:srgbClr val="B0BAC3"/>
+                </a:solidFill>
+                <a:latin typeface="Mona Sans" pitchFamily="34" charset="0"/>
+                <a:ea typeface="Mona Sans" pitchFamily="34" charset="-122"/>
+                <a:cs typeface="Mona Sans" pitchFamily="34" charset="-120"/>
+              </a:rPr>
+              <a:t>Use the board to tell what needs attention without searching a long chat.</a:t>
+            </a:r>
+            <a:endParaRPr lang="en-US" sz="2000" dirty="0"/>
+          </a:p>
+        </p:txBody>
+      </p:sp>
+    </p:spTree>
+  </p:cSld>
+  <p:clrMapOvr>
+    <a:masterClrMapping/>
+  </p:clrMapOvr>
+</p:sld>
+</file>
+
+<file path=ppt/slides/slide23.xml><?xml version="1.0" encoding="utf-8"?>
+<p:sld xmlns:a="http://schemas.openxmlformats.org/drawingml/2006/main" xmlns:r="http://schemas.openxmlformats.org/officeDocument/2006/relationships" xmlns:p="http://schemas.openxmlformats.org/presentationml/2006/main">
+  <p:cSld name="Slide 23">
+    <p:spTree>
+      <p:nvGrpSpPr>
+        <p:cNvPr id="1" name=""/>
+        <p:cNvGrpSpPr/>
+        <p:nvPr/>
+      </p:nvGrpSpPr>
+      <p:grpSpPr>
+        <a:xfrm>
+          <a:off x="0" y="0"/>
+          <a:ext cx="0" cy="0"/>
+          <a:chOff x="0" y="0"/>
+          <a:chExt cx="0" cy="0"/>
+        </a:xfrm>
+      </p:grpSpPr>
+      <p:sp>
+        <p:nvSpPr>
+          <p:cNvPr id="2" name="QA:bg"/>
+          <p:cNvSpPr/>
+          <p:nvPr/>
+        </p:nvSpPr>
+        <p:spPr>
+          <a:xfrm>
+            <a:off x="0" y="0"/>
+            <a:ext cx="12191695" cy="6858000"/>
+          </a:xfrm>
+          <a:prstGeom prst="rect">
+            <a:avLst/>
+          </a:prstGeom>
+          <a:solidFill>
+            <a:srgbClr val="101411"/>
+          </a:solidFill>
+          <a:ln/>
+        </p:spPr>
+      </p:sp>
+      <p:sp>
+        <p:nvSpPr>
+          <p:cNvPr id="3" name="QA:chrome"/>
+          <p:cNvSpPr/>
+          <p:nvPr/>
+        </p:nvSpPr>
+        <p:spPr>
+          <a:xfrm>
+            <a:off x="0" y="6454800"/>
+            <a:ext cx="12191695" cy="18000"/>
+          </a:xfrm>
+          <a:prstGeom prst="rect">
+            <a:avLst/>
+          </a:prstGeom>
+          <a:solidFill>
+            <a:srgbClr val="0EBE3D"/>
+          </a:solidFill>
+          <a:ln/>
+        </p:spPr>
+      </p:sp>
+      <p:sp>
+        <p:nvSpPr>
+          <p:cNvPr id="4" name="QA:chrome"/>
+          <p:cNvSpPr/>
+          <p:nvPr/>
+        </p:nvSpPr>
+        <p:spPr>
+          <a:xfrm>
+            <a:off x="548640" y="6526800"/>
+            <a:ext cx="457200" cy="288000"/>
+          </a:xfrm>
+          <a:prstGeom prst="rect">
+            <a:avLst/>
+          </a:prstGeom>
+          <a:noFill/>
+          <a:ln/>
+        </p:spPr>
+        <p:txBody>
+          <a:bodyPr wrap="square" lIns="0" tIns="0" rIns="0" bIns="0" rtlCol="0" anchor="t"/>
+          <a:lstStyle/>
+          <a:p>
+            <a:pPr algn="l" indent="0" marL="0">
+              <a:lnSpc>
+                <a:spcPct val="120000"/>
+              </a:lnSpc>
+              <a:buNone/>
+            </a:pPr>
+            <a:r>
+              <a:rPr lang="en-US" sz="1200" dirty="0">
+                <a:solidFill>
+                  <a:srgbClr val="909692"/>
+                </a:solidFill>
+                <a:latin typeface="Mona Sans" pitchFamily="34" charset="0"/>
+                <a:ea typeface="Mona Sans" pitchFamily="34" charset="-122"/>
+                <a:cs typeface="Mona Sans" pitchFamily="34" charset="-120"/>
+              </a:rPr>
+              <a:t>23</a:t>
+            </a:r>
+            <a:endParaRPr lang="en-US" sz="1200" dirty="0"/>
+          </a:p>
+        </p:txBody>
+      </p:sp>
+      <p:pic>
+        <p:nvPicPr>
+          <p:cNvPr id="5" name="QA:chrome" descr="/Users/ekyritsi/copilot-worktrees/my-pptx-generator/ekyritsi-super-journey/assets/logos/GitHub_Invertocat_White.png">    </p:cNvPr>
+          <p:cNvPicPr>
+            <a:picLocks noChangeAspect="1"/>
+          </p:cNvPicPr>
+          <p:nvPr/>
+        </p:nvPicPr>
+        <p:blipFill>
+          <a:blip r:embed="rId1"/>
+          <a:stretch>
+            <a:fillRect/>
+          </a:stretch>
+        </p:blipFill>
+        <p:spPr>
+          <a:xfrm>
+            <a:off x="11752495" y="6530400"/>
+            <a:ext cx="259200" cy="252000"/>
+          </a:xfrm>
+          <a:prstGeom prst="rect">
+            <a:avLst/>
+          </a:prstGeom>
+        </p:spPr>
+      </p:pic>
+      <p:sp>
+        <p:nvSpPr>
+          <p:cNvPr id="6" name="QA:chrome"/>
+          <p:cNvSpPr/>
+          <p:nvPr/>
+        </p:nvSpPr>
+        <p:spPr>
+          <a:xfrm>
+            <a:off x="11669695" y="6472800"/>
+            <a:ext cx="10800" cy="385200"/>
+          </a:xfrm>
+          <a:prstGeom prst="rect">
+            <a:avLst/>
+          </a:prstGeom>
+          <a:solidFill>
+            <a:srgbClr val="909692"/>
+          </a:solidFill>
+          <a:ln/>
+        </p:spPr>
+      </p:sp>
+      <p:sp>
+        <p:nvSpPr>
+          <p:cNvPr id="7" name="QA:slide_title"/>
+          <p:cNvSpPr/>
+          <p:nvPr/>
+        </p:nvSpPr>
+        <p:spPr>
+          <a:xfrm>
+            <a:off x="548640" y="228600"/>
+            <a:ext cx="11094415" cy="594360"/>
+          </a:xfrm>
+          <a:prstGeom prst="rect">
+            <a:avLst/>
+          </a:prstGeom>
+          <a:noFill/>
+          <a:ln/>
+        </p:spPr>
+        <p:txBody>
+          <a:bodyPr wrap="square" lIns="0" tIns="0" rIns="0" bIns="0" rtlCol="0" anchor="t"/>
+          <a:lstStyle/>
+          <a:p>
+            <a:pPr algn="l" indent="0" marL="0">
+              <a:lnSpc>
+                <a:spcPct val="120000"/>
+              </a:lnSpc>
+              <a:buNone/>
+            </a:pPr>
+            <a:r>
+              <a:rPr lang="en-US" sz="2800" b="1" dirty="0">
+                <a:solidFill>
+                  <a:srgbClr val="FFFFFF"/>
+                </a:solidFill>
+                <a:latin typeface="Mona Sans" pitchFamily="34" charset="0"/>
+                <a:ea typeface="Mona Sans" pitchFamily="34" charset="-122"/>
+                <a:cs typeface="Mona Sans" pitchFamily="34" charset="-120"/>
+              </a:rPr>
+              <a:t>Hands-on 3 · Record and verify</a:t>
+            </a:r>
+            <a:endParaRPr lang="en-US" sz="2800" dirty="0"/>
+          </a:p>
+        </p:txBody>
+      </p:sp>
+      <p:sp>
+        <p:nvSpPr>
+          <p:cNvPr id="8" name="QA:card"/>
+          <p:cNvSpPr/>
+          <p:nvPr/>
+        </p:nvSpPr>
+        <p:spPr>
+          <a:xfrm>
+            <a:off x="548640" y="1005840"/>
+            <a:ext cx="11094415" cy="5311800"/>
+          </a:xfrm>
+          <a:prstGeom prst="roundRect">
+            <a:avLst>
+              <a:gd name="adj" fmla="val 2754"/>
+            </a:avLst>
+          </a:prstGeom>
+          <a:solidFill>
+            <a:srgbClr val="20262C"/>
+          </a:solidFill>
+          <a:ln w="9525">
+            <a:solidFill>
+              <a:srgbClr val="5A615C"/>
+            </a:solidFill>
+            <a:prstDash val="solid"/>
+          </a:ln>
+        </p:spPr>
+      </p:sp>
+      <p:sp>
+        <p:nvSpPr>
+          <p:cNvPr id="9" name="QA:check:0"/>
+          <p:cNvSpPr/>
+          <p:nvPr/>
+        </p:nvSpPr>
+        <p:spPr>
+          <a:xfrm>
+            <a:off x="914400" y="1525000"/>
+            <a:ext cx="347472" cy="347472"/>
+          </a:xfrm>
+          <a:prstGeom prst="roundRect">
+            <a:avLst>
+              <a:gd name="adj" fmla="val 50000"/>
+            </a:avLst>
+          </a:prstGeom>
+          <a:ln w="19050">
+            <a:solidFill>
+              <a:srgbClr val="909692"/>
+            </a:solidFill>
+            <a:prstDash val="solid"/>
+          </a:ln>
+        </p:spPr>
+      </p:sp>
+      <p:sp>
+        <p:nvSpPr>
+          <p:cNvPr id="10" name="QA:heading:0"/>
+          <p:cNvSpPr/>
+          <p:nvPr/>
+        </p:nvSpPr>
+        <p:spPr>
+          <a:xfrm>
+            <a:off x="1645920" y="1393936"/>
+            <a:ext cx="9631375" cy="609600"/>
+          </a:xfrm>
+          <a:prstGeom prst="rect">
+            <a:avLst/>
+          </a:prstGeom>
+          <a:noFill/>
+          <a:ln/>
+        </p:spPr>
+        <p:txBody>
+          <a:bodyPr wrap="square" lIns="0" tIns="0" rIns="0" bIns="0" rtlCol="0" anchor="t"/>
+          <a:lstStyle/>
+          <a:p>
+            <a:pPr algn="l" indent="0" marL="0">
+              <a:lnSpc>
+                <a:spcPct val="120000"/>
+              </a:lnSpc>
+              <a:buNone/>
+            </a:pPr>
+            <a:r>
+              <a:rPr lang="en-US" sz="2000" b="1" dirty="0">
+                <a:solidFill>
+                  <a:srgbClr val="FFFFFF"/>
+                </a:solidFill>
+                <a:latin typeface="Mona Sans" pitchFamily="34" charset="0"/>
+                <a:ea typeface="Mona Sans" pitchFamily="34" charset="-122"/>
+                <a:cs typeface="Mona Sans" pitchFamily="34" charset="-120"/>
+              </a:rPr>
+              <a:t>Put acceptance criteria on the canvas; update build and agent-work status</a:t>
+            </a:r>
+            <a:endParaRPr lang="en-US" sz="2000" dirty="0"/>
+          </a:p>
+          <a:p>
+            <a:pPr algn="l" indent="0" marL="0">
+              <a:lnSpc>
+                <a:spcPct val="120000"/>
+              </a:lnSpc>
+              <a:buNone/>
+            </a:pPr>
+            <a:r>
+              <a:rPr lang="en-US" sz="2000" b="1" dirty="0">
+                <a:solidFill>
+                  <a:srgbClr val="FFFFFF"/>
+                </a:solidFill>
+                <a:latin typeface="Mona Sans" pitchFamily="34" charset="0"/>
+                <a:ea typeface="Mona Sans" pitchFamily="34" charset="-122"/>
+                <a:cs typeface="Mona Sans" pitchFamily="34" charset="-120"/>
+              </a:rPr>
+              <a:t>from what actually happened</a:t>
+            </a:r>
+            <a:endParaRPr lang="en-US" sz="2000" dirty="0"/>
+          </a:p>
+        </p:txBody>
+      </p:sp>
+      <p:sp>
+        <p:nvSpPr>
+          <p:cNvPr id="11" name="Shape 8"/>
+          <p:cNvSpPr/>
+          <p:nvPr/>
+        </p:nvSpPr>
+        <p:spPr>
+          <a:xfrm>
+            <a:off x="914400" y="2183137"/>
+            <a:ext cx="10362895" cy="12700"/>
+          </a:xfrm>
+          <a:prstGeom prst="rect">
+            <a:avLst/>
+          </a:prstGeom>
+          <a:solidFill>
+            <a:srgbClr val="5A615C"/>
+          </a:solidFill>
+          <a:ln/>
+        </p:spPr>
+      </p:sp>
+      <p:sp>
+        <p:nvSpPr>
+          <p:cNvPr id="12" name="QA:check:1"/>
+          <p:cNvSpPr/>
+          <p:nvPr/>
+        </p:nvSpPr>
+        <p:spPr>
+          <a:xfrm>
+            <a:off x="914400" y="2506502"/>
+            <a:ext cx="347472" cy="347472"/>
+          </a:xfrm>
+          <a:prstGeom prst="roundRect">
+            <a:avLst>
+              <a:gd name="adj" fmla="val 50000"/>
+            </a:avLst>
+          </a:prstGeom>
+          <a:ln w="19050">
+            <a:solidFill>
+              <a:srgbClr val="909692"/>
+            </a:solidFill>
+            <a:prstDash val="solid"/>
+          </a:ln>
+        </p:spPr>
+      </p:sp>
+      <p:sp>
+        <p:nvSpPr>
+          <p:cNvPr id="13" name="QA:heading:1"/>
+          <p:cNvSpPr/>
+          <p:nvPr/>
+        </p:nvSpPr>
+        <p:spPr>
+          <a:xfrm>
+            <a:off x="1645920" y="2527838"/>
+            <a:ext cx="9631375" cy="304800"/>
+          </a:xfrm>
+          <a:prstGeom prst="rect">
+            <a:avLst/>
+          </a:prstGeom>
+          <a:noFill/>
+          <a:ln/>
+        </p:spPr>
+        <p:txBody>
+          <a:bodyPr wrap="square" lIns="0" tIns="0" rIns="0" bIns="0" rtlCol="0" anchor="t"/>
+          <a:lstStyle/>
+          <a:p>
+            <a:pPr algn="l" indent="0" marL="0">
+              <a:lnSpc>
+                <a:spcPct val="120000"/>
+              </a:lnSpc>
+              <a:buNone/>
+            </a:pPr>
+            <a:r>
+              <a:rPr lang="en-US" sz="2000" b="1" dirty="0">
+                <a:solidFill>
+                  <a:srgbClr val="FFFFFF"/>
+                </a:solidFill>
+                <a:latin typeface="Mona Sans" pitchFamily="34" charset="0"/>
+                <a:ea typeface="Mona Sans" pitchFamily="34" charset="-122"/>
+                <a:cs typeface="Mona Sans" pitchFamily="34" charset="-120"/>
+              </a:rPr>
+              <a:t>Inspect the agent's output and any edits; compare them with the task</a:t>
+            </a:r>
+            <a:endParaRPr lang="en-US" sz="2000" dirty="0"/>
+          </a:p>
+        </p:txBody>
+      </p:sp>
+      <p:sp>
+        <p:nvSpPr>
+          <p:cNvPr id="14" name="Shape 11"/>
+          <p:cNvSpPr/>
+          <p:nvPr/>
+        </p:nvSpPr>
+        <p:spPr>
+          <a:xfrm>
+            <a:off x="914400" y="3164639"/>
+            <a:ext cx="10362895" cy="12700"/>
+          </a:xfrm>
+          <a:prstGeom prst="rect">
+            <a:avLst/>
+          </a:prstGeom>
+          <a:solidFill>
+            <a:srgbClr val="5A615C"/>
+          </a:solidFill>
+          <a:ln/>
+        </p:spPr>
+      </p:sp>
+      <p:sp>
+        <p:nvSpPr>
+          <p:cNvPr id="15" name="QA:check:2"/>
+          <p:cNvSpPr/>
+          <p:nvPr/>
+        </p:nvSpPr>
+        <p:spPr>
+          <a:xfrm>
+            <a:off x="914400" y="3488004"/>
+            <a:ext cx="347472" cy="347472"/>
+          </a:xfrm>
+          <a:prstGeom prst="roundRect">
+            <a:avLst>
+              <a:gd name="adj" fmla="val 50000"/>
+            </a:avLst>
+          </a:prstGeom>
+          <a:ln w="19050">
+            <a:solidFill>
+              <a:srgbClr val="909692"/>
+            </a:solidFill>
+            <a:prstDash val="solid"/>
+          </a:ln>
+        </p:spPr>
+      </p:sp>
+      <p:sp>
+        <p:nvSpPr>
+          <p:cNvPr id="16" name="QA:heading:2"/>
+          <p:cNvSpPr/>
+          <p:nvPr/>
+        </p:nvSpPr>
+        <p:spPr>
+          <a:xfrm>
+            <a:off x="1645920" y="3509340"/>
+            <a:ext cx="9631375" cy="304800"/>
+          </a:xfrm>
+          <a:prstGeom prst="rect">
+            <a:avLst/>
+          </a:prstGeom>
+          <a:noFill/>
+          <a:ln/>
+        </p:spPr>
+        <p:txBody>
+          <a:bodyPr wrap="square" lIns="0" tIns="0" rIns="0" bIns="0" rtlCol="0" anchor="t"/>
+          <a:lstStyle/>
+          <a:p>
+            <a:pPr algn="l" indent="0" marL="0">
+              <a:lnSpc>
+                <a:spcPct val="120000"/>
+              </a:lnSpc>
+              <a:buNone/>
+            </a:pPr>
+            <a:r>
+              <a:rPr lang="en-US" sz="2000" b="1" dirty="0">
+                <a:solidFill>
+                  <a:srgbClr val="FFFFFF"/>
+                </a:solidFill>
+                <a:latin typeface="Mona Sans" pitchFamily="34" charset="0"/>
+                <a:ea typeface="Mona Sans" pitchFamily="34" charset="-122"/>
+                <a:cs typeface="Mona Sans" pitchFamily="34" charset="-120"/>
+              </a:rPr>
+              <a:t>Run npm test -- --run and npm run build in samples/book-app-web</a:t>
+            </a:r>
+            <a:endParaRPr lang="en-US" sz="2000" dirty="0"/>
+          </a:p>
+        </p:txBody>
+      </p:sp>
+      <p:sp>
+        <p:nvSpPr>
+          <p:cNvPr id="17" name="Shape 14"/>
+          <p:cNvSpPr/>
+          <p:nvPr/>
+        </p:nvSpPr>
+        <p:spPr>
+          <a:xfrm>
+            <a:off x="914400" y="4146141"/>
+            <a:ext cx="10362895" cy="12700"/>
+          </a:xfrm>
+          <a:prstGeom prst="rect">
+            <a:avLst/>
+          </a:prstGeom>
+          <a:solidFill>
+            <a:srgbClr val="5A615C"/>
+          </a:solidFill>
+          <a:ln/>
+        </p:spPr>
+      </p:sp>
+      <p:sp>
+        <p:nvSpPr>
+          <p:cNvPr id="18" name="QA:check:3"/>
+          <p:cNvSpPr/>
+          <p:nvPr/>
+        </p:nvSpPr>
+        <p:spPr>
+          <a:xfrm>
+            <a:off x="914400" y="4469506"/>
+            <a:ext cx="347472" cy="347472"/>
+          </a:xfrm>
+          <a:prstGeom prst="roundRect">
+            <a:avLst>
+              <a:gd name="adj" fmla="val 50000"/>
+            </a:avLst>
+          </a:prstGeom>
+          <a:ln w="19050">
+            <a:solidFill>
+              <a:srgbClr val="909692"/>
+            </a:solidFill>
+            <a:prstDash val="solid"/>
+          </a:ln>
+        </p:spPr>
+      </p:sp>
+      <p:sp>
+        <p:nvSpPr>
+          <p:cNvPr id="19" name="QA:heading:3"/>
+          <p:cNvSpPr/>
+          <p:nvPr/>
+        </p:nvSpPr>
+        <p:spPr>
+          <a:xfrm>
+            <a:off x="1645920" y="4490842"/>
+            <a:ext cx="9631375" cy="304800"/>
+          </a:xfrm>
+          <a:prstGeom prst="rect">
+            <a:avLst/>
+          </a:prstGeom>
+          <a:noFill/>
+          <a:ln/>
+        </p:spPr>
+        <p:txBody>
+          <a:bodyPr wrap="square" lIns="0" tIns="0" rIns="0" bIns="0" rtlCol="0" anchor="t"/>
+          <a:lstStyle/>
+          <a:p>
+            <a:pPr algn="l" indent="0" marL="0">
+              <a:lnSpc>
+                <a:spcPct val="120000"/>
+              </a:lnSpc>
+              <a:buNone/>
+            </a:pPr>
+            <a:r>
+              <a:rPr lang="en-US" sz="2000" b="1" dirty="0">
+                <a:solidFill>
+                  <a:srgbClr val="FFFFFF"/>
+                </a:solidFill>
+                <a:latin typeface="Mona Sans" pitchFamily="34" charset="0"/>
+                <a:ea typeface="Mona Sans" pitchFamily="34" charset="-122"/>
+                <a:cs typeface="Mona Sans" pitchFamily="34" charset="-120"/>
+              </a:rPr>
+              <a:t>In Browser, test no filters, each active filter, and reset behavior</a:t>
+            </a:r>
+            <a:endParaRPr lang="en-US" sz="2000" dirty="0"/>
+          </a:p>
+        </p:txBody>
+      </p:sp>
+      <p:sp>
+        <p:nvSpPr>
+          <p:cNvPr id="20" name="Shape 17"/>
+          <p:cNvSpPr/>
+          <p:nvPr/>
+        </p:nvSpPr>
+        <p:spPr>
+          <a:xfrm>
+            <a:off x="914400" y="5127643"/>
+            <a:ext cx="10362895" cy="12700"/>
+          </a:xfrm>
+          <a:prstGeom prst="rect">
+            <a:avLst/>
+          </a:prstGeom>
+          <a:solidFill>
+            <a:srgbClr val="5A615C"/>
+          </a:solidFill>
+          <a:ln/>
+        </p:spPr>
+      </p:sp>
+      <p:sp>
+        <p:nvSpPr>
+          <p:cNvPr id="21" name="QA:check:4"/>
+          <p:cNvSpPr/>
+          <p:nvPr/>
+        </p:nvSpPr>
+        <p:spPr>
+          <a:xfrm>
+            <a:off x="914400" y="5451008"/>
+            <a:ext cx="347472" cy="347472"/>
+          </a:xfrm>
+          <a:prstGeom prst="roundRect">
+            <a:avLst>
+              <a:gd name="adj" fmla="val 50000"/>
+            </a:avLst>
+          </a:prstGeom>
+          <a:ln w="19050">
+            <a:solidFill>
+              <a:srgbClr val="909692"/>
+            </a:solidFill>
+            <a:prstDash val="solid"/>
+          </a:ln>
+        </p:spPr>
+      </p:sp>
+      <p:sp>
+        <p:nvSpPr>
+          <p:cNvPr id="22" name="QA:heading:4"/>
+          <p:cNvSpPr/>
+          <p:nvPr/>
+        </p:nvSpPr>
+        <p:spPr>
+          <a:xfrm>
+            <a:off x="1645920" y="5472344"/>
+            <a:ext cx="9631375" cy="304800"/>
+          </a:xfrm>
+          <a:prstGeom prst="rect">
+            <a:avLst/>
+          </a:prstGeom>
+          <a:noFill/>
+          <a:ln/>
+        </p:spPr>
+        <p:txBody>
+          <a:bodyPr wrap="square" lIns="0" tIns="0" rIns="0" bIns="0" rtlCol="0" anchor="t"/>
+          <a:lstStyle/>
+          <a:p>
+            <a:pPr algn="l" indent="0" marL="0">
+              <a:lnSpc>
+                <a:spcPct val="120000"/>
+              </a:lnSpc>
+              <a:buNone/>
+            </a:pPr>
+            <a:r>
+              <a:rPr lang="en-US" sz="2000" b="1" dirty="0">
+                <a:solidFill>
+                  <a:srgbClr val="FFFFFF"/>
+                </a:solidFill>
+                <a:latin typeface="Mona Sans" pitchFamily="34" charset="0"/>
+                <a:ea typeface="Mona Sans" pitchFamily="34" charset="-122"/>
+                <a:cs typeface="Mona Sans" pitchFamily="34" charset="-120"/>
+              </a:rPr>
+              <a:t>Record only checks you personally observed; mark blocked checks as not run</a:t>
+            </a:r>
+            <a:endParaRPr lang="en-US" sz="2000" dirty="0"/>
+          </a:p>
+        </p:txBody>
+      </p:sp>
+    </p:spTree>
+  </p:cSld>
+  <p:clrMapOvr>
+    <a:masterClrMapping/>
+  </p:clrMapOvr>
+</p:sld>
+</file>
+
+<file path=ppt/slides/slide24.xml><?xml version="1.0" encoding="utf-8"?>
+<p:sld xmlns:a="http://schemas.openxmlformats.org/drawingml/2006/main" xmlns:r="http://schemas.openxmlformats.org/officeDocument/2006/relationships" xmlns:p="http://schemas.openxmlformats.org/presentationml/2006/main">
+  <p:cSld name="Slide 24">
+    <p:spTree>
+      <p:nvGrpSpPr>
+        <p:cNvPr id="1" name=""/>
+        <p:cNvGrpSpPr/>
+        <p:nvPr/>
+      </p:nvGrpSpPr>
+      <p:grpSpPr>
+        <a:xfrm>
+          <a:off x="0" y="0"/>
+          <a:ext cx="0" cy="0"/>
+          <a:chOff x="0" y="0"/>
+          <a:chExt cx="0" cy="0"/>
+        </a:xfrm>
+      </p:grpSpPr>
+      <p:sp>
+        <p:nvSpPr>
+          <p:cNvPr id="2" name="QA:bg"/>
+          <p:cNvSpPr/>
+          <p:nvPr/>
+        </p:nvSpPr>
+        <p:spPr>
+          <a:xfrm>
+            <a:off x="0" y="0"/>
+            <a:ext cx="12191695" cy="6858000"/>
+          </a:xfrm>
+          <a:prstGeom prst="rect">
+            <a:avLst/>
+          </a:prstGeom>
+          <a:solidFill>
+            <a:srgbClr val="101411"/>
+          </a:solidFill>
+          <a:ln/>
+        </p:spPr>
+      </p:sp>
+      <p:sp>
+        <p:nvSpPr>
+          <p:cNvPr id="3" name="QA:chrome"/>
+          <p:cNvSpPr/>
+          <p:nvPr/>
+        </p:nvSpPr>
+        <p:spPr>
+          <a:xfrm>
+            <a:off x="0" y="6454800"/>
+            <a:ext cx="12191695" cy="18000"/>
+          </a:xfrm>
+          <a:prstGeom prst="rect">
+            <a:avLst/>
+          </a:prstGeom>
+          <a:solidFill>
+            <a:srgbClr val="0EBE3D"/>
+          </a:solidFill>
+          <a:ln/>
+        </p:spPr>
+      </p:sp>
+      <p:sp>
+        <p:nvSpPr>
+          <p:cNvPr id="4" name="QA:chrome"/>
+          <p:cNvSpPr/>
+          <p:nvPr/>
+        </p:nvSpPr>
+        <p:spPr>
+          <a:xfrm>
+            <a:off x="548640" y="6526800"/>
+            <a:ext cx="457200" cy="288000"/>
+          </a:xfrm>
+          <a:prstGeom prst="rect">
+            <a:avLst/>
+          </a:prstGeom>
+          <a:noFill/>
+          <a:ln/>
+        </p:spPr>
+        <p:txBody>
+          <a:bodyPr wrap="square" lIns="0" tIns="0" rIns="0" bIns="0" rtlCol="0" anchor="t"/>
+          <a:lstStyle/>
+          <a:p>
+            <a:pPr algn="l" indent="0" marL="0">
+              <a:lnSpc>
+                <a:spcPct val="120000"/>
+              </a:lnSpc>
+              <a:buNone/>
+            </a:pPr>
+            <a:r>
+              <a:rPr lang="en-US" sz="1200" dirty="0">
+                <a:solidFill>
+                  <a:srgbClr val="909692"/>
+                </a:solidFill>
+                <a:latin typeface="Mona Sans" pitchFamily="34" charset="0"/>
+                <a:ea typeface="Mona Sans" pitchFamily="34" charset="-122"/>
+                <a:cs typeface="Mona Sans" pitchFamily="34" charset="-120"/>
+              </a:rPr>
+              <a:t>24</a:t>
+            </a:r>
+            <a:endParaRPr lang="en-US" sz="1200" dirty="0"/>
+          </a:p>
+        </p:txBody>
+      </p:sp>
+      <p:pic>
+        <p:nvPicPr>
+          <p:cNvPr id="5" name="QA:chrome" descr="/Users/ekyritsi/copilot-worktrees/my-pptx-generator/ekyritsi-super-journey/assets/logos/GitHub_Invertocat_White.png">    </p:cNvPr>
+          <p:cNvPicPr>
+            <a:picLocks noChangeAspect="1"/>
+          </p:cNvPicPr>
+          <p:nvPr/>
+        </p:nvPicPr>
+        <p:blipFill>
+          <a:blip r:embed="rId1"/>
+          <a:stretch>
+            <a:fillRect/>
+          </a:stretch>
+        </p:blipFill>
+        <p:spPr>
+          <a:xfrm>
+            <a:off x="11752495" y="6530400"/>
+            <a:ext cx="259200" cy="252000"/>
+          </a:xfrm>
+          <a:prstGeom prst="rect">
+            <a:avLst/>
+          </a:prstGeom>
+        </p:spPr>
+      </p:pic>
+      <p:sp>
+        <p:nvSpPr>
+          <p:cNvPr id="6" name="QA:chrome"/>
+          <p:cNvSpPr/>
+          <p:nvPr/>
+        </p:nvSpPr>
+        <p:spPr>
+          <a:xfrm>
+            <a:off x="11669695" y="6472800"/>
+            <a:ext cx="10800" cy="385200"/>
+          </a:xfrm>
+          <a:prstGeom prst="rect">
+            <a:avLst/>
+          </a:prstGeom>
+          <a:solidFill>
+            <a:srgbClr val="909692"/>
+          </a:solidFill>
+          <a:ln/>
+        </p:spPr>
+      </p:sp>
+      <p:sp>
+        <p:nvSpPr>
+          <p:cNvPr id="7" name="QA:slide_title"/>
+          <p:cNvSpPr/>
+          <p:nvPr/>
+        </p:nvSpPr>
+        <p:spPr>
+          <a:xfrm>
+            <a:off x="548640" y="228600"/>
+            <a:ext cx="11094415" cy="594360"/>
+          </a:xfrm>
+          <a:prstGeom prst="rect">
+            <a:avLst/>
+          </a:prstGeom>
+          <a:noFill/>
+          <a:ln/>
+        </p:spPr>
+        <p:txBody>
+          <a:bodyPr wrap="square" lIns="0" tIns="0" rIns="0" bIns="0" rtlCol="0" anchor="t"/>
+          <a:lstStyle/>
+          <a:p>
+            <a:pPr algn="l" indent="0" marL="0">
+              <a:lnSpc>
+                <a:spcPct val="120000"/>
+              </a:lnSpc>
+              <a:buNone/>
+            </a:pPr>
+            <a:r>
+              <a:rPr lang="en-US" sz="2800" b="1" dirty="0">
+                <a:solidFill>
+                  <a:srgbClr val="FFFFFF"/>
+                </a:solidFill>
+                <a:latin typeface="Mona Sans" pitchFamily="34" charset="0"/>
+                <a:ea typeface="Mona Sans" pitchFamily="34" charset="-122"/>
+                <a:cs typeface="Mona Sans" pitchFamily="34" charset="-120"/>
+              </a:rPr>
               <a:t>Validate Clear filters</a:t>
             </a:r>
             <a:endParaRPr lang="en-US" sz="2800" dirty="0"/>
@@ -10883,7 +13194,7 @@
       </p:sp>
       <p:graphicFrame>
         <p:nvGraphicFramePr>
-          <p:cNvPr id="22" name="QA:table"/>
+          <p:cNvPr id="25" name="QA:table"/>
           <p:cNvGraphicFramePr>
             <a:graphicFrameLocks noGrp="1"/>
           </p:cNvGraphicFramePr>
@@ -10946,7 +13257,7 @@
                     </a:lnT>
                     <a:lnB w="25400" cap="flat" cmpd="sng" algn="ctr">
                       <a:solidFill>
-                        <a:srgbClr val="8534F3"/>
+                        <a:srgbClr val="0EBE3D"/>
                       </a:solidFill>
                       <a:prstDash val="solid"/>
                       <a:round/>
@@ -10996,7 +13307,7 @@
                     </a:lnT>
                     <a:lnB w="25400" cap="flat" cmpd="sng" algn="ctr">
                       <a:solidFill>
-                        <a:srgbClr val="8534F3"/>
+                        <a:srgbClr val="0EBE3D"/>
                       </a:solidFill>
                       <a:prstDash val="solid"/>
                       <a:round/>
@@ -11297,6 +13608,96 @@
                           <a:ea typeface="Mona Sans" pitchFamily="34" charset="-122"/>
                           <a:cs typeface="Mona Sans" pitchFamily="34" charset="-120"/>
                         </a:rPr>
+                        <a:t>Spaces-only search</a:t>
+                      </a:r>
+                      <a:endParaRPr lang="en-US" sz="1300" dirty="0">
+                        <a:latin typeface="Mona Sans" charset="0"/>
+                        <a:ea typeface="Mona Sans" charset="0"/>
+                        <a:cs typeface="Mona Sans" charset="0"/>
+                      </a:endParaRPr>
+                    </a:p>
+                  </a:txBody>
+                  <a:tcPr marL="137160" marR="137160" marT="38100" marB="38100" anchor="ctr">
+                    <a:lnL w="0" cap="flat" cmpd="sng" algn="ctr">
+                      <a:noFill/>
+                    </a:lnL>
+                    <a:lnR w="0" cap="flat" cmpd="sng" algn="ctr">
+                      <a:noFill/>
+                    </a:lnR>
+                    <a:lnT w="0" cap="flat" cmpd="sng" algn="ctr">
+                      <a:noFill/>
+                    </a:lnT>
+                    <a:lnB w="0" cap="flat" cmpd="sng" algn="ctr">
+                      <a:noFill/>
+                    </a:lnB>
+                    <a:solidFill>
+                      <a:srgbClr val="22282B"/>
+                    </a:solidFill>
+                  </a:tcPr>
+                </a:tc>
+                <a:tc>
+                  <a:txBody>
+                    <a:bodyPr/>
+                    <a:lstStyle/>
+                    <a:p>
+                      <a:pPr algn="l" indent="0" marL="0">
+                        <a:buNone/>
+                      </a:pPr>
+                      <a:r>
+                        <a:rPr lang="en-US" sz="1300" dirty="0">
+                          <a:solidFill>
+                            <a:srgbClr val="B0BAC3"/>
+                          </a:solidFill>
+                          <a:latin typeface="Mona Sans" pitchFamily="34" charset="0"/>
+                          <a:ea typeface="Mona Sans" pitchFamily="34" charset="-122"/>
+                          <a:cs typeface="Mona Sans" pitchFamily="34" charset="-120"/>
+                        </a:rPr>
+                        <a:t>Treated as no effective filter; Clear filters stays hidden.</a:t>
+                      </a:r>
+                      <a:endParaRPr lang="en-US" sz="1300" dirty="0">
+                        <a:latin typeface="Mona Sans" charset="0"/>
+                        <a:ea typeface="Mona Sans" charset="0"/>
+                        <a:cs typeface="Mona Sans" charset="0"/>
+                      </a:endParaRPr>
+                    </a:p>
+                  </a:txBody>
+                  <a:tcPr marL="137160" marR="137160" marT="38100" marB="38100" anchor="ctr">
+                    <a:lnL w="0" cap="flat" cmpd="sng" algn="ctr">
+                      <a:noFill/>
+                    </a:lnL>
+                    <a:lnR w="0" cap="flat" cmpd="sng" algn="ctr">
+                      <a:noFill/>
+                    </a:lnR>
+                    <a:lnT w="0" cap="flat" cmpd="sng" algn="ctr">
+                      <a:noFill/>
+                    </a:lnT>
+                    <a:lnB w="0" cap="flat" cmpd="sng" algn="ctr">
+                      <a:noFill/>
+                    </a:lnB>
+                    <a:solidFill>
+                      <a:srgbClr val="22282B"/>
+                    </a:solidFill>
+                  </a:tcPr>
+                </a:tc>
+              </a:tr>
+              <a:tr h="457200">
+                <a:tc>
+                  <a:txBody>
+                    <a:bodyPr/>
+                    <a:lstStyle/>
+                    <a:p>
+                      <a:pPr algn="l" indent="0" marL="0">
+                        <a:buNone/>
+                      </a:pPr>
+                      <a:r>
+                        <a:rPr lang="en-US" sz="1300" dirty="0">
+                          <a:solidFill>
+                            <a:srgbClr val="B0BAC3"/>
+                          </a:solidFill>
+                          <a:latin typeface="Mona Sans" pitchFamily="34" charset="0"/>
+                          <a:ea typeface="Mona Sans" pitchFamily="34" charset="-122"/>
+                          <a:cs typeface="Mona Sans" pitchFamily="34" charset="-120"/>
+                        </a:rPr>
                         <a:t>Automated checks</a:t>
                       </a:r>
                       <a:endParaRPr lang="en-US" sz="1300" dirty="0">
@@ -11320,7 +13721,7 @@
                       <a:noFill/>
                     </a:lnB>
                     <a:solidFill>
-                      <a:srgbClr val="22282B"/>
+                      <a:srgbClr val="1A1F22"/>
                     </a:solidFill>
                   </a:tcPr>
                 </a:tc>
@@ -11364,7 +13765,7 @@
                       <a:noFill/>
                     </a:lnB>
                     <a:solidFill>
-                      <a:srgbClr val="22282B"/>
+                      <a:srgbClr val="1A1F22"/>
                     </a:solidFill>
                   </a:tcPr>
                 </a:tc>
@@ -11381,9 +13782,9 @@
 </p:sld>
 </file>
 
-<file path=ppt/slides/slide22.xml><?xml version="1.0" encoding="utf-8"?>
+<file path=ppt/slides/slide25.xml><?xml version="1.0" encoding="utf-8"?>
 <p:sld xmlns:a="http://schemas.openxmlformats.org/drawingml/2006/main" xmlns:r="http://schemas.openxmlformats.org/officeDocument/2006/relationships" xmlns:p="http://schemas.openxmlformats.org/presentationml/2006/main">
-  <p:cSld name="Slide 22">
+  <p:cSld name="Slide 25">
     <p:spTree>
       <p:nvGrpSpPr>
         <p:cNvPr id="1" name=""/>
@@ -11433,7 +13834,7 @@
             <a:avLst/>
           </a:prstGeom>
           <a:solidFill>
-            <a:srgbClr val="8534F3"/>
+            <a:srgbClr val="0EBE3D"/>
           </a:solidFill>
           <a:ln/>
         </p:spPr>
@@ -11474,7 +13875,7 @@
                 <a:ea typeface="Mona Sans" pitchFamily="34" charset="-122"/>
                 <a:cs typeface="Mona Sans" pitchFamily="34" charset="-120"/>
               </a:rPr>
-              <a:t>22</a:t>
+              <a:t>25</a:t>
             </a:r>
             <a:endParaRPr lang="en-US" sz="1200" dirty="0"/>
           </a:p>
@@ -11596,7 +13997,7 @@
             <a:r>
               <a:rPr lang="en-US" sz="2000" dirty="0">
                 <a:solidFill>
-                  <a:srgbClr val="8534F3"/>
+                  <a:srgbClr val="0EBE3D"/>
                 </a:solidFill>
                 <a:latin typeface="Mona Sans" pitchFamily="34" charset="0"/>
                 <a:ea typeface="Mona Sans" pitchFamily="34" charset="-122"/>
@@ -11644,7 +14045,7 @@
                 <a:ea typeface="Mona Sans" pitchFamily="34" charset="-122"/>
                 <a:cs typeface="Mona Sans" pitchFamily="34" charset="-120"/>
               </a:rPr>
-              <a:t>Session A · What files changed? Does the diff match the plan? Did tests and build pass?</a:t>
+              <a:t>Build session · What files changed? Does the diff match the plan? Did tests and build pass?</a:t>
             </a:r>
             <a:endParaRPr lang="en-US" sz="2000" dirty="0"/>
           </a:p>
@@ -11680,7 +14081,7 @@
             <a:r>
               <a:rPr lang="en-US" sz="2000" dirty="0">
                 <a:solidFill>
-                  <a:srgbClr val="8534F3"/>
+                  <a:srgbClr val="0EBE3D"/>
                 </a:solidFill>
                 <a:latin typeface="Mona Sans" pitchFamily="34" charset="0"/>
                 <a:ea typeface="Mona Sans" pitchFamily="34" charset="-122"/>
@@ -11728,7 +14129,7 @@
                 <a:ea typeface="Mona Sans" pitchFamily="34" charset="-122"/>
                 <a:cs typeface="Mona Sans" pitchFamily="34" charset="-120"/>
               </a:rPr>
-              <a:t>Session B · What criteria did the reviewer identify? Which are confirmed in code?</a:t>
+              <a:t>Custom agent · Did it do the selected job? Is its output grounded in evidence?</a:t>
             </a:r>
             <a:endParaRPr lang="en-US" sz="2000" dirty="0"/>
           </a:p>
@@ -11764,7 +14165,7 @@
             <a:r>
               <a:rPr lang="en-US" sz="2000" dirty="0">
                 <a:solidFill>
-                  <a:srgbClr val="8534F3"/>
+                  <a:srgbClr val="0EBE3D"/>
                 </a:solidFill>
                 <a:latin typeface="Mona Sans" pitchFamily="34" charset="0"/>
                 <a:ea typeface="Mona Sans" pitchFamily="34" charset="-122"/>
@@ -11848,7 +14249,7 @@
             <a:r>
               <a:rPr lang="en-US" sz="2000" dirty="0">
                 <a:solidFill>
-                  <a:srgbClr val="8534F3"/>
+                  <a:srgbClr val="0EBE3D"/>
                 </a:solidFill>
                 <a:latin typeface="Mona Sans" pitchFamily="34" charset="0"/>
                 <a:ea typeface="Mona Sans" pitchFamily="34" charset="-122"/>
@@ -11910,9 +14311,9 @@
 </p:sld>
 </file>
 
-<file path=ppt/slides/slide23.xml><?xml version="1.0" encoding="utf-8"?>
+<file path=ppt/slides/slide26.xml><?xml version="1.0" encoding="utf-8"?>
 <p:sld xmlns:a="http://schemas.openxmlformats.org/drawingml/2006/main" xmlns:r="http://schemas.openxmlformats.org/officeDocument/2006/relationships" xmlns:p="http://schemas.openxmlformats.org/presentationml/2006/main">
-  <p:cSld name="Slide 23">
+  <p:cSld name="Slide 26">
     <p:spTree>
       <p:nvGrpSpPr>
         <p:cNvPr id="1" name=""/>
@@ -11962,7 +14363,7 @@
             <a:avLst/>
           </a:prstGeom>
           <a:solidFill>
-            <a:srgbClr val="8534F3"/>
+            <a:srgbClr val="0EBE3D"/>
           </a:solidFill>
           <a:ln/>
         </p:spPr>
@@ -12003,7 +14404,7 @@
                 <a:ea typeface="Mona Sans" pitchFamily="34" charset="-122"/>
                 <a:cs typeface="Mona Sans" pitchFamily="34" charset="-120"/>
               </a:rPr>
-              <a:t>23</a:t>
+              <a:t>26</a:t>
             </a:r>
             <a:endParaRPr lang="en-US" sz="1200" dirty="0"/>
           </a:p>
@@ -12103,7 +14504,7 @@
         </p:nvSpPr>
         <p:spPr>
           <a:xfrm>
-            <a:off x="548640" y="2617292"/>
+            <a:off x="548640" y="2324176"/>
             <a:ext cx="164592" cy="330200"/>
           </a:xfrm>
           <a:prstGeom prst="rect">
@@ -12125,7 +14526,7 @@
             <a:r>
               <a:rPr lang="en-US" sz="2000" dirty="0">
                 <a:solidFill>
-                  <a:srgbClr val="8534F3"/>
+                  <a:srgbClr val="0EBE3D"/>
                 </a:solidFill>
                 <a:latin typeface="Mona Sans" pitchFamily="34" charset="0"/>
                 <a:ea typeface="Mona Sans" pitchFamily="34" charset="-122"/>
@@ -12145,7 +14546,7 @@
         </p:nvSpPr>
         <p:spPr>
           <a:xfrm>
-            <a:off x="804672" y="2617292"/>
+            <a:off x="804672" y="2324176"/>
             <a:ext cx="10838383" cy="330200"/>
           </a:xfrm>
           <a:prstGeom prst="rect">
@@ -12187,7 +14588,7 @@
         </p:nvSpPr>
         <p:spPr>
           <a:xfrm>
-            <a:off x="548640" y="3203524"/>
+            <a:off x="548640" y="2910408"/>
             <a:ext cx="164592" cy="330200"/>
           </a:xfrm>
           <a:prstGeom prst="rect">
@@ -12209,7 +14610,7 @@
             <a:r>
               <a:rPr lang="en-US" sz="2000" dirty="0">
                 <a:solidFill>
-                  <a:srgbClr val="8534F3"/>
+                  <a:srgbClr val="0EBE3D"/>
                 </a:solidFill>
                 <a:latin typeface="Mona Sans" pitchFamily="34" charset="0"/>
                 <a:ea typeface="Mona Sans" pitchFamily="34" charset="-122"/>
@@ -12229,7 +14630,7 @@
         </p:nvSpPr>
         <p:spPr>
           <a:xfrm>
-            <a:off x="804672" y="3203524"/>
+            <a:off x="804672" y="2910408"/>
             <a:ext cx="10838383" cy="330200"/>
           </a:xfrm>
           <a:prstGeom prst="rect">
@@ -12271,7 +14672,7 @@
         </p:nvSpPr>
         <p:spPr>
           <a:xfrm>
-            <a:off x="548640" y="3789756"/>
+            <a:off x="548640" y="3496640"/>
             <a:ext cx="164592" cy="330200"/>
           </a:xfrm>
           <a:prstGeom prst="rect">
@@ -12293,7 +14694,7 @@
             <a:r>
               <a:rPr lang="en-US" sz="2000" dirty="0">
                 <a:solidFill>
-                  <a:srgbClr val="8534F3"/>
+                  <a:srgbClr val="0EBE3D"/>
                 </a:solidFill>
                 <a:latin typeface="Mona Sans" pitchFamily="34" charset="0"/>
                 <a:ea typeface="Mona Sans" pitchFamily="34" charset="-122"/>
@@ -12313,7 +14714,7 @@
         </p:nvSpPr>
         <p:spPr>
           <a:xfrm>
-            <a:off x="804672" y="3789756"/>
+            <a:off x="804672" y="3496640"/>
             <a:ext cx="10838383" cy="330200"/>
           </a:xfrm>
           <a:prstGeom prst="rect">
@@ -12341,7 +14742,7 @@
                 <a:ea typeface="Mona Sans" pitchFamily="34" charset="-122"/>
                 <a:cs typeface="Mona Sans" pitchFamily="34" charset="-120"/>
               </a:rPr>
-              <a:t>Skills and custom agents shape how help is delivered; they are not proof of correctness.</a:t>
+              <a:t>Skills and custom agents shape how help is delivered; MCP adds tools and information.</a:t>
             </a:r>
             <a:endParaRPr lang="en-US" sz="2000" dirty="0"/>
           </a:p>
@@ -12355,7 +14756,7 @@
         </p:nvSpPr>
         <p:spPr>
           <a:xfrm>
-            <a:off x="548640" y="4375988"/>
+            <a:off x="548640" y="4082872"/>
             <a:ext cx="164592" cy="330200"/>
           </a:xfrm>
           <a:prstGeom prst="rect">
@@ -12377,7 +14778,7 @@
             <a:r>
               <a:rPr lang="en-US" sz="2000" dirty="0">
                 <a:solidFill>
-                  <a:srgbClr val="8534F3"/>
+                  <a:srgbClr val="0EBE3D"/>
                 </a:solidFill>
                 <a:latin typeface="Mona Sans" pitchFamily="34" charset="0"/>
                 <a:ea typeface="Mona Sans" pitchFamily="34" charset="-122"/>
@@ -12397,7 +14798,7 @@
         </p:nvSpPr>
         <p:spPr>
           <a:xfrm>
-            <a:off x="804672" y="4375988"/>
+            <a:off x="804672" y="4082872"/>
             <a:ext cx="10838383" cy="330200"/>
           </a:xfrm>
           <a:prstGeom prst="rect">
@@ -12426,6 +14827,90 @@
                 <a:cs typeface="Mona Sans" pitchFamily="34" charset="-120"/>
               </a:rPr>
               <a:t>A canvas keeps status visible; people still inspect diffs and evidence.</a:t>
+            </a:r>
+            <a:endParaRPr lang="en-US" sz="2000" dirty="0"/>
+          </a:p>
+        </p:txBody>
+      </p:sp>
+      <p:sp>
+        <p:nvSpPr>
+          <p:cNvPr id="16" name="Text 13"/>
+          <p:cNvSpPr/>
+          <p:nvPr/>
+        </p:nvSpPr>
+        <p:spPr>
+          <a:xfrm>
+            <a:off x="548640" y="4669104"/>
+            <a:ext cx="164592" cy="330200"/>
+          </a:xfrm>
+          <a:prstGeom prst="rect">
+            <a:avLst/>
+          </a:prstGeom>
+          <a:noFill/>
+          <a:ln/>
+        </p:spPr>
+        <p:txBody>
+          <a:bodyPr wrap="square" lIns="0" tIns="0" rIns="0" bIns="0" rtlCol="0" anchor="t"/>
+          <a:lstStyle/>
+          <a:p>
+            <a:pPr algn="l" indent="0" marL="0">
+              <a:lnSpc>
+                <a:spcPct val="130000"/>
+              </a:lnSpc>
+              <a:buNone/>
+            </a:pPr>
+            <a:r>
+              <a:rPr lang="en-US" sz="2000" dirty="0">
+                <a:solidFill>
+                  <a:srgbClr val="0EBE3D"/>
+                </a:solidFill>
+                <a:latin typeface="Mona Sans" pitchFamily="34" charset="0"/>
+                <a:ea typeface="Mona Sans" pitchFamily="34" charset="-122"/>
+                <a:cs typeface="Mona Sans" pitchFamily="34" charset="-120"/>
+              </a:rPr>
+              <a:t>•</a:t>
+            </a:r>
+            <a:endParaRPr lang="en-US" sz="2000" dirty="0"/>
+          </a:p>
+        </p:txBody>
+      </p:sp>
+      <p:sp>
+        <p:nvSpPr>
+          <p:cNvPr id="17" name="Text 14"/>
+          <p:cNvSpPr/>
+          <p:nvPr/>
+        </p:nvSpPr>
+        <p:spPr>
+          <a:xfrm>
+            <a:off x="804672" y="4669104"/>
+            <a:ext cx="10838383" cy="330200"/>
+          </a:xfrm>
+          <a:prstGeom prst="rect">
+            <a:avLst/>
+          </a:prstGeom>
+          <a:noFill/>
+          <a:ln/>
+        </p:spPr>
+        <p:txBody>
+          <a:bodyPr wrap="square" lIns="0" tIns="0" rIns="0" bIns="0" rtlCol="0" anchor="t"/>
+          <a:lstStyle/>
+          <a:p>
+            <a:pPr algn="l" indent="0" marL="0">
+              <a:lnSpc>
+                <a:spcPct val="130000"/>
+              </a:lnSpc>
+              <a:buNone/>
+            </a:pPr>
+            <a:r>
+              <a:rPr lang="en-US" sz="2000" dirty="0">
+                <a:solidFill>
+                  <a:srgbClr val="B0BAC3"/>
+                </a:solidFill>
+                <a:latin typeface="Mona Sans" pitchFamily="34" charset="0"/>
+                <a:ea typeface="Mona Sans" pitchFamily="34" charset="-122"/>
+                <a:cs typeface="Mona Sans" pitchFamily="34" charset="-120"/>
+              </a:rPr>
+              <a:t>Use the next three days to experiment with the app and workshop repository.</a:t>
             </a:r>
             <a:endParaRPr lang="en-US" sz="2000" dirty="0"/>
           </a:p>
@@ -12439,9 +14924,9 @@
 </p:sld>
 </file>
 
-<file path=ppt/slides/slide24.xml><?xml version="1.0" encoding="utf-8"?>
+<file path=ppt/slides/slide27.xml><?xml version="1.0" encoding="utf-8"?>
 <p:sld xmlns:a="http://schemas.openxmlformats.org/drawingml/2006/main" xmlns:r="http://schemas.openxmlformats.org/officeDocument/2006/relationships" xmlns:p="http://schemas.openxmlformats.org/presentationml/2006/main">
-  <p:cSld name="Slide 24">
+  <p:cSld name="Slide 27">
     <p:spTree>
       <p:nvGrpSpPr>
         <p:cNvPr id="1" name=""/>
@@ -12478,7 +14963,7 @@
       </p:sp>
       <p:pic>
         <p:nvPicPr>
-          <p:cNvPr id="3" name="QA:bg" descr="/Users/ekyritsi/copilot-worktrees/my-pptx-generator/ekyritsi-super-journey/assets/backgrounds/2026-mona-pixel-purple.png">    </p:cNvPr>
+          <p:cNvPr id="3" name="QA:bg" descr="/Users/ekyritsi/copilot-worktrees/my-pptx-generator/ekyritsi-super-journey/assets/backgrounds/2026-mona-pixel-dark-green.png">    </p:cNvPr>
           <p:cNvPicPr>
             <a:picLocks noChangeAspect="1"/>
           </p:cNvPicPr>
@@ -12622,7 +15107,7 @@
             <a:avLst/>
           </a:prstGeom>
           <a:solidFill>
-            <a:srgbClr val="8534F3"/>
+            <a:srgbClr val="0EBE3D"/>
           </a:solidFill>
           <a:ln/>
         </p:spPr>
@@ -12728,7 +15213,7 @@
             <a:avLst/>
           </a:prstGeom>
           <a:solidFill>
-            <a:srgbClr val="8534F3"/>
+            <a:srgbClr val="0EBE3D"/>
           </a:solidFill>
           <a:ln/>
         </p:spPr>
@@ -12877,7 +15362,7 @@
             <a:avLst/>
           </a:prstGeom>
           <a:solidFill>
-            <a:srgbClr val="8534F3"/>
+            <a:srgbClr val="0EBE3D"/>
           </a:solidFill>
           <a:ln/>
         </p:spPr>
@@ -13040,7 +15525,7 @@
             <a:r>
               <a:rPr lang="en-US" sz="2000" dirty="0">
                 <a:solidFill>
-                  <a:srgbClr val="8534F3"/>
+                  <a:srgbClr val="0EBE3D"/>
                 </a:solidFill>
                 <a:latin typeface="Mona Sans" pitchFamily="34" charset="0"/>
                 <a:ea typeface="Mona Sans" pitchFamily="34" charset="-122"/>
@@ -13124,7 +15609,7 @@
             <a:r>
               <a:rPr lang="en-US" sz="2000" dirty="0">
                 <a:solidFill>
-                  <a:srgbClr val="8534F3"/>
+                  <a:srgbClr val="0EBE3D"/>
                 </a:solidFill>
                 <a:latin typeface="Mona Sans" pitchFamily="34" charset="0"/>
                 <a:ea typeface="Mona Sans" pitchFamily="34" charset="-122"/>
@@ -13208,7 +15693,7 @@
             <a:r>
               <a:rPr lang="en-US" sz="2000" dirty="0">
                 <a:solidFill>
-                  <a:srgbClr val="8534F3"/>
+                  <a:srgbClr val="0EBE3D"/>
                 </a:solidFill>
                 <a:latin typeface="Mona Sans" pitchFamily="34" charset="0"/>
                 <a:ea typeface="Mona Sans" pitchFamily="34" charset="-122"/>
@@ -13292,7 +15777,7 @@
             <a:r>
               <a:rPr lang="en-US" sz="2000" dirty="0">
                 <a:solidFill>
-                  <a:srgbClr val="8534F3"/>
+                  <a:srgbClr val="0EBE3D"/>
                 </a:solidFill>
                 <a:latin typeface="Mona Sans" pitchFamily="34" charset="0"/>
                 <a:ea typeface="Mona Sans" pitchFamily="34" charset="-122"/>
@@ -13376,7 +15861,7 @@
             <a:r>
               <a:rPr lang="en-US" sz="2000" dirty="0">
                 <a:solidFill>
-                  <a:srgbClr val="8534F3"/>
+                  <a:srgbClr val="0EBE3D"/>
                 </a:solidFill>
                 <a:latin typeface="Mona Sans" pitchFamily="34" charset="0"/>
                 <a:ea typeface="Mona Sans" pitchFamily="34" charset="-122"/>
@@ -13490,7 +15975,7 @@
             <a:avLst/>
           </a:prstGeom>
           <a:solidFill>
-            <a:srgbClr val="8534F3"/>
+            <a:srgbClr val="0EBE3D"/>
           </a:solidFill>
           <a:ln/>
         </p:spPr>
@@ -14206,7 +16691,7 @@
             <a:avLst/>
           </a:prstGeom>
           <a:solidFill>
-            <a:srgbClr val="8534F3"/>
+            <a:srgbClr val="0EBE3D"/>
           </a:solidFill>
           <a:ln/>
         </p:spPr>
@@ -14312,7 +16797,7 @@
             <a:avLst/>
           </a:prstGeom>
           <a:solidFill>
-            <a:srgbClr val="8534F3"/>
+            <a:srgbClr val="0EBE3D"/>
           </a:solidFill>
           <a:ln/>
         </p:spPr>
@@ -14461,7 +16946,7 @@
             <a:avLst/>
           </a:prstGeom>
           <a:solidFill>
-            <a:srgbClr val="8534F3"/>
+            <a:srgbClr val="0EBE3D"/>
           </a:solidFill>
           <a:ln/>
         </p:spPr>
@@ -14659,7 +17144,7 @@
                     </a:lnT>
                     <a:lnB w="25400" cap="flat" cmpd="sng" algn="ctr">
                       <a:solidFill>
-                        <a:srgbClr val="8534F3"/>
+                        <a:srgbClr val="0EBE3D"/>
                       </a:solidFill>
                       <a:prstDash val="solid"/>
                       <a:round/>
@@ -14709,7 +17194,7 @@
                     </a:lnT>
                     <a:lnB w="25400" cap="flat" cmpd="sng" algn="ctr">
                       <a:solidFill>
-                        <a:srgbClr val="8534F3"/>
+                        <a:srgbClr val="0EBE3D"/>
                       </a:solidFill>
                       <a:prstDash val="solid"/>
                       <a:round/>
@@ -15146,7 +17631,7 @@
             <a:avLst/>
           </a:prstGeom>
           <a:solidFill>
-            <a:srgbClr val="8534F3"/>
+            <a:srgbClr val="0EBE3D"/>
           </a:solidFill>
           <a:ln/>
         </p:spPr>
@@ -15309,7 +17794,7 @@
             <a:r>
               <a:rPr lang="en-US" sz="2000" dirty="0">
                 <a:solidFill>
-                  <a:srgbClr val="8534F3"/>
+                  <a:srgbClr val="0EBE3D"/>
                 </a:solidFill>
                 <a:latin typeface="Mona Sans" pitchFamily="34" charset="0"/>
                 <a:ea typeface="Mona Sans" pitchFamily="34" charset="-122"/>
@@ -15413,7 +17898,7 @@
             <a:r>
               <a:rPr lang="en-US" sz="2000" dirty="0">
                 <a:solidFill>
-                  <a:srgbClr val="8534F3"/>
+                  <a:srgbClr val="0EBE3D"/>
                 </a:solidFill>
                 <a:latin typeface="Mona Sans" pitchFamily="34" charset="0"/>
                 <a:ea typeface="Mona Sans" pitchFamily="34" charset="-122"/>
@@ -15497,7 +17982,7 @@
             <a:r>
               <a:rPr lang="en-US" sz="2000" dirty="0">
                 <a:solidFill>
-                  <a:srgbClr val="8534F3"/>
+                  <a:srgbClr val="0EBE3D"/>
                 </a:solidFill>
                 <a:latin typeface="Mona Sans" pitchFamily="34" charset="0"/>
                 <a:ea typeface="Mona Sans" pitchFamily="34" charset="-122"/>
@@ -15601,7 +18086,7 @@
             <a:r>
               <a:rPr lang="en-US" sz="2000" dirty="0">
                 <a:solidFill>
-                  <a:srgbClr val="8534F3"/>
+                  <a:srgbClr val="0EBE3D"/>
                 </a:solidFill>
                 <a:latin typeface="Mona Sans" pitchFamily="34" charset="0"/>
                 <a:ea typeface="Mona Sans" pitchFamily="34" charset="-122"/>
@@ -15715,7 +18200,7 @@
             <a:avLst/>
           </a:prstGeom>
           <a:solidFill>
-            <a:srgbClr val="8534F3"/>
+            <a:srgbClr val="0EBE3D"/>
           </a:solidFill>
           <a:ln/>
         </p:spPr>
@@ -15856,7 +18341,7 @@
         </p:nvSpPr>
         <p:spPr>
           <a:xfrm>
-            <a:off x="548640" y="2287092"/>
+            <a:off x="548640" y="2121992"/>
             <a:ext cx="164592" cy="330200"/>
           </a:xfrm>
           <a:prstGeom prst="rect">
@@ -15878,7 +18363,7 @@
             <a:r>
               <a:rPr lang="en-US" sz="2000" dirty="0">
                 <a:solidFill>
-                  <a:srgbClr val="8534F3"/>
+                  <a:srgbClr val="0EBE3D"/>
                 </a:solidFill>
                 <a:latin typeface="Mona Sans" pitchFamily="34" charset="0"/>
                 <a:ea typeface="Mona Sans" pitchFamily="34" charset="-122"/>
@@ -15898,7 +18383,7 @@
         </p:nvSpPr>
         <p:spPr>
           <a:xfrm>
-            <a:off x="804672" y="2287092"/>
+            <a:off x="804672" y="2121992"/>
             <a:ext cx="10838383" cy="330200"/>
           </a:xfrm>
           <a:prstGeom prst="rect">
@@ -15940,7 +18425,7 @@
         </p:nvSpPr>
         <p:spPr>
           <a:xfrm>
-            <a:off x="548640" y="2873324"/>
+            <a:off x="548640" y="2708224"/>
             <a:ext cx="164592" cy="330200"/>
           </a:xfrm>
           <a:prstGeom prst="rect">
@@ -15962,7 +18447,7 @@
             <a:r>
               <a:rPr lang="en-US" sz="2000" dirty="0">
                 <a:solidFill>
-                  <a:srgbClr val="8534F3"/>
+                  <a:srgbClr val="0EBE3D"/>
                 </a:solidFill>
                 <a:latin typeface="Mona Sans" pitchFamily="34" charset="0"/>
                 <a:ea typeface="Mona Sans" pitchFamily="34" charset="-122"/>
@@ -15982,7 +18467,7 @@
         </p:nvSpPr>
         <p:spPr>
           <a:xfrm>
-            <a:off x="804672" y="2873324"/>
+            <a:off x="804672" y="2708224"/>
             <a:ext cx="10838383" cy="660400"/>
           </a:xfrm>
           <a:prstGeom prst="rect">
@@ -16044,7 +18529,7 @@
         </p:nvSpPr>
         <p:spPr>
           <a:xfrm>
-            <a:off x="548640" y="3789756"/>
+            <a:off x="548640" y="3624656"/>
             <a:ext cx="164592" cy="330200"/>
           </a:xfrm>
           <a:prstGeom prst="rect">
@@ -16066,7 +18551,7 @@
             <a:r>
               <a:rPr lang="en-US" sz="2000" dirty="0">
                 <a:solidFill>
-                  <a:srgbClr val="8534F3"/>
+                  <a:srgbClr val="0EBE3D"/>
                 </a:solidFill>
                 <a:latin typeface="Mona Sans" pitchFamily="34" charset="0"/>
                 <a:ea typeface="Mona Sans" pitchFamily="34" charset="-122"/>
@@ -16086,8 +18571,8 @@
         </p:nvSpPr>
         <p:spPr>
           <a:xfrm>
-            <a:off x="804672" y="3789756"/>
-            <a:ext cx="10838383" cy="330200"/>
+            <a:off x="804672" y="3624656"/>
+            <a:ext cx="10838383" cy="660400"/>
           </a:xfrm>
           <a:prstGeom prst="rect">
             <a:avLst/>
@@ -16114,10 +18599,30 @@
                 <a:ea typeface="Mona Sans" pitchFamily="34" charset="-122"/>
                 <a:cs typeface="Mona Sans" pitchFamily="34" charset="-120"/>
               </a:rPr>
-              <a:t>A custom agent is a named specialist with its own role instructions and selected tools.</a:t>
+              <a:t>A custom agent is a named role with focused instructions and selected tools—not a newly</a:t>
             </a:r>
             <a:endParaRPr lang="en-US" sz="2000" dirty="0"/>
           </a:p>
+          <a:p>
+            <a:pPr algn="l" indent="0" marL="0">
+              <a:lnSpc>
+                <a:spcPct val="130000"/>
+              </a:lnSpc>
+              <a:buNone/>
+            </a:pPr>
+            <a:r>
+              <a:rPr lang="en-US" sz="2000" dirty="0">
+                <a:solidFill>
+                  <a:srgbClr val="B0BAC3"/>
+                </a:solidFill>
+                <a:latin typeface="Mona Sans" pitchFamily="34" charset="0"/>
+                <a:ea typeface="Mona Sans" pitchFamily="34" charset="-122"/>
+                <a:cs typeface="Mona Sans" pitchFamily="34" charset="-120"/>
+              </a:rPr>
+              <a:t>trained model.</a:t>
+            </a:r>
+            <a:endParaRPr lang="en-US" sz="2000" dirty="0"/>
+          </a:p>
         </p:txBody>
       </p:sp>
       <p:sp>
@@ -16128,7 +18633,7 @@
         </p:nvSpPr>
         <p:spPr>
           <a:xfrm>
-            <a:off x="548640" y="4375988"/>
+            <a:off x="548640" y="4541088"/>
             <a:ext cx="164592" cy="330200"/>
           </a:xfrm>
           <a:prstGeom prst="rect">
@@ -16150,7 +18655,7 @@
             <a:r>
               <a:rPr lang="en-US" sz="2000" dirty="0">
                 <a:solidFill>
-                  <a:srgbClr val="8534F3"/>
+                  <a:srgbClr val="0EBE3D"/>
                 </a:solidFill>
                 <a:latin typeface="Mona Sans" pitchFamily="34" charset="0"/>
                 <a:ea typeface="Mona Sans" pitchFamily="34" charset="-122"/>
@@ -16170,7 +18675,7 @@
         </p:nvSpPr>
         <p:spPr>
           <a:xfrm>
-            <a:off x="804672" y="4375988"/>
+            <a:off x="804672" y="4541088"/>
             <a:ext cx="10838383" cy="660400"/>
           </a:xfrm>
           <a:prstGeom prst="rect">
@@ -16198,7 +18703,7 @@
                 <a:ea typeface="Mona Sans" pitchFamily="34" charset="-122"/>
                 <a:cs typeface="Mona Sans" pitchFamily="34" charset="-120"/>
               </a:rPr>
-              <a:t>Example: Book App Reviewer uses that role to create a read-only checklist; a person still</a:t>
+              <a:t>Example: Book App Reviewer is read-only; it reports findings, while a person decides what to</a:t>
             </a:r>
             <a:endParaRPr lang="en-US" sz="2000" dirty="0"/>
           </a:p>
@@ -16218,7 +18723,7 @@
                 <a:ea typeface="Mona Sans" pitchFamily="34" charset="-122"/>
                 <a:cs typeface="Mona Sans" pitchFamily="34" charset="-120"/>
               </a:rPr>
-              <a:t>verifies the diff and evidence.</a:t>
+              <a:t>change and verifies the result.</a:t>
             </a:r>
             <a:endParaRPr lang="en-US" sz="2000" dirty="0"/>
           </a:p>
